--- a/Intro/RISCV-MCU.pptx
+++ b/Intro/RISCV-MCU.pptx
@@ -13,7 +13,7 @@
     <p:sldMasterId id="2147483668" r:id="rId9"/>
   </p:sldMasterIdLst>
   <p:notesMasterIdLst>
-    <p:notesMasterId r:id="rId22"/>
+    <p:notesMasterId r:id="rId31"/>
   </p:notesMasterIdLst>
   <p:sldIdLst>
     <p:sldId id="256" r:id="rId10"/>
@@ -22,12 +22,21 @@
     <p:sldId id="279" r:id="rId13"/>
     <p:sldId id="257" r:id="rId14"/>
     <p:sldId id="271" r:id="rId15"/>
-    <p:sldId id="273" r:id="rId16"/>
-    <p:sldId id="275" r:id="rId17"/>
-    <p:sldId id="263" r:id="rId18"/>
-    <p:sldId id="280" r:id="rId19"/>
-    <p:sldId id="281" r:id="rId20"/>
-    <p:sldId id="264" r:id="rId21"/>
+    <p:sldId id="282" r:id="rId16"/>
+    <p:sldId id="285" r:id="rId17"/>
+    <p:sldId id="284" r:id="rId18"/>
+    <p:sldId id="286" r:id="rId19"/>
+    <p:sldId id="283" r:id="rId20"/>
+    <p:sldId id="273" r:id="rId21"/>
+    <p:sldId id="275" r:id="rId22"/>
+    <p:sldId id="290" r:id="rId23"/>
+    <p:sldId id="263" r:id="rId24"/>
+    <p:sldId id="272" r:id="rId25"/>
+    <p:sldId id="289" r:id="rId26"/>
+    <p:sldId id="280" r:id="rId27"/>
+    <p:sldId id="281" r:id="rId28"/>
+    <p:sldId id="264" r:id="rId29"/>
+    <p:sldId id="287" r:id="rId30"/>
   </p:sldIdLst>
   <p:sldSz cx="12192000" cy="6858000"/>
   <p:notesSz cx="6858000" cy="9144000"/>
@@ -769,9 +778,16 @@
             <a:ext cx="7124700" cy="4008438"/>
           </a:xfrm>
         </p:spPr>
+        <p:txBody>
+          <a:bodyPr/>
+          <a:lstStyle/>
+          <a:p>
+            <a:endParaRPr lang="en-US"/>
+          </a:p>
+        </p:txBody>
       </p:sp>
-      <mc:AlternateContent xmlns:mc="http://schemas.openxmlformats.org/markup-compatibility/2006">
-        <mc:Choice xmlns:a14="http://schemas.microsoft.com/office/drawing/2010/main" Requires="a14">
+      <mc:AlternateContent xmlns:mc="http://schemas.openxmlformats.org/markup-compatibility/2006" xmlns:a14="http://schemas.microsoft.com/office/drawing/2010/main">
+        <mc:Choice Requires="a14">
           <p:sp>
             <p:nvSpPr>
               <p:cNvPr id="3" name="備忘稿版面配置區 2"/>
@@ -1735,7 +1751,7 @@
             </p:txBody>
           </p:sp>
         </mc:Choice>
-        <mc:Fallback>
+        <mc:Fallback xmlns="">
           <p:sp>
             <p:nvSpPr>
               <p:cNvPr id="3" name="備忘稿版面配置區 2"/>
@@ -2892,6 +2908,93 @@
 </p:sldLayout>
 </file>
 
+<file path=ppt/slideLayouts/slideLayout10.xml><?xml version="1.0" encoding="utf-8"?>
+<p:sldLayout xmlns:a="http://schemas.openxmlformats.org/drawingml/2006/main" xmlns:r="http://schemas.openxmlformats.org/officeDocument/2006/relationships" xmlns:p="http://schemas.openxmlformats.org/presentationml/2006/main" type="blank" preserve="1">
+  <p:cSld name="PICTURE_WITH_CAPTION_TEXT">
+    <p:spTree>
+      <p:nvGrpSpPr>
+        <p:cNvPr id="1" name=""/>
+        <p:cNvGrpSpPr/>
+        <p:nvPr/>
+      </p:nvGrpSpPr>
+      <p:grpSpPr>
+        <a:xfrm>
+          <a:off x="0" y="0"/>
+          <a:ext cx="0" cy="0"/>
+          <a:chOff x="0" y="0"/>
+          <a:chExt cx="0" cy="0"/>
+        </a:xfrm>
+      </p:grpSpPr>
+      <p:sp>
+        <p:nvSpPr>
+          <p:cNvPr id="2" name="PlaceHolder 1"/>
+          <p:cNvSpPr>
+            <a:spLocks noGrp="1"/>
+          </p:cNvSpPr>
+          <p:nvPr>
+            <p:ph type="ftr" idx="30"/>
+          </p:nvPr>
+        </p:nvSpPr>
+        <p:spPr/>
+        <p:txBody>
+          <a:bodyPr/>
+          <a:lstStyle/>
+          <a:p>
+            <a:r>
+              <a:t>Footer</a:t>
+            </a:r>
+          </a:p>
+        </p:txBody>
+      </p:sp>
+      <p:sp>
+        <p:nvSpPr>
+          <p:cNvPr id="3" name="PlaceHolder 2"/>
+          <p:cNvSpPr>
+            <a:spLocks noGrp="1"/>
+          </p:cNvSpPr>
+          <p:nvPr>
+            <p:ph type="sldNum" idx="31"/>
+          </p:nvPr>
+        </p:nvSpPr>
+        <p:spPr/>
+        <p:txBody>
+          <a:bodyPr/>
+          <a:lstStyle/>
+          <a:p>
+            <a:fld id="{16774CDD-D255-4571-A23A-6C752D253CB0}" type="slidenum">
+              <a:t>‹#›</a:t>
+            </a:fld>
+            <a:endParaRPr/>
+          </a:p>
+        </p:txBody>
+      </p:sp>
+      <p:sp>
+        <p:nvSpPr>
+          <p:cNvPr id="4" name="PlaceHolder 3"/>
+          <p:cNvSpPr>
+            <a:spLocks noGrp="1"/>
+          </p:cNvSpPr>
+          <p:nvPr>
+            <p:ph type="dt" idx="32"/>
+          </p:nvPr>
+        </p:nvSpPr>
+        <p:spPr/>
+        <p:txBody>
+          <a:bodyPr/>
+          <a:lstStyle/>
+          <a:p>
+            <a:endParaRPr/>
+          </a:p>
+        </p:txBody>
+      </p:sp>
+    </p:spTree>
+  </p:cSld>
+  <p:clrMapOvr>
+    <a:masterClrMapping/>
+  </p:clrMapOvr>
+</p:sldLayout>
+</file>
+
 <file path=ppt/slideLayouts/slideLayout2.xml><?xml version="1.0" encoding="utf-8"?>
 <p:sldLayout xmlns:a="http://schemas.openxmlformats.org/drawingml/2006/main" xmlns:r="http://schemas.openxmlformats.org/officeDocument/2006/relationships" xmlns:p="http://schemas.openxmlformats.org/presentationml/2006/main" type="vertTitleAndTx" preserve="1">
   <p:cSld name="VERTICAL_TITLE_AND_VERTICAL_TEXT">
@@ -3152,6 +3255,777 @@
 </file>
 
 <file path=ppt/slideLayouts/slideLayout4.xml><?xml version="1.0" encoding="utf-8"?>
+<p:sldLayout xmlns:a="http://schemas.openxmlformats.org/drawingml/2006/main" xmlns:r="http://schemas.openxmlformats.org/officeDocument/2006/relationships" xmlns:p="http://schemas.openxmlformats.org/presentationml/2006/main" matchingName="標題及物件" type="obj">
+  <p:cSld name="標題及物件">
+    <p:spTree>
+      <p:nvGrpSpPr>
+        <p:cNvPr id="1" name="Shape 23"/>
+        <p:cNvGrpSpPr/>
+        <p:nvPr/>
+      </p:nvGrpSpPr>
+      <p:grpSpPr>
+        <a:xfrm>
+          <a:off x="0" y="0"/>
+          <a:ext cx="0" cy="0"/>
+          <a:chOff x="0" y="0"/>
+          <a:chExt cx="0" cy="0"/>
+        </a:xfrm>
+      </p:grpSpPr>
+      <p:sp>
+        <p:nvSpPr>
+          <p:cNvPr id="24" name="Google Shape;24;p17"/>
+          <p:cNvSpPr txBox="1">
+            <a:spLocks noGrp="1"/>
+          </p:cNvSpPr>
+          <p:nvPr>
+            <p:ph type="title"/>
+          </p:nvPr>
+        </p:nvSpPr>
+        <p:spPr>
+          <a:xfrm>
+            <a:off x="1016000" y="0"/>
+            <a:ext cx="10972800" cy="1143000"/>
+          </a:xfrm>
+          <a:prstGeom prst="rect">
+            <a:avLst/>
+          </a:prstGeom>
+          <a:noFill/>
+          <a:ln>
+            <a:noFill/>
+          </a:ln>
+        </p:spPr>
+        <p:txBody>
+          <a:bodyPr spcFirstLastPara="1" wrap="square" lIns="91425" tIns="45700" rIns="91425" bIns="45700" anchor="ctr" anchorCtr="0">
+            <a:noAutofit/>
+          </a:bodyPr>
+          <a:lstStyle>
+            <a:lvl1pPr lvl="0" algn="l">
+              <a:spcBef>
+                <a:spcPts val="0"/>
+              </a:spcBef>
+              <a:spcAft>
+                <a:spcPts val="0"/>
+              </a:spcAft>
+              <a:buSzPts val="1400"/>
+              <a:buNone/>
+              <a:defRPr/>
+            </a:lvl1pPr>
+            <a:lvl2pPr lvl="1" algn="l">
+              <a:spcBef>
+                <a:spcPts val="0"/>
+              </a:spcBef>
+              <a:spcAft>
+                <a:spcPts val="0"/>
+              </a:spcAft>
+              <a:buSzPts val="1400"/>
+              <a:buNone/>
+              <a:defRPr/>
+            </a:lvl2pPr>
+            <a:lvl3pPr lvl="2" algn="l">
+              <a:spcBef>
+                <a:spcPts val="0"/>
+              </a:spcBef>
+              <a:spcAft>
+                <a:spcPts val="0"/>
+              </a:spcAft>
+              <a:buSzPts val="1400"/>
+              <a:buNone/>
+              <a:defRPr/>
+            </a:lvl3pPr>
+            <a:lvl4pPr lvl="3" algn="l">
+              <a:spcBef>
+                <a:spcPts val="0"/>
+              </a:spcBef>
+              <a:spcAft>
+                <a:spcPts val="0"/>
+              </a:spcAft>
+              <a:buSzPts val="1400"/>
+              <a:buNone/>
+              <a:defRPr/>
+            </a:lvl4pPr>
+            <a:lvl5pPr lvl="4" algn="l">
+              <a:spcBef>
+                <a:spcPts val="0"/>
+              </a:spcBef>
+              <a:spcAft>
+                <a:spcPts val="0"/>
+              </a:spcAft>
+              <a:buSzPts val="1400"/>
+              <a:buNone/>
+              <a:defRPr/>
+            </a:lvl5pPr>
+            <a:lvl6pPr lvl="5" algn="l">
+              <a:spcBef>
+                <a:spcPts val="0"/>
+              </a:spcBef>
+              <a:spcAft>
+                <a:spcPts val="0"/>
+              </a:spcAft>
+              <a:buSzPts val="1400"/>
+              <a:buNone/>
+              <a:defRPr/>
+            </a:lvl6pPr>
+            <a:lvl7pPr lvl="6" algn="l">
+              <a:spcBef>
+                <a:spcPts val="0"/>
+              </a:spcBef>
+              <a:spcAft>
+                <a:spcPts val="0"/>
+              </a:spcAft>
+              <a:buSzPts val="1400"/>
+              <a:buNone/>
+              <a:defRPr/>
+            </a:lvl7pPr>
+            <a:lvl8pPr lvl="7" algn="l">
+              <a:spcBef>
+                <a:spcPts val="0"/>
+              </a:spcBef>
+              <a:spcAft>
+                <a:spcPts val="0"/>
+              </a:spcAft>
+              <a:buSzPts val="1400"/>
+              <a:buNone/>
+              <a:defRPr/>
+            </a:lvl8pPr>
+            <a:lvl9pPr lvl="8" algn="l">
+              <a:spcBef>
+                <a:spcPts val="0"/>
+              </a:spcBef>
+              <a:spcAft>
+                <a:spcPts val="0"/>
+              </a:spcAft>
+              <a:buSzPts val="1400"/>
+              <a:buNone/>
+              <a:defRPr/>
+            </a:lvl9pPr>
+          </a:lstStyle>
+          <a:p>
+            <a:endParaRPr/>
+          </a:p>
+        </p:txBody>
+      </p:sp>
+      <p:sp>
+        <p:nvSpPr>
+          <p:cNvPr id="25" name="Google Shape;25;p17"/>
+          <p:cNvSpPr txBox="1">
+            <a:spLocks noGrp="1"/>
+          </p:cNvSpPr>
+          <p:nvPr>
+            <p:ph type="body" idx="1"/>
+          </p:nvPr>
+        </p:nvSpPr>
+        <p:spPr>
+          <a:xfrm>
+            <a:off x="334963" y="1482725"/>
+            <a:ext cx="11615737" cy="5113338"/>
+          </a:xfrm>
+          <a:prstGeom prst="rect">
+            <a:avLst/>
+          </a:prstGeom>
+          <a:noFill/>
+          <a:ln>
+            <a:noFill/>
+          </a:ln>
+        </p:spPr>
+        <p:txBody>
+          <a:bodyPr spcFirstLastPara="1" wrap="square" lIns="91425" tIns="45700" rIns="91425" bIns="45700" anchor="t" anchorCtr="0">
+            <a:noAutofit/>
+          </a:bodyPr>
+          <a:lstStyle>
+            <a:lvl1pPr marL="457200" lvl="0" indent="-342900" algn="l">
+              <a:spcBef>
+                <a:spcPts val="360"/>
+              </a:spcBef>
+              <a:spcAft>
+                <a:spcPts val="0"/>
+              </a:spcAft>
+              <a:buClr>
+                <a:schemeClr val="dk1"/>
+              </a:buClr>
+              <a:buSzPts val="1800"/>
+              <a:buChar char="•"/>
+              <a:defRPr/>
+            </a:lvl1pPr>
+            <a:lvl2pPr marL="914400" lvl="1" indent="-342900" algn="l">
+              <a:spcBef>
+                <a:spcPts val="360"/>
+              </a:spcBef>
+              <a:spcAft>
+                <a:spcPts val="0"/>
+              </a:spcAft>
+              <a:buClr>
+                <a:schemeClr val="dk1"/>
+              </a:buClr>
+              <a:buSzPts val="1800"/>
+              <a:buChar char="•"/>
+              <a:defRPr/>
+            </a:lvl2pPr>
+            <a:lvl3pPr marL="1371600" lvl="2" indent="-342900" algn="l">
+              <a:spcBef>
+                <a:spcPts val="360"/>
+              </a:spcBef>
+              <a:spcAft>
+                <a:spcPts val="0"/>
+              </a:spcAft>
+              <a:buClr>
+                <a:schemeClr val="dk1"/>
+              </a:buClr>
+              <a:buSzPts val="1800"/>
+              <a:buChar char="•"/>
+              <a:defRPr/>
+            </a:lvl3pPr>
+            <a:lvl4pPr marL="1828800" lvl="3" indent="-342900" algn="l">
+              <a:spcBef>
+                <a:spcPts val="360"/>
+              </a:spcBef>
+              <a:spcAft>
+                <a:spcPts val="0"/>
+              </a:spcAft>
+              <a:buClr>
+                <a:schemeClr val="dk1"/>
+              </a:buClr>
+              <a:buSzPts val="1800"/>
+              <a:buChar char="•"/>
+              <a:defRPr/>
+            </a:lvl4pPr>
+            <a:lvl5pPr marL="2286000" lvl="4" indent="-342900" algn="l">
+              <a:spcBef>
+                <a:spcPts val="360"/>
+              </a:spcBef>
+              <a:spcAft>
+                <a:spcPts val="0"/>
+              </a:spcAft>
+              <a:buClr>
+                <a:schemeClr val="dk1"/>
+              </a:buClr>
+              <a:buSzPts val="1800"/>
+              <a:buChar char="•"/>
+              <a:defRPr/>
+            </a:lvl5pPr>
+            <a:lvl6pPr marL="2743200" lvl="5" indent="-342900" algn="l">
+              <a:spcBef>
+                <a:spcPts val="360"/>
+              </a:spcBef>
+              <a:spcAft>
+                <a:spcPts val="0"/>
+              </a:spcAft>
+              <a:buClr>
+                <a:schemeClr val="dk1"/>
+              </a:buClr>
+              <a:buSzPts val="1800"/>
+              <a:buChar char="•"/>
+              <a:defRPr/>
+            </a:lvl6pPr>
+            <a:lvl7pPr marL="3200400" lvl="6" indent="-342900" algn="l">
+              <a:spcBef>
+                <a:spcPts val="360"/>
+              </a:spcBef>
+              <a:spcAft>
+                <a:spcPts val="0"/>
+              </a:spcAft>
+              <a:buClr>
+                <a:schemeClr val="dk1"/>
+              </a:buClr>
+              <a:buSzPts val="1800"/>
+              <a:buChar char="•"/>
+              <a:defRPr/>
+            </a:lvl7pPr>
+            <a:lvl8pPr marL="3657600" lvl="7" indent="-342900" algn="l">
+              <a:spcBef>
+                <a:spcPts val="360"/>
+              </a:spcBef>
+              <a:spcAft>
+                <a:spcPts val="0"/>
+              </a:spcAft>
+              <a:buClr>
+                <a:schemeClr val="dk1"/>
+              </a:buClr>
+              <a:buSzPts val="1800"/>
+              <a:buChar char="•"/>
+              <a:defRPr/>
+            </a:lvl8pPr>
+            <a:lvl9pPr marL="4114800" lvl="8" indent="-342900" algn="l">
+              <a:spcBef>
+                <a:spcPts val="360"/>
+              </a:spcBef>
+              <a:spcAft>
+                <a:spcPts val="0"/>
+              </a:spcAft>
+              <a:buClr>
+                <a:schemeClr val="dk1"/>
+              </a:buClr>
+              <a:buSzPts val="1800"/>
+              <a:buChar char="•"/>
+              <a:defRPr/>
+            </a:lvl9pPr>
+          </a:lstStyle>
+          <a:p>
+            <a:endParaRPr/>
+          </a:p>
+        </p:txBody>
+      </p:sp>
+      <p:sp>
+        <p:nvSpPr>
+          <p:cNvPr id="26" name="Google Shape;26;p17"/>
+          <p:cNvSpPr txBox="1">
+            <a:spLocks noGrp="1"/>
+          </p:cNvSpPr>
+          <p:nvPr>
+            <p:ph type="dt" idx="10"/>
+          </p:nvPr>
+        </p:nvSpPr>
+        <p:spPr>
+          <a:xfrm>
+            <a:off x="101600" y="6597650"/>
+            <a:ext cx="2540000" cy="260350"/>
+          </a:xfrm>
+          <a:prstGeom prst="rect">
+            <a:avLst/>
+          </a:prstGeom>
+          <a:noFill/>
+          <a:ln>
+            <a:noFill/>
+          </a:ln>
+        </p:spPr>
+        <p:txBody>
+          <a:bodyPr spcFirstLastPara="1" wrap="square" lIns="91425" tIns="45700" rIns="91425" bIns="45700" anchor="t" anchorCtr="0">
+            <a:noAutofit/>
+          </a:bodyPr>
+          <a:lstStyle>
+            <a:lvl1pPr lvl="0" algn="l">
+              <a:spcBef>
+                <a:spcPts val="0"/>
+              </a:spcBef>
+              <a:spcAft>
+                <a:spcPts val="0"/>
+              </a:spcAft>
+              <a:buSzPts val="1400"/>
+              <a:buNone/>
+              <a:defRPr/>
+            </a:lvl1pPr>
+            <a:lvl2pPr lvl="1" algn="l">
+              <a:spcBef>
+                <a:spcPts val="0"/>
+              </a:spcBef>
+              <a:spcAft>
+                <a:spcPts val="0"/>
+              </a:spcAft>
+              <a:buSzPts val="1400"/>
+              <a:buNone/>
+              <a:defRPr/>
+            </a:lvl2pPr>
+            <a:lvl3pPr lvl="2" algn="l">
+              <a:spcBef>
+                <a:spcPts val="0"/>
+              </a:spcBef>
+              <a:spcAft>
+                <a:spcPts val="0"/>
+              </a:spcAft>
+              <a:buSzPts val="1400"/>
+              <a:buNone/>
+              <a:defRPr/>
+            </a:lvl3pPr>
+            <a:lvl4pPr lvl="3" algn="l">
+              <a:spcBef>
+                <a:spcPts val="0"/>
+              </a:spcBef>
+              <a:spcAft>
+                <a:spcPts val="0"/>
+              </a:spcAft>
+              <a:buSzPts val="1400"/>
+              <a:buNone/>
+              <a:defRPr/>
+            </a:lvl4pPr>
+            <a:lvl5pPr lvl="4" algn="l">
+              <a:spcBef>
+                <a:spcPts val="0"/>
+              </a:spcBef>
+              <a:spcAft>
+                <a:spcPts val="0"/>
+              </a:spcAft>
+              <a:buSzPts val="1400"/>
+              <a:buNone/>
+              <a:defRPr/>
+            </a:lvl5pPr>
+            <a:lvl6pPr lvl="5" algn="l">
+              <a:spcBef>
+                <a:spcPts val="0"/>
+              </a:spcBef>
+              <a:spcAft>
+                <a:spcPts val="0"/>
+              </a:spcAft>
+              <a:buSzPts val="1400"/>
+              <a:buNone/>
+              <a:defRPr/>
+            </a:lvl6pPr>
+            <a:lvl7pPr lvl="6" algn="l">
+              <a:spcBef>
+                <a:spcPts val="0"/>
+              </a:spcBef>
+              <a:spcAft>
+                <a:spcPts val="0"/>
+              </a:spcAft>
+              <a:buSzPts val="1400"/>
+              <a:buNone/>
+              <a:defRPr/>
+            </a:lvl7pPr>
+            <a:lvl8pPr lvl="7" algn="l">
+              <a:spcBef>
+                <a:spcPts val="0"/>
+              </a:spcBef>
+              <a:spcAft>
+                <a:spcPts val="0"/>
+              </a:spcAft>
+              <a:buSzPts val="1400"/>
+              <a:buNone/>
+              <a:defRPr/>
+            </a:lvl8pPr>
+            <a:lvl9pPr lvl="8" algn="l">
+              <a:spcBef>
+                <a:spcPts val="0"/>
+              </a:spcBef>
+              <a:spcAft>
+                <a:spcPts val="0"/>
+              </a:spcAft>
+              <a:buSzPts val="1400"/>
+              <a:buNone/>
+              <a:defRPr/>
+            </a:lvl9pPr>
+          </a:lstStyle>
+          <a:p>
+            <a:endParaRPr/>
+          </a:p>
+        </p:txBody>
+      </p:sp>
+      <p:sp>
+        <p:nvSpPr>
+          <p:cNvPr id="27" name="Google Shape;27;p17"/>
+          <p:cNvSpPr txBox="1">
+            <a:spLocks noGrp="1"/>
+          </p:cNvSpPr>
+          <p:nvPr>
+            <p:ph type="ftr" idx="11"/>
+          </p:nvPr>
+        </p:nvSpPr>
+        <p:spPr>
+          <a:xfrm>
+            <a:off x="4267200" y="6597650"/>
+            <a:ext cx="3860800" cy="260350"/>
+          </a:xfrm>
+          <a:prstGeom prst="rect">
+            <a:avLst/>
+          </a:prstGeom>
+          <a:noFill/>
+          <a:ln>
+            <a:noFill/>
+          </a:ln>
+        </p:spPr>
+        <p:txBody>
+          <a:bodyPr spcFirstLastPara="1" wrap="square" lIns="91425" tIns="45700" rIns="91425" bIns="45700" anchor="t" anchorCtr="0">
+            <a:noAutofit/>
+          </a:bodyPr>
+          <a:lstStyle>
+            <a:lvl1pPr lvl="0" algn="ctr">
+              <a:spcBef>
+                <a:spcPts val="0"/>
+              </a:spcBef>
+              <a:spcAft>
+                <a:spcPts val="0"/>
+              </a:spcAft>
+              <a:buSzPts val="1400"/>
+              <a:buNone/>
+              <a:defRPr/>
+            </a:lvl1pPr>
+            <a:lvl2pPr lvl="1" algn="l">
+              <a:spcBef>
+                <a:spcPts val="0"/>
+              </a:spcBef>
+              <a:spcAft>
+                <a:spcPts val="0"/>
+              </a:spcAft>
+              <a:buSzPts val="1400"/>
+              <a:buNone/>
+              <a:defRPr/>
+            </a:lvl2pPr>
+            <a:lvl3pPr lvl="2" algn="l">
+              <a:spcBef>
+                <a:spcPts val="0"/>
+              </a:spcBef>
+              <a:spcAft>
+                <a:spcPts val="0"/>
+              </a:spcAft>
+              <a:buSzPts val="1400"/>
+              <a:buNone/>
+              <a:defRPr/>
+            </a:lvl3pPr>
+            <a:lvl4pPr lvl="3" algn="l">
+              <a:spcBef>
+                <a:spcPts val="0"/>
+              </a:spcBef>
+              <a:spcAft>
+                <a:spcPts val="0"/>
+              </a:spcAft>
+              <a:buSzPts val="1400"/>
+              <a:buNone/>
+              <a:defRPr/>
+            </a:lvl4pPr>
+            <a:lvl5pPr lvl="4" algn="l">
+              <a:spcBef>
+                <a:spcPts val="0"/>
+              </a:spcBef>
+              <a:spcAft>
+                <a:spcPts val="0"/>
+              </a:spcAft>
+              <a:buSzPts val="1400"/>
+              <a:buNone/>
+              <a:defRPr/>
+            </a:lvl5pPr>
+            <a:lvl6pPr lvl="5" algn="l">
+              <a:spcBef>
+                <a:spcPts val="0"/>
+              </a:spcBef>
+              <a:spcAft>
+                <a:spcPts val="0"/>
+              </a:spcAft>
+              <a:buSzPts val="1400"/>
+              <a:buNone/>
+              <a:defRPr/>
+            </a:lvl6pPr>
+            <a:lvl7pPr lvl="6" algn="l">
+              <a:spcBef>
+                <a:spcPts val="0"/>
+              </a:spcBef>
+              <a:spcAft>
+                <a:spcPts val="0"/>
+              </a:spcAft>
+              <a:buSzPts val="1400"/>
+              <a:buNone/>
+              <a:defRPr/>
+            </a:lvl7pPr>
+            <a:lvl8pPr lvl="7" algn="l">
+              <a:spcBef>
+                <a:spcPts val="0"/>
+              </a:spcBef>
+              <a:spcAft>
+                <a:spcPts val="0"/>
+              </a:spcAft>
+              <a:buSzPts val="1400"/>
+              <a:buNone/>
+              <a:defRPr/>
+            </a:lvl8pPr>
+            <a:lvl9pPr lvl="8" algn="l">
+              <a:spcBef>
+                <a:spcPts val="0"/>
+              </a:spcBef>
+              <a:spcAft>
+                <a:spcPts val="0"/>
+              </a:spcAft>
+              <a:buSzPts val="1400"/>
+              <a:buNone/>
+              <a:defRPr/>
+            </a:lvl9pPr>
+          </a:lstStyle>
+          <a:p>
+            <a:endParaRPr/>
+          </a:p>
+        </p:txBody>
+      </p:sp>
+      <p:sp>
+        <p:nvSpPr>
+          <p:cNvPr id="28" name="Google Shape;28;p17"/>
+          <p:cNvSpPr txBox="1">
+            <a:spLocks noGrp="1"/>
+          </p:cNvSpPr>
+          <p:nvPr>
+            <p:ph type="sldNum" idx="12"/>
+          </p:nvPr>
+        </p:nvSpPr>
+        <p:spPr>
+          <a:xfrm>
+            <a:off x="9550400" y="6597650"/>
+            <a:ext cx="2540000" cy="260350"/>
+          </a:xfrm>
+          <a:prstGeom prst="rect">
+            <a:avLst/>
+          </a:prstGeom>
+          <a:noFill/>
+          <a:ln>
+            <a:noFill/>
+          </a:ln>
+        </p:spPr>
+        <p:txBody>
+          <a:bodyPr spcFirstLastPara="1" wrap="square" lIns="91425" tIns="45700" rIns="91425" bIns="45700" anchor="t" anchorCtr="0">
+            <a:noAutofit/>
+          </a:bodyPr>
+          <a:lstStyle>
+            <a:lvl1pPr marL="0" lvl="0" indent="0" algn="r">
+              <a:spcBef>
+                <a:spcPts val="0"/>
+              </a:spcBef>
+              <a:buNone/>
+              <a:defRPr sz="1400" b="1" i="0" u="none" strike="noStrike" cap="none">
+                <a:solidFill>
+                  <a:srgbClr val="0033CC"/>
+                </a:solidFill>
+                <a:latin typeface="Calibri"/>
+                <a:ea typeface="Calibri"/>
+                <a:cs typeface="Calibri"/>
+                <a:sym typeface="Calibri"/>
+              </a:defRPr>
+            </a:lvl1pPr>
+            <a:lvl2pPr marL="0" lvl="1" indent="0" algn="r">
+              <a:spcBef>
+                <a:spcPts val="0"/>
+              </a:spcBef>
+              <a:buNone/>
+              <a:defRPr sz="1400" b="1" i="0" u="none" strike="noStrike" cap="none">
+                <a:solidFill>
+                  <a:srgbClr val="0033CC"/>
+                </a:solidFill>
+                <a:latin typeface="Calibri"/>
+                <a:ea typeface="Calibri"/>
+                <a:cs typeface="Calibri"/>
+                <a:sym typeface="Calibri"/>
+              </a:defRPr>
+            </a:lvl2pPr>
+            <a:lvl3pPr marL="0" lvl="2" indent="0" algn="r">
+              <a:spcBef>
+                <a:spcPts val="0"/>
+              </a:spcBef>
+              <a:buNone/>
+              <a:defRPr sz="1400" b="1" i="0" u="none" strike="noStrike" cap="none">
+                <a:solidFill>
+                  <a:srgbClr val="0033CC"/>
+                </a:solidFill>
+                <a:latin typeface="Calibri"/>
+                <a:ea typeface="Calibri"/>
+                <a:cs typeface="Calibri"/>
+                <a:sym typeface="Calibri"/>
+              </a:defRPr>
+            </a:lvl3pPr>
+            <a:lvl4pPr marL="0" lvl="3" indent="0" algn="r">
+              <a:spcBef>
+                <a:spcPts val="0"/>
+              </a:spcBef>
+              <a:buNone/>
+              <a:defRPr sz="1400" b="1" i="0" u="none" strike="noStrike" cap="none">
+                <a:solidFill>
+                  <a:srgbClr val="0033CC"/>
+                </a:solidFill>
+                <a:latin typeface="Calibri"/>
+                <a:ea typeface="Calibri"/>
+                <a:cs typeface="Calibri"/>
+                <a:sym typeface="Calibri"/>
+              </a:defRPr>
+            </a:lvl4pPr>
+            <a:lvl5pPr marL="0" lvl="4" indent="0" algn="r">
+              <a:spcBef>
+                <a:spcPts val="0"/>
+              </a:spcBef>
+              <a:buNone/>
+              <a:defRPr sz="1400" b="1" i="0" u="none" strike="noStrike" cap="none">
+                <a:solidFill>
+                  <a:srgbClr val="0033CC"/>
+                </a:solidFill>
+                <a:latin typeface="Calibri"/>
+                <a:ea typeface="Calibri"/>
+                <a:cs typeface="Calibri"/>
+                <a:sym typeface="Calibri"/>
+              </a:defRPr>
+            </a:lvl5pPr>
+            <a:lvl6pPr marL="0" lvl="5" indent="0" algn="r">
+              <a:spcBef>
+                <a:spcPts val="0"/>
+              </a:spcBef>
+              <a:buNone/>
+              <a:defRPr sz="1400" b="1" i="0" u="none" strike="noStrike" cap="none">
+                <a:solidFill>
+                  <a:srgbClr val="0033CC"/>
+                </a:solidFill>
+                <a:latin typeface="Calibri"/>
+                <a:ea typeface="Calibri"/>
+                <a:cs typeface="Calibri"/>
+                <a:sym typeface="Calibri"/>
+              </a:defRPr>
+            </a:lvl6pPr>
+            <a:lvl7pPr marL="0" lvl="6" indent="0" algn="r">
+              <a:spcBef>
+                <a:spcPts val="0"/>
+              </a:spcBef>
+              <a:buNone/>
+              <a:defRPr sz="1400" b="1" i="0" u="none" strike="noStrike" cap="none">
+                <a:solidFill>
+                  <a:srgbClr val="0033CC"/>
+                </a:solidFill>
+                <a:latin typeface="Calibri"/>
+                <a:ea typeface="Calibri"/>
+                <a:cs typeface="Calibri"/>
+                <a:sym typeface="Calibri"/>
+              </a:defRPr>
+            </a:lvl7pPr>
+            <a:lvl8pPr marL="0" lvl="7" indent="0" algn="r">
+              <a:spcBef>
+                <a:spcPts val="0"/>
+              </a:spcBef>
+              <a:buNone/>
+              <a:defRPr sz="1400" b="1" i="0" u="none" strike="noStrike" cap="none">
+                <a:solidFill>
+                  <a:srgbClr val="0033CC"/>
+                </a:solidFill>
+                <a:latin typeface="Calibri"/>
+                <a:ea typeface="Calibri"/>
+                <a:cs typeface="Calibri"/>
+                <a:sym typeface="Calibri"/>
+              </a:defRPr>
+            </a:lvl8pPr>
+            <a:lvl9pPr marL="0" lvl="8" indent="0" algn="r">
+              <a:spcBef>
+                <a:spcPts val="0"/>
+              </a:spcBef>
+              <a:buNone/>
+              <a:defRPr sz="1400" b="1" i="0" u="none" strike="noStrike" cap="none">
+                <a:solidFill>
+                  <a:srgbClr val="0033CC"/>
+                </a:solidFill>
+                <a:latin typeface="Calibri"/>
+                <a:ea typeface="Calibri"/>
+                <a:cs typeface="Calibri"/>
+                <a:sym typeface="Calibri"/>
+              </a:defRPr>
+            </a:lvl9pPr>
+          </a:lstStyle>
+          <a:p>
+            <a:pPr marL="0" lvl="0" indent="0" algn="r" rtl="0">
+              <a:spcBef>
+                <a:spcPts val="0"/>
+              </a:spcBef>
+              <a:spcAft>
+                <a:spcPts val="0"/>
+              </a:spcAft>
+              <a:buNone/>
+            </a:pPr>
+            <a:fld id="{00000000-1234-1234-1234-123412341234}" type="slidenum">
+              <a:rPr lang="en-US"/>
+              <a:t>‹#›</a:t>
+            </a:fld>
+            <a:endParaRPr/>
+          </a:p>
+        </p:txBody>
+      </p:sp>
+    </p:spTree>
+    <p:extLst>
+      <p:ext uri="{BB962C8B-B14F-4D97-AF65-F5344CB8AC3E}">
+        <p14:creationId xmlns:p14="http://schemas.microsoft.com/office/powerpoint/2010/main" val="4237483197"/>
+      </p:ext>
+    </p:extLst>
+  </p:cSld>
+  <p:clrMapOvr>
+    <a:masterClrMapping/>
+  </p:clrMapOvr>
+</p:sldLayout>
+</file>
+
+<file path=ppt/slideLayouts/slideLayout5.xml><?xml version="1.0" encoding="utf-8"?>
 <p:sldLayout xmlns:a="http://schemas.openxmlformats.org/drawingml/2006/main" xmlns:r="http://schemas.openxmlformats.org/officeDocument/2006/relationships" xmlns:p="http://schemas.openxmlformats.org/presentationml/2006/main" type="blank" preserve="1">
   <p:cSld name="SECTION_HEADER">
     <p:spTree>
@@ -3238,7 +4112,7 @@
 </p:sldLayout>
 </file>
 
-<file path=ppt/slideLayouts/slideLayout5.xml><?xml version="1.0" encoding="utf-8"?>
+<file path=ppt/slideLayouts/slideLayout6.xml><?xml version="1.0" encoding="utf-8"?>
 <p:sldLayout xmlns:a="http://schemas.openxmlformats.org/drawingml/2006/main" xmlns:r="http://schemas.openxmlformats.org/officeDocument/2006/relationships" xmlns:p="http://schemas.openxmlformats.org/presentationml/2006/main" type="twoObj" preserve="1">
   <p:cSld name="TWO_OBJECTS">
     <p:spTree>
@@ -3454,7 +4328,7 @@
 </p:sldLayout>
 </file>
 
-<file path=ppt/slideLayouts/slideLayout6.xml><?xml version="1.0" encoding="utf-8"?>
+<file path=ppt/slideLayouts/slideLayout7.xml><?xml version="1.0" encoding="utf-8"?>
 <p:sldLayout xmlns:a="http://schemas.openxmlformats.org/drawingml/2006/main" xmlns:r="http://schemas.openxmlformats.org/officeDocument/2006/relationships" xmlns:p="http://schemas.openxmlformats.org/presentationml/2006/main" type="blank" preserve="1">
   <p:cSld name="TWO_OBJECTS_WITH_TEXT">
     <p:spTree>
@@ -3541,7 +4415,7 @@
 </p:sldLayout>
 </file>
 
-<file path=ppt/slideLayouts/slideLayout7.xml><?xml version="1.0" encoding="utf-8"?>
+<file path=ppt/slideLayouts/slideLayout8.xml><?xml version="1.0" encoding="utf-8"?>
 <p:sldLayout xmlns:a="http://schemas.openxmlformats.org/drawingml/2006/main" xmlns:r="http://schemas.openxmlformats.org/officeDocument/2006/relationships" xmlns:p="http://schemas.openxmlformats.org/presentationml/2006/main" type="titleOnly" preserve="1">
   <p:cSld name="TITLE_ONLY">
     <p:spTree>
@@ -3669,7 +4543,7 @@
 </p:sldLayout>
 </file>
 
-<file path=ppt/slideLayouts/slideLayout8.xml><?xml version="1.0" encoding="utf-8"?>
+<file path=ppt/slideLayouts/slideLayout9.xml><?xml version="1.0" encoding="utf-8"?>
 <p:sldLayout xmlns:a="http://schemas.openxmlformats.org/drawingml/2006/main" xmlns:r="http://schemas.openxmlformats.org/officeDocument/2006/relationships" xmlns:p="http://schemas.openxmlformats.org/presentationml/2006/main" type="blank" preserve="1">
   <p:cSld name="BLANK">
     <p:spTree>
@@ -3737,93 +4611,6 @@
           </p:cNvSpPr>
           <p:nvPr>
             <p:ph type="dt" idx="26"/>
-          </p:nvPr>
-        </p:nvSpPr>
-        <p:spPr/>
-        <p:txBody>
-          <a:bodyPr/>
-          <a:lstStyle/>
-          <a:p>
-            <a:endParaRPr/>
-          </a:p>
-        </p:txBody>
-      </p:sp>
-    </p:spTree>
-  </p:cSld>
-  <p:clrMapOvr>
-    <a:masterClrMapping/>
-  </p:clrMapOvr>
-</p:sldLayout>
-</file>
-
-<file path=ppt/slideLayouts/slideLayout9.xml><?xml version="1.0" encoding="utf-8"?>
-<p:sldLayout xmlns:a="http://schemas.openxmlformats.org/drawingml/2006/main" xmlns:r="http://schemas.openxmlformats.org/officeDocument/2006/relationships" xmlns:p="http://schemas.openxmlformats.org/presentationml/2006/main" type="blank" preserve="1">
-  <p:cSld name="PICTURE_WITH_CAPTION_TEXT">
-    <p:spTree>
-      <p:nvGrpSpPr>
-        <p:cNvPr id="1" name=""/>
-        <p:cNvGrpSpPr/>
-        <p:nvPr/>
-      </p:nvGrpSpPr>
-      <p:grpSpPr>
-        <a:xfrm>
-          <a:off x="0" y="0"/>
-          <a:ext cx="0" cy="0"/>
-          <a:chOff x="0" y="0"/>
-          <a:chExt cx="0" cy="0"/>
-        </a:xfrm>
-      </p:grpSpPr>
-      <p:sp>
-        <p:nvSpPr>
-          <p:cNvPr id="2" name="PlaceHolder 1"/>
-          <p:cNvSpPr>
-            <a:spLocks noGrp="1"/>
-          </p:cNvSpPr>
-          <p:nvPr>
-            <p:ph type="ftr" idx="30"/>
-          </p:nvPr>
-        </p:nvSpPr>
-        <p:spPr/>
-        <p:txBody>
-          <a:bodyPr/>
-          <a:lstStyle/>
-          <a:p>
-            <a:r>
-              <a:t>Footer</a:t>
-            </a:r>
-          </a:p>
-        </p:txBody>
-      </p:sp>
-      <p:sp>
-        <p:nvSpPr>
-          <p:cNvPr id="3" name="PlaceHolder 2"/>
-          <p:cNvSpPr>
-            <a:spLocks noGrp="1"/>
-          </p:cNvSpPr>
-          <p:nvPr>
-            <p:ph type="sldNum" idx="31"/>
-          </p:nvPr>
-        </p:nvSpPr>
-        <p:spPr/>
-        <p:txBody>
-          <a:bodyPr/>
-          <a:lstStyle/>
-          <a:p>
-            <a:fld id="{16774CDD-D255-4571-A23A-6C752D253CB0}" type="slidenum">
-              <a:t>‹#›</a:t>
-            </a:fld>
-            <a:endParaRPr/>
-          </a:p>
-        </p:txBody>
-      </p:sp>
-      <p:sp>
-        <p:nvSpPr>
-          <p:cNvPr id="4" name="PlaceHolder 3"/>
-          <p:cNvSpPr>
-            <a:spLocks noGrp="1"/>
-          </p:cNvSpPr>
-          <p:nvPr>
-            <p:ph type="dt" idx="32"/>
           </p:nvPr>
         </p:nvSpPr>
         <p:spPr/>
@@ -5137,7 +5924,7 @@
           <p:nvPr/>
         </p:nvPicPr>
         <p:blipFill>
-          <a:blip r:embed="rId3"/>
+          <a:blip r:embed="rId4"/>
           <a:stretch/>
         </p:blipFill>
         <p:spPr>
@@ -5580,6 +6367,7 @@
   <p:clrMap bg1="lt1" tx1="dk1" bg2="lt2" tx2="dk2" accent1="accent1" accent2="accent2" accent3="accent3" accent4="accent4" accent5="accent5" accent6="accent6" hlink="hlink" folHlink="folHlink"/>
   <p:sldLayoutIdLst>
     <p:sldLayoutId id="2147483655" r:id="rId1"/>
+    <p:sldLayoutId id="2147483670" r:id="rId2"/>
   </p:sldLayoutIdLst>
   <p:txStyles>
     <p:titleStyle>
@@ -9688,6 +10476,3714 @@
         <p:cNvPr id="1" name="">
           <a:extLst>
             <a:ext uri="{FF2B5EF4-FFF2-40B4-BE49-F238E27FC236}">
+              <a16:creationId xmlns:a16="http://schemas.microsoft.com/office/drawing/2014/main" id="{4F0A9BC7-1AC6-8836-FEB4-E0644C25B981}"/>
+            </a:ext>
+          </a:extLst>
+        </p:cNvPr>
+        <p:cNvGrpSpPr/>
+        <p:nvPr/>
+      </p:nvGrpSpPr>
+      <p:grpSpPr>
+        <a:xfrm>
+          <a:off x="0" y="0"/>
+          <a:ext cx="0" cy="0"/>
+          <a:chOff x="0" y="0"/>
+          <a:chExt cx="0" cy="0"/>
+        </a:xfrm>
+      </p:grpSpPr>
+      <p:pic>
+        <p:nvPicPr>
+          <p:cNvPr id="14" name="圖片 13">
+            <a:extLst>
+              <a:ext uri="{FF2B5EF4-FFF2-40B4-BE49-F238E27FC236}">
+                <a16:creationId xmlns:a16="http://schemas.microsoft.com/office/drawing/2014/main" id="{1D539B61-01F8-BAA7-617D-69D403A1C209}"/>
+              </a:ext>
+            </a:extLst>
+          </p:cNvPr>
+          <p:cNvPicPr>
+            <a:picLocks noChangeAspect="1"/>
+          </p:cNvPicPr>
+          <p:nvPr/>
+        </p:nvPicPr>
+        <p:blipFill>
+          <a:blip r:embed="rId2"/>
+          <a:stretch>
+            <a:fillRect/>
+          </a:stretch>
+        </p:blipFill>
+        <p:spPr>
+          <a:xfrm>
+            <a:off x="6255540" y="3157661"/>
+            <a:ext cx="5707433" cy="1659461"/>
+          </a:xfrm>
+          <a:prstGeom prst="rect">
+            <a:avLst/>
+          </a:prstGeom>
+        </p:spPr>
+      </p:pic>
+      <p:sp>
+        <p:nvSpPr>
+          <p:cNvPr id="69" name="PlaceHolder 1">
+            <a:extLst>
+              <a:ext uri="{FF2B5EF4-FFF2-40B4-BE49-F238E27FC236}">
+                <a16:creationId xmlns:a16="http://schemas.microsoft.com/office/drawing/2014/main" id="{3E2051B3-FD76-0FDB-E44A-A6A0B7A5506F}"/>
+              </a:ext>
+            </a:extLst>
+          </p:cNvPr>
+          <p:cNvSpPr>
+            <a:spLocks noGrp="1"/>
+          </p:cNvSpPr>
+          <p:nvPr>
+            <p:ph type="title"/>
+          </p:nvPr>
+        </p:nvSpPr>
+        <p:spPr>
+          <a:xfrm>
+            <a:off x="1015920" y="0"/>
+            <a:ext cx="10972080" cy="1142280"/>
+          </a:xfrm>
+          <a:prstGeom prst="rect">
+            <a:avLst/>
+          </a:prstGeom>
+          <a:noFill/>
+          <a:ln w="0">
+            <a:noFill/>
+          </a:ln>
+        </p:spPr>
+        <p:txBody>
+          <a:bodyPr lIns="91440" tIns="45720" rIns="91440" bIns="45720" anchor="ctr">
+            <a:noAutofit/>
+          </a:bodyPr>
+          <a:lstStyle/>
+          <a:p>
+            <a:pPr>
+              <a:lnSpc>
+                <a:spcPct val="100000"/>
+              </a:lnSpc>
+              <a:tabLst>
+                <a:tab pos="0" algn="l"/>
+              </a:tabLst>
+            </a:pPr>
+            <a:r>
+              <a:rPr lang="en-US" sz="4000" b="1" spc="-1" dirty="0">
+                <a:solidFill>
+                  <a:srgbClr val="DDDDDD"/>
+                </a:solidFill>
+                <a:latin typeface="Calibri"/>
+                <a:ea typeface="Calibri"/>
+              </a:rPr>
+              <a:t>UART</a:t>
+            </a:r>
+            <a:endParaRPr lang="en-US" sz="4000" b="0" strike="noStrike" spc="-1" dirty="0">
+              <a:solidFill>
+                <a:srgbClr val="000000"/>
+              </a:solidFill>
+              <a:latin typeface="Arial"/>
+            </a:endParaRPr>
+          </a:p>
+        </p:txBody>
+      </p:sp>
+      <p:pic>
+        <p:nvPicPr>
+          <p:cNvPr id="10" name="圖片 9">
+            <a:extLst>
+              <a:ext uri="{FF2B5EF4-FFF2-40B4-BE49-F238E27FC236}">
+                <a16:creationId xmlns:a16="http://schemas.microsoft.com/office/drawing/2014/main" id="{92960757-0725-511C-C50E-44B8748FB5EA}"/>
+              </a:ext>
+            </a:extLst>
+          </p:cNvPr>
+          <p:cNvPicPr>
+            <a:picLocks noChangeAspect="1"/>
+          </p:cNvPicPr>
+          <p:nvPr/>
+        </p:nvPicPr>
+        <p:blipFill>
+          <a:blip r:embed="rId3"/>
+          <a:stretch>
+            <a:fillRect/>
+          </a:stretch>
+        </p:blipFill>
+        <p:spPr>
+          <a:xfrm>
+            <a:off x="636202" y="2046463"/>
+            <a:ext cx="5459798" cy="2222397"/>
+          </a:xfrm>
+          <a:prstGeom prst="rect">
+            <a:avLst/>
+          </a:prstGeom>
+        </p:spPr>
+      </p:pic>
+      <p:pic>
+        <p:nvPicPr>
+          <p:cNvPr id="12" name="圖片 11">
+            <a:extLst>
+              <a:ext uri="{FF2B5EF4-FFF2-40B4-BE49-F238E27FC236}">
+                <a16:creationId xmlns:a16="http://schemas.microsoft.com/office/drawing/2014/main" id="{91541454-B009-3740-7C6D-4074AAF5A767}"/>
+              </a:ext>
+            </a:extLst>
+          </p:cNvPr>
+          <p:cNvPicPr>
+            <a:picLocks noChangeAspect="1"/>
+          </p:cNvPicPr>
+          <p:nvPr/>
+        </p:nvPicPr>
+        <p:blipFill>
+          <a:blip r:embed="rId4"/>
+          <a:stretch>
+            <a:fillRect/>
+          </a:stretch>
+        </p:blipFill>
+        <p:spPr>
+          <a:xfrm>
+            <a:off x="6269427" y="2046463"/>
+            <a:ext cx="5693546" cy="1458103"/>
+          </a:xfrm>
+          <a:prstGeom prst="rect">
+            <a:avLst/>
+          </a:prstGeom>
+        </p:spPr>
+      </p:pic>
+    </p:spTree>
+    <p:extLst>
+      <p:ext uri="{BB962C8B-B14F-4D97-AF65-F5344CB8AC3E}">
+        <p14:creationId xmlns:p14="http://schemas.microsoft.com/office/powerpoint/2010/main" val="1638632662"/>
+      </p:ext>
+    </p:extLst>
+  </p:cSld>
+  <p:clrMapOvr>
+    <a:masterClrMapping/>
+  </p:clrMapOvr>
+</p:sld>
+</file>
+
+<file path=ppt/slides/slide11.xml><?xml version="1.0" encoding="utf-8"?>
+<p:sld xmlns:a="http://schemas.openxmlformats.org/drawingml/2006/main" xmlns:r="http://schemas.openxmlformats.org/officeDocument/2006/relationships" xmlns:p="http://schemas.openxmlformats.org/presentationml/2006/main">
+  <p:cSld>
+    <p:spTree>
+      <p:nvGrpSpPr>
+        <p:cNvPr id="1" name="">
+          <a:extLst>
+            <a:ext uri="{FF2B5EF4-FFF2-40B4-BE49-F238E27FC236}">
+              <a16:creationId xmlns:a16="http://schemas.microsoft.com/office/drawing/2014/main" id="{B447D101-FBEA-B516-1545-8A35DE8D1E98}"/>
+            </a:ext>
+          </a:extLst>
+        </p:cNvPr>
+        <p:cNvGrpSpPr/>
+        <p:nvPr/>
+      </p:nvGrpSpPr>
+      <p:grpSpPr>
+        <a:xfrm>
+          <a:off x="0" y="0"/>
+          <a:ext cx="0" cy="0"/>
+          <a:chOff x="0" y="0"/>
+          <a:chExt cx="0" cy="0"/>
+        </a:xfrm>
+      </p:grpSpPr>
+      <p:sp>
+        <p:nvSpPr>
+          <p:cNvPr id="69" name="PlaceHolder 1">
+            <a:extLst>
+              <a:ext uri="{FF2B5EF4-FFF2-40B4-BE49-F238E27FC236}">
+                <a16:creationId xmlns:a16="http://schemas.microsoft.com/office/drawing/2014/main" id="{E52B92DF-46D0-A0E5-45FC-B1540B61D7E9}"/>
+              </a:ext>
+            </a:extLst>
+          </p:cNvPr>
+          <p:cNvSpPr>
+            <a:spLocks noGrp="1"/>
+          </p:cNvSpPr>
+          <p:nvPr>
+            <p:ph type="title"/>
+          </p:nvPr>
+        </p:nvSpPr>
+        <p:spPr>
+          <a:xfrm>
+            <a:off x="1015920" y="0"/>
+            <a:ext cx="10972080" cy="1142280"/>
+          </a:xfrm>
+          <a:prstGeom prst="rect">
+            <a:avLst/>
+          </a:prstGeom>
+          <a:noFill/>
+          <a:ln w="0">
+            <a:noFill/>
+          </a:ln>
+        </p:spPr>
+        <p:txBody>
+          <a:bodyPr lIns="91440" tIns="45720" rIns="91440" bIns="45720" anchor="ctr">
+            <a:noAutofit/>
+          </a:bodyPr>
+          <a:lstStyle/>
+          <a:p>
+            <a:pPr>
+              <a:lnSpc>
+                <a:spcPct val="100000"/>
+              </a:lnSpc>
+              <a:tabLst>
+                <a:tab pos="0" algn="l"/>
+              </a:tabLst>
+            </a:pPr>
+            <a:r>
+              <a:rPr lang="en-US" sz="4000" b="1" strike="noStrike" spc="-1" dirty="0">
+                <a:solidFill>
+                  <a:srgbClr val="DDDDDD"/>
+                </a:solidFill>
+                <a:latin typeface="Calibri"/>
+                <a:ea typeface="Calibri"/>
+              </a:rPr>
+              <a:t>XADC</a:t>
+            </a:r>
+            <a:endParaRPr lang="en-US" sz="4000" b="0" strike="noStrike" spc="-1" dirty="0">
+              <a:solidFill>
+                <a:srgbClr val="000000"/>
+              </a:solidFill>
+              <a:latin typeface="Arial"/>
+            </a:endParaRPr>
+          </a:p>
+        </p:txBody>
+      </p:sp>
+      <p:sp>
+        <p:nvSpPr>
+          <p:cNvPr id="15" name="文字方塊 14">
+            <a:extLst>
+              <a:ext uri="{FF2B5EF4-FFF2-40B4-BE49-F238E27FC236}">
+                <a16:creationId xmlns:a16="http://schemas.microsoft.com/office/drawing/2014/main" id="{F73E57EE-652B-A82C-1DDE-6433E07AE9C9}"/>
+              </a:ext>
+            </a:extLst>
+          </p:cNvPr>
+          <p:cNvSpPr txBox="1"/>
+          <p:nvPr/>
+        </p:nvSpPr>
+        <p:spPr>
+          <a:xfrm>
+            <a:off x="673894" y="1413946"/>
+            <a:ext cx="10032294" cy="5444054"/>
+          </a:xfrm>
+          <a:prstGeom prst="rect">
+            <a:avLst/>
+          </a:prstGeom>
+          <a:noFill/>
+        </p:spPr>
+        <p:txBody>
+          <a:bodyPr wrap="square">
+            <a:spAutoFit/>
+          </a:bodyPr>
+          <a:lstStyle/>
+          <a:p>
+            <a:pPr>
+              <a:lnSpc>
+                <a:spcPct val="150000"/>
+              </a:lnSpc>
+              <a:buNone/>
+            </a:pPr>
+            <a:r>
+              <a:rPr lang="en-US" b="1" dirty="0">
+                <a:latin typeface="Times New Roman" panose="02020603050405020304" pitchFamily="18" charset="0"/>
+                <a:cs typeface="Times New Roman" panose="02020603050405020304" pitchFamily="18" charset="0"/>
+              </a:rPr>
+              <a:t>XADC — On-chip Analog-to-Digital Converter</a:t>
+            </a:r>
+            <a:endParaRPr lang="en-US" dirty="0">
+              <a:latin typeface="Times New Roman" panose="02020603050405020304" pitchFamily="18" charset="0"/>
+              <a:cs typeface="Times New Roman" panose="02020603050405020304" pitchFamily="18" charset="0"/>
+            </a:endParaRPr>
+          </a:p>
+          <a:p>
+            <a:pPr lvl="1">
+              <a:lnSpc>
+                <a:spcPct val="150000"/>
+              </a:lnSpc>
+              <a:buFont typeface="Arial" panose="020B0604020202020204" pitchFamily="34" charset="0"/>
+              <a:buChar char="•"/>
+            </a:pPr>
+            <a:r>
+              <a:rPr lang="en-US" dirty="0">
+                <a:latin typeface="Times New Roman" panose="02020603050405020304" pitchFamily="18" charset="0"/>
+                <a:cs typeface="Times New Roman" panose="02020603050405020304" pitchFamily="18" charset="0"/>
+              </a:rPr>
+              <a:t>Built-in 12-bit ADC inside Artix-7 FPGA</a:t>
+            </a:r>
+          </a:p>
+          <a:p>
+            <a:pPr>
+              <a:lnSpc>
+                <a:spcPct val="150000"/>
+              </a:lnSpc>
+              <a:buNone/>
+            </a:pPr>
+            <a:r>
+              <a:rPr lang="en-US" b="1" dirty="0">
+                <a:latin typeface="Times New Roman" panose="02020603050405020304" pitchFamily="18" charset="0"/>
+                <a:cs typeface="Times New Roman" panose="02020603050405020304" pitchFamily="18" charset="0"/>
+              </a:rPr>
+              <a:t>Enabled Channels (Continuous Sequencer):</a:t>
+            </a:r>
+            <a:endParaRPr lang="en-US" dirty="0">
+              <a:latin typeface="Times New Roman" panose="02020603050405020304" pitchFamily="18" charset="0"/>
+              <a:cs typeface="Times New Roman" panose="02020603050405020304" pitchFamily="18" charset="0"/>
+            </a:endParaRPr>
+          </a:p>
+          <a:p>
+            <a:pPr lvl="1">
+              <a:lnSpc>
+                <a:spcPct val="150000"/>
+              </a:lnSpc>
+              <a:buFont typeface="Arial" panose="020B0604020202020204" pitchFamily="34" charset="0"/>
+              <a:buChar char="•"/>
+            </a:pPr>
+            <a:r>
+              <a:rPr lang="en-US" dirty="0">
+                <a:latin typeface="Times New Roman" panose="02020603050405020304" pitchFamily="18" charset="0"/>
+                <a:cs typeface="Times New Roman" panose="02020603050405020304" pitchFamily="18" charset="0"/>
+              </a:rPr>
+              <a:t>VAUX4 (DIP Pin 15) — external analog input</a:t>
+            </a:r>
+          </a:p>
+          <a:p>
+            <a:pPr lvl="1">
+              <a:lnSpc>
+                <a:spcPct val="150000"/>
+              </a:lnSpc>
+              <a:buFont typeface="Arial" panose="020B0604020202020204" pitchFamily="34" charset="0"/>
+              <a:buChar char="•"/>
+            </a:pPr>
+            <a:r>
+              <a:rPr lang="en-US" dirty="0">
+                <a:latin typeface="Times New Roman" panose="02020603050405020304" pitchFamily="18" charset="0"/>
+                <a:cs typeface="Times New Roman" panose="02020603050405020304" pitchFamily="18" charset="0"/>
+              </a:rPr>
+              <a:t>VAUX12 (DIP Pin 16) — external analog input</a:t>
+            </a:r>
+          </a:p>
+          <a:p>
+            <a:pPr lvl="1">
+              <a:lnSpc>
+                <a:spcPct val="150000"/>
+              </a:lnSpc>
+              <a:buFont typeface="Arial" panose="020B0604020202020204" pitchFamily="34" charset="0"/>
+              <a:buChar char="•"/>
+            </a:pPr>
+            <a:r>
+              <a:rPr lang="en-US" dirty="0">
+                <a:latin typeface="Times New Roman" panose="02020603050405020304" pitchFamily="18" charset="0"/>
+                <a:cs typeface="Times New Roman" panose="02020603050405020304" pitchFamily="18" charset="0"/>
+              </a:rPr>
+              <a:t>Temperature — on-chip die temperature</a:t>
+            </a:r>
+          </a:p>
+          <a:p>
+            <a:pPr lvl="1">
+              <a:lnSpc>
+                <a:spcPct val="150000"/>
+              </a:lnSpc>
+              <a:buFont typeface="Arial" panose="020B0604020202020204" pitchFamily="34" charset="0"/>
+              <a:buChar char="•"/>
+            </a:pPr>
+            <a:r>
+              <a:rPr lang="en-US" dirty="0">
+                <a:latin typeface="Times New Roman" panose="02020603050405020304" pitchFamily="18" charset="0"/>
+                <a:cs typeface="Times New Roman" panose="02020603050405020304" pitchFamily="18" charset="0"/>
+              </a:rPr>
+              <a:t>VCCINT — core voltage monitor (1.0 V)</a:t>
+            </a:r>
+          </a:p>
+          <a:p>
+            <a:pPr lvl="1">
+              <a:lnSpc>
+                <a:spcPct val="150000"/>
+              </a:lnSpc>
+              <a:buFont typeface="Arial" panose="020B0604020202020204" pitchFamily="34" charset="0"/>
+              <a:buChar char="•"/>
+            </a:pPr>
+            <a:r>
+              <a:rPr lang="en-US" dirty="0">
+                <a:latin typeface="Times New Roman" panose="02020603050405020304" pitchFamily="18" charset="0"/>
+                <a:cs typeface="Times New Roman" panose="02020603050405020304" pitchFamily="18" charset="0"/>
+              </a:rPr>
+              <a:t>VCCAUX — auxiliary voltage monitor (1.8 V)</a:t>
+            </a:r>
+          </a:p>
+          <a:p>
+            <a:pPr>
+              <a:lnSpc>
+                <a:spcPct val="150000"/>
+              </a:lnSpc>
+              <a:buNone/>
+            </a:pPr>
+            <a:r>
+              <a:rPr lang="en-US" b="1" dirty="0">
+                <a:latin typeface="Times New Roman" panose="02020603050405020304" pitchFamily="18" charset="0"/>
+                <a:cs typeface="Times New Roman" panose="02020603050405020304" pitchFamily="18" charset="0"/>
+              </a:rPr>
+              <a:t>Key Specs:</a:t>
+            </a:r>
+            <a:endParaRPr lang="en-US" dirty="0">
+              <a:latin typeface="Times New Roman" panose="02020603050405020304" pitchFamily="18" charset="0"/>
+              <a:cs typeface="Times New Roman" panose="02020603050405020304" pitchFamily="18" charset="0"/>
+            </a:endParaRPr>
+          </a:p>
+          <a:p>
+            <a:pPr lvl="1">
+              <a:lnSpc>
+                <a:spcPct val="150000"/>
+              </a:lnSpc>
+              <a:buFont typeface="Arial" panose="020B0604020202020204" pitchFamily="34" charset="0"/>
+              <a:buChar char="•"/>
+            </a:pPr>
+            <a:r>
+              <a:rPr lang="en-US" dirty="0">
+                <a:latin typeface="Times New Roman" panose="02020603050405020304" pitchFamily="18" charset="0"/>
+                <a:cs typeface="Times New Roman" panose="02020603050405020304" pitchFamily="18" charset="0"/>
+              </a:rPr>
+              <a:t>Total conversion rate: 500 Kilo Samples Per Second</a:t>
+            </a:r>
+            <a:r>
+              <a:rPr lang="zh-TW" altLang="en-US" dirty="0">
+                <a:latin typeface="Times New Roman" panose="02020603050405020304" pitchFamily="18" charset="0"/>
+                <a:cs typeface="Times New Roman" panose="02020603050405020304" pitchFamily="18" charset="0"/>
+              </a:rPr>
+              <a:t> </a:t>
+            </a:r>
+            <a:r>
+              <a:rPr lang="en-US" altLang="zh-TW" dirty="0">
+                <a:latin typeface="Times New Roman" panose="02020603050405020304" pitchFamily="18" charset="0"/>
+                <a:cs typeface="Times New Roman" panose="02020603050405020304" pitchFamily="18" charset="0"/>
+              </a:rPr>
+              <a:t>(KSPS)</a:t>
+            </a:r>
+            <a:endParaRPr lang="en-US" dirty="0">
+              <a:latin typeface="Times New Roman" panose="02020603050405020304" pitchFamily="18" charset="0"/>
+              <a:cs typeface="Times New Roman" panose="02020603050405020304" pitchFamily="18" charset="0"/>
+            </a:endParaRPr>
+          </a:p>
+          <a:p>
+            <a:pPr lvl="1">
+              <a:lnSpc>
+                <a:spcPct val="150000"/>
+              </a:lnSpc>
+              <a:buFont typeface="Arial" panose="020B0604020202020204" pitchFamily="34" charset="0"/>
+              <a:buChar char="•"/>
+            </a:pPr>
+            <a:r>
+              <a:rPr lang="en-US" dirty="0">
+                <a:latin typeface="Times New Roman" panose="02020603050405020304" pitchFamily="18" charset="0"/>
+                <a:cs typeface="Times New Roman" panose="02020603050405020304" pitchFamily="18" charset="0"/>
+              </a:rPr>
+              <a:t>Per-channel effective rate: ~100 KSPS (500K ÷ 5 channels)</a:t>
+            </a:r>
+          </a:p>
+          <a:p>
+            <a:pPr lvl="1">
+              <a:lnSpc>
+                <a:spcPct val="150000"/>
+              </a:lnSpc>
+              <a:buFont typeface="Arial" panose="020B0604020202020204" pitchFamily="34" charset="0"/>
+              <a:buChar char="•"/>
+            </a:pPr>
+            <a:r>
+              <a:rPr lang="en-US" dirty="0">
+                <a:latin typeface="Times New Roman" panose="02020603050405020304" pitchFamily="18" charset="0"/>
+                <a:cs typeface="Times New Roman" panose="02020603050405020304" pitchFamily="18" charset="0"/>
+              </a:rPr>
+              <a:t>Input range: 0–1 V at FPGA pins </a:t>
+            </a:r>
+            <a:r>
+              <a:rPr lang="en-US" dirty="0">
+                <a:solidFill>
+                  <a:srgbClr val="FF0000"/>
+                </a:solidFill>
+                <a:latin typeface="Times New Roman" panose="02020603050405020304" pitchFamily="18" charset="0"/>
+                <a:cs typeface="Times New Roman" panose="02020603050405020304" pitchFamily="18" charset="0"/>
+              </a:rPr>
+              <a:t>(3.3 V on DIP pin scaled by on-board voltage divider)</a:t>
+            </a:r>
+          </a:p>
+          <a:p>
+            <a:pPr lvl="1">
+              <a:lnSpc>
+                <a:spcPct val="150000"/>
+              </a:lnSpc>
+              <a:buFont typeface="Arial" panose="020B0604020202020204" pitchFamily="34" charset="0"/>
+              <a:buChar char="•"/>
+            </a:pPr>
+            <a:r>
+              <a:rPr lang="en-US" dirty="0">
+                <a:latin typeface="Times New Roman" panose="02020603050405020304" pitchFamily="18" charset="0"/>
+                <a:cs typeface="Times New Roman" panose="02020603050405020304" pitchFamily="18" charset="0"/>
+              </a:rPr>
+              <a:t>Resolution: 12-bit (4096 levels)</a:t>
+            </a:r>
+          </a:p>
+        </p:txBody>
+      </p:sp>
+      <p:pic>
+        <p:nvPicPr>
+          <p:cNvPr id="16" name="Picture 4">
+            <a:extLst>
+              <a:ext uri="{FF2B5EF4-FFF2-40B4-BE49-F238E27FC236}">
+                <a16:creationId xmlns:a16="http://schemas.microsoft.com/office/drawing/2014/main" id="{276C320D-B81A-DA4B-8EC1-D6F2BF24513A}"/>
+              </a:ext>
+            </a:extLst>
+          </p:cNvPr>
+          <p:cNvPicPr>
+            <a:picLocks noChangeAspect="1" noChangeArrowheads="1"/>
+          </p:cNvPicPr>
+          <p:nvPr/>
+        </p:nvPicPr>
+        <p:blipFill>
+          <a:blip r:embed="rId2">
+            <a:extLst>
+              <a:ext uri="{28A0092B-C50C-407E-A947-70E740481C1C}">
+                <a14:useLocalDpi xmlns:a14="http://schemas.microsoft.com/office/drawing/2010/main" val="0"/>
+              </a:ext>
+            </a:extLst>
+          </a:blip>
+          <a:srcRect/>
+          <a:stretch>
+            <a:fillRect/>
+          </a:stretch>
+        </p:blipFill>
+        <p:spPr bwMode="auto">
+          <a:xfrm>
+            <a:off x="6501960" y="1844991"/>
+            <a:ext cx="5583382" cy="2976746"/>
+          </a:xfrm>
+          <a:prstGeom prst="rect">
+            <a:avLst/>
+          </a:prstGeom>
+          <a:noFill/>
+          <a:extLst>
+            <a:ext uri="{909E8E84-426E-40DD-AFC4-6F175D3DCCD1}">
+              <a14:hiddenFill xmlns:a14="http://schemas.microsoft.com/office/drawing/2010/main">
+                <a:solidFill>
+                  <a:srgbClr val="FFFFFF"/>
+                </a:solidFill>
+              </a14:hiddenFill>
+            </a:ext>
+          </a:extLst>
+        </p:spPr>
+      </p:pic>
+      <p:sp>
+        <p:nvSpPr>
+          <p:cNvPr id="18" name="文字方塊 17">
+            <a:extLst>
+              <a:ext uri="{FF2B5EF4-FFF2-40B4-BE49-F238E27FC236}">
+                <a16:creationId xmlns:a16="http://schemas.microsoft.com/office/drawing/2014/main" id="{F4942A8D-E0DC-6454-52F4-57331A1855B4}"/>
+              </a:ext>
+            </a:extLst>
+          </p:cNvPr>
+          <p:cNvSpPr txBox="1"/>
+          <p:nvPr/>
+        </p:nvSpPr>
+        <p:spPr>
+          <a:xfrm>
+            <a:off x="10985622" y="1894482"/>
+            <a:ext cx="65" cy="276999"/>
+          </a:xfrm>
+          <a:prstGeom prst="rect">
+            <a:avLst/>
+          </a:prstGeom>
+          <a:noFill/>
+        </p:spPr>
+        <p:txBody>
+          <a:bodyPr wrap="none" lIns="0" tIns="0" rIns="0" bIns="0" rtlCol="0">
+            <a:spAutoFit/>
+          </a:bodyPr>
+          <a:lstStyle/>
+          <a:p>
+            <a:endParaRPr lang="en-US" dirty="0"/>
+          </a:p>
+        </p:txBody>
+      </p:sp>
+      <mc:AlternateContent xmlns:mc="http://schemas.openxmlformats.org/markup-compatibility/2006">
+        <mc:Choice xmlns:a14="http://schemas.microsoft.com/office/drawing/2010/main" Requires="a14">
+          <p:sp>
+            <p:nvSpPr>
+              <p:cNvPr id="20" name="文字方塊 19">
+                <a:extLst>
+                  <a:ext uri="{FF2B5EF4-FFF2-40B4-BE49-F238E27FC236}">
+                    <a16:creationId xmlns:a16="http://schemas.microsoft.com/office/drawing/2014/main" id="{C550A827-1E45-E87F-0D40-6571C1119932}"/>
+                  </a:ext>
+                </a:extLst>
+              </p:cNvPr>
+              <p:cNvSpPr txBox="1"/>
+              <p:nvPr/>
+            </p:nvSpPr>
+            <p:spPr>
+              <a:xfrm>
+                <a:off x="10059980" y="2977007"/>
+                <a:ext cx="485454" cy="276999"/>
+              </a:xfrm>
+              <a:prstGeom prst="rect">
+                <a:avLst/>
+              </a:prstGeom>
+              <a:noFill/>
+            </p:spPr>
+            <p:txBody>
+              <a:bodyPr wrap="none" lIns="0" tIns="0" rIns="0" bIns="0" rtlCol="0">
+                <a:spAutoFit/>
+              </a:bodyPr>
+              <a:lstStyle/>
+              <a:p>
+                <a:pPr/>
+                <a14:m>
+                  <m:oMathPara xmlns:m="http://schemas.openxmlformats.org/officeDocument/2006/math">
+                    <m:oMathParaPr>
+                      <m:jc m:val="centerGroup"/>
+                    </m:oMathParaPr>
+                    <m:oMath xmlns:m="http://schemas.openxmlformats.org/officeDocument/2006/math">
+                      <m:sSub>
+                        <m:sSubPr>
+                          <m:ctrlPr>
+                            <a:rPr lang="en-US" i="1" smtClean="0">
+                              <a:latin typeface="Cambria Math" panose="02040503050406030204" pitchFamily="18" charset="0"/>
+                            </a:rPr>
+                          </m:ctrlPr>
+                        </m:sSubPr>
+                        <m:e>
+                          <m:r>
+                            <a:rPr lang="en-US" i="1">
+                              <a:latin typeface="Cambria Math" panose="02040503050406030204" pitchFamily="18" charset="0"/>
+                            </a:rPr>
+                            <m:t>𝑉</m:t>
+                          </m:r>
+                        </m:e>
+                        <m:sub>
+                          <m:r>
+                            <m:rPr>
+                              <m:sty m:val="p"/>
+                            </m:rPr>
+                            <a:rPr lang="en-US" altLang="zh-TW" i="1" smtClean="0">
+                              <a:latin typeface="Cambria Math" panose="02040503050406030204" pitchFamily="18" charset="0"/>
+                            </a:rPr>
+                            <m:t>D</m:t>
+                          </m:r>
+                          <m:r>
+                            <m:rPr>
+                              <m:sty m:val="p"/>
+                            </m:rPr>
+                            <a:rPr lang="en-US" altLang="zh-TW" i="1">
+                              <a:latin typeface="Cambria Math" panose="02040503050406030204" pitchFamily="18" charset="0"/>
+                            </a:rPr>
+                            <m:t>I</m:t>
+                          </m:r>
+                          <m:r>
+                            <m:rPr>
+                              <m:sty m:val="p"/>
+                            </m:rPr>
+                            <a:rPr lang="en-US" altLang="zh-TW" i="1" smtClean="0">
+                              <a:latin typeface="Cambria Math" panose="02040503050406030204" pitchFamily="18" charset="0"/>
+                            </a:rPr>
+                            <m:t>V</m:t>
+                          </m:r>
+                        </m:sub>
+                      </m:sSub>
+                    </m:oMath>
+                  </m:oMathPara>
+                </a14:m>
+                <a:endParaRPr lang="en-US" dirty="0"/>
+              </a:p>
+            </p:txBody>
+          </p:sp>
+        </mc:Choice>
+        <mc:Fallback>
+          <p:sp>
+            <p:nvSpPr>
+              <p:cNvPr id="20" name="文字方塊 19">
+                <a:extLst>
+                  <a:ext uri="{FF2B5EF4-FFF2-40B4-BE49-F238E27FC236}">
+                    <a16:creationId xmlns:a16="http://schemas.microsoft.com/office/drawing/2014/main" id="{C550A827-1E45-E87F-0D40-6571C1119932}"/>
+                  </a:ext>
+                </a:extLst>
+              </p:cNvPr>
+              <p:cNvSpPr txBox="1">
+                <a:spLocks noRot="1" noChangeAspect="1" noMove="1" noResize="1" noEditPoints="1" noAdjustHandles="1" noChangeArrowheads="1" noChangeShapeType="1" noTextEdit="1"/>
+              </p:cNvSpPr>
+              <p:nvPr/>
+            </p:nvSpPr>
+            <p:spPr>
+              <a:xfrm>
+                <a:off x="10059980" y="2977007"/>
+                <a:ext cx="485454" cy="276999"/>
+              </a:xfrm>
+              <a:prstGeom prst="rect">
+                <a:avLst/>
+              </a:prstGeom>
+              <a:blipFill>
+                <a:blip r:embed="rId3"/>
+                <a:stretch>
+                  <a:fillRect l="-10000" r="-2500" b="-17391"/>
+                </a:stretch>
+              </a:blipFill>
+            </p:spPr>
+            <p:txBody>
+              <a:bodyPr/>
+              <a:lstStyle/>
+              <a:p>
+                <a:r>
+                  <a:rPr lang="en-US">
+                    <a:noFill/>
+                  </a:rPr>
+                  <a:t> </a:t>
+                </a:r>
+              </a:p>
+            </p:txBody>
+          </p:sp>
+        </mc:Fallback>
+      </mc:AlternateContent>
+      <p:sp>
+        <p:nvSpPr>
+          <p:cNvPr id="21" name="橢圓 20">
+            <a:extLst>
+              <a:ext uri="{FF2B5EF4-FFF2-40B4-BE49-F238E27FC236}">
+                <a16:creationId xmlns:a16="http://schemas.microsoft.com/office/drawing/2014/main" id="{DDB897D5-62BB-A6F2-216B-819235DF495A}"/>
+              </a:ext>
+            </a:extLst>
+          </p:cNvPr>
+          <p:cNvSpPr/>
+          <p:nvPr/>
+        </p:nvSpPr>
+        <p:spPr>
+          <a:xfrm>
+            <a:off x="9925756" y="3104083"/>
+            <a:ext cx="134224" cy="125835"/>
+          </a:xfrm>
+          <a:prstGeom prst="ellipse">
+            <a:avLst/>
+          </a:prstGeom>
+          <a:solidFill>
+            <a:schemeClr val="bg1"/>
+          </a:solidFill>
+          <a:ln>
+            <a:solidFill>
+              <a:schemeClr val="tx1"/>
+            </a:solidFill>
+          </a:ln>
+        </p:spPr>
+        <p:style>
+          <a:lnRef idx="2">
+            <a:schemeClr val="accent1">
+              <a:shade val="15000"/>
+            </a:schemeClr>
+          </a:lnRef>
+          <a:fillRef idx="1">
+            <a:schemeClr val="accent1"/>
+          </a:fillRef>
+          <a:effectRef idx="0">
+            <a:schemeClr val="accent1"/>
+          </a:effectRef>
+          <a:fontRef idx="minor">
+            <a:schemeClr val="lt1"/>
+          </a:fontRef>
+        </p:style>
+        <p:txBody>
+          <a:bodyPr rtlCol="0" anchor="ctr"/>
+          <a:lstStyle/>
+          <a:p>
+            <a:pPr algn="ctr"/>
+            <a:endParaRPr lang="en-US"/>
+          </a:p>
+        </p:txBody>
+      </p:sp>
+      <p:cxnSp>
+        <p:nvCxnSpPr>
+          <p:cNvPr id="27" name="直線單箭頭接點 26">
+            <a:extLst>
+              <a:ext uri="{FF2B5EF4-FFF2-40B4-BE49-F238E27FC236}">
+                <a16:creationId xmlns:a16="http://schemas.microsoft.com/office/drawing/2014/main" id="{602BC7A5-EE95-57C3-9576-7AF1E48C8856}"/>
+              </a:ext>
+            </a:extLst>
+          </p:cNvPr>
+          <p:cNvCxnSpPr>
+            <a:cxnSpLocks/>
+          </p:cNvCxnSpPr>
+          <p:nvPr/>
+        </p:nvCxnSpPr>
+        <p:spPr>
+          <a:xfrm flipV="1">
+            <a:off x="7682845" y="4821737"/>
+            <a:ext cx="1470582" cy="1211418"/>
+          </a:xfrm>
+          <a:prstGeom prst="straightConnector1">
+            <a:avLst/>
+          </a:prstGeom>
+          <a:ln w="28575">
+            <a:solidFill>
+              <a:srgbClr val="FF0000"/>
+            </a:solidFill>
+            <a:tailEnd type="triangle"/>
+          </a:ln>
+        </p:spPr>
+        <p:style>
+          <a:lnRef idx="1">
+            <a:schemeClr val="accent1"/>
+          </a:lnRef>
+          <a:fillRef idx="0">
+            <a:schemeClr val="accent1"/>
+          </a:fillRef>
+          <a:effectRef idx="0">
+            <a:schemeClr val="accent1"/>
+          </a:effectRef>
+          <a:fontRef idx="minor">
+            <a:schemeClr val="tx1"/>
+          </a:fontRef>
+        </p:style>
+      </p:cxnSp>
+    </p:spTree>
+    <p:extLst>
+      <p:ext uri="{BB962C8B-B14F-4D97-AF65-F5344CB8AC3E}">
+        <p14:creationId xmlns:p14="http://schemas.microsoft.com/office/powerpoint/2010/main" val="2570221541"/>
+      </p:ext>
+    </p:extLst>
+  </p:cSld>
+  <p:clrMapOvr>
+    <a:masterClrMapping/>
+  </p:clrMapOvr>
+</p:sld>
+</file>
+
+<file path=ppt/slides/slide12.xml><?xml version="1.0" encoding="utf-8"?>
+<p:sld xmlns:a="http://schemas.openxmlformats.org/drawingml/2006/main" xmlns:r="http://schemas.openxmlformats.org/officeDocument/2006/relationships" xmlns:p="http://schemas.openxmlformats.org/presentationml/2006/main">
+  <p:cSld>
+    <p:spTree>
+      <p:nvGrpSpPr>
+        <p:cNvPr id="1" name="">
+          <a:extLst>
+            <a:ext uri="{FF2B5EF4-FFF2-40B4-BE49-F238E27FC236}">
+              <a16:creationId xmlns:a16="http://schemas.microsoft.com/office/drawing/2014/main" id="{53A962C5-35FB-4D9A-B910-67CDA9F80CBF}"/>
+            </a:ext>
+          </a:extLst>
+        </p:cNvPr>
+        <p:cNvGrpSpPr/>
+        <p:nvPr/>
+      </p:nvGrpSpPr>
+      <p:grpSpPr>
+        <a:xfrm>
+          <a:off x="0" y="0"/>
+          <a:ext cx="0" cy="0"/>
+          <a:chOff x="0" y="0"/>
+          <a:chExt cx="0" cy="0"/>
+        </a:xfrm>
+      </p:grpSpPr>
+      <p:sp>
+        <p:nvSpPr>
+          <p:cNvPr id="69" name="PlaceHolder 1">
+            <a:extLst>
+              <a:ext uri="{FF2B5EF4-FFF2-40B4-BE49-F238E27FC236}">
+                <a16:creationId xmlns:a16="http://schemas.microsoft.com/office/drawing/2014/main" id="{65A7F29A-BED8-ADEF-1DC5-B113ECF26AF7}"/>
+              </a:ext>
+            </a:extLst>
+          </p:cNvPr>
+          <p:cNvSpPr>
+            <a:spLocks noGrp="1"/>
+          </p:cNvSpPr>
+          <p:nvPr>
+            <p:ph type="title"/>
+          </p:nvPr>
+        </p:nvSpPr>
+        <p:spPr>
+          <a:xfrm>
+            <a:off x="1015920" y="0"/>
+            <a:ext cx="10972080" cy="1142280"/>
+          </a:xfrm>
+          <a:prstGeom prst="rect">
+            <a:avLst/>
+          </a:prstGeom>
+          <a:noFill/>
+          <a:ln w="0">
+            <a:noFill/>
+          </a:ln>
+        </p:spPr>
+        <p:txBody>
+          <a:bodyPr lIns="91440" tIns="45720" rIns="91440" bIns="45720" anchor="ctr">
+            <a:noAutofit/>
+          </a:bodyPr>
+          <a:lstStyle/>
+          <a:p>
+            <a:pPr>
+              <a:lnSpc>
+                <a:spcPct val="100000"/>
+              </a:lnSpc>
+              <a:tabLst>
+                <a:tab pos="0" algn="l"/>
+              </a:tabLst>
+            </a:pPr>
+            <a:r>
+              <a:rPr lang="en-US" sz="4000" b="1" spc="-1" dirty="0">
+                <a:solidFill>
+                  <a:srgbClr val="DDDDDD"/>
+                </a:solidFill>
+                <a:latin typeface="Calibri"/>
+                <a:ea typeface="Calibri"/>
+              </a:rPr>
+              <a:t>Interrupt</a:t>
+            </a:r>
+            <a:r>
+              <a:rPr lang="zh-TW" altLang="en-US" sz="4000" b="1" spc="-1" dirty="0">
+                <a:solidFill>
+                  <a:srgbClr val="DDDDDD"/>
+                </a:solidFill>
+                <a:latin typeface="Calibri"/>
+                <a:ea typeface="Calibri"/>
+              </a:rPr>
+              <a:t> </a:t>
+            </a:r>
+            <a:r>
+              <a:rPr lang="en-US" altLang="zh-TW" sz="4000" b="1" spc="-1" dirty="0">
+                <a:solidFill>
+                  <a:srgbClr val="DDDDDD"/>
+                </a:solidFill>
+                <a:latin typeface="Calibri"/>
+                <a:ea typeface="Calibri"/>
+              </a:rPr>
+              <a:t>System</a:t>
+            </a:r>
+            <a:endParaRPr lang="en-US" sz="4000" b="0" strike="noStrike" spc="-1" dirty="0">
+              <a:solidFill>
+                <a:srgbClr val="000000"/>
+              </a:solidFill>
+              <a:latin typeface="Arial"/>
+            </a:endParaRPr>
+          </a:p>
+        </p:txBody>
+      </p:sp>
+      <p:sp>
+        <p:nvSpPr>
+          <p:cNvPr id="76" name="矩形 12">
+            <a:extLst>
+              <a:ext uri="{FF2B5EF4-FFF2-40B4-BE49-F238E27FC236}">
+                <a16:creationId xmlns:a16="http://schemas.microsoft.com/office/drawing/2014/main" id="{F4784BC0-8636-768D-15C1-BB566F7930FC}"/>
+              </a:ext>
+            </a:extLst>
+          </p:cNvPr>
+          <p:cNvSpPr/>
+          <p:nvPr/>
+        </p:nvSpPr>
+        <p:spPr>
+          <a:xfrm rot="16200000">
+            <a:off x="-1921129" y="4042799"/>
+            <a:ext cx="4367745" cy="254880"/>
+          </a:xfrm>
+          <a:prstGeom prst="rect">
+            <a:avLst/>
+          </a:prstGeom>
+          <a:solidFill>
+            <a:schemeClr val="tx1"/>
+          </a:solidFill>
+          <a:ln>
+            <a:solidFill>
+              <a:srgbClr val="516263"/>
+            </a:solidFill>
+            <a:round/>
+          </a:ln>
+        </p:spPr>
+        <p:style>
+          <a:lnRef idx="2">
+            <a:schemeClr val="accent1">
+              <a:shade val="15000"/>
+            </a:schemeClr>
+          </a:lnRef>
+          <a:fillRef idx="1">
+            <a:schemeClr val="accent1"/>
+          </a:fillRef>
+          <a:effectRef idx="0">
+            <a:schemeClr val="accent1"/>
+          </a:effectRef>
+          <a:fontRef idx="minor"/>
+        </p:style>
+        <p:txBody>
+          <a:bodyPr lIns="90000" tIns="45000" rIns="90000" bIns="45000" anchor="ctr">
+            <a:noAutofit/>
+          </a:bodyPr>
+          <a:lstStyle/>
+          <a:p>
+            <a:pPr algn="ctr">
+              <a:lnSpc>
+                <a:spcPct val="100000"/>
+              </a:lnSpc>
+            </a:pPr>
+            <a:r>
+              <a:rPr lang="en-US" sz="2000" b="0" strike="noStrike" spc="-1">
+                <a:solidFill>
+                  <a:schemeClr val="lt1"/>
+                </a:solidFill>
+                <a:latin typeface="Arial"/>
+                <a:ea typeface="Arial"/>
+              </a:rPr>
+              <a:t>AXI Interconnect (BUS)</a:t>
+            </a:r>
+            <a:endParaRPr lang="en-US" sz="2000" b="0" strike="noStrike" spc="-1">
+              <a:solidFill>
+                <a:srgbClr val="FFFFFF"/>
+              </a:solidFill>
+              <a:latin typeface="Arial"/>
+            </a:endParaRPr>
+          </a:p>
+        </p:txBody>
+      </p:sp>
+      <p:sp>
+        <p:nvSpPr>
+          <p:cNvPr id="2" name="矩形: 圓角 7">
+            <a:extLst>
+              <a:ext uri="{FF2B5EF4-FFF2-40B4-BE49-F238E27FC236}">
+                <a16:creationId xmlns:a16="http://schemas.microsoft.com/office/drawing/2014/main" id="{A071B250-DC67-5C0F-A3A6-5D493E72E98A}"/>
+              </a:ext>
+            </a:extLst>
+          </p:cNvPr>
+          <p:cNvSpPr/>
+          <p:nvPr/>
+        </p:nvSpPr>
+        <p:spPr>
+          <a:xfrm>
+            <a:off x="4785744" y="2079120"/>
+            <a:ext cx="1209600" cy="1045080"/>
+          </a:xfrm>
+          <a:prstGeom prst="roundRect">
+            <a:avLst>
+              <a:gd name="adj" fmla="val 16667"/>
+            </a:avLst>
+          </a:prstGeom>
+          <a:solidFill>
+            <a:srgbClr val="BBE0E3"/>
+          </a:solidFill>
+          <a:ln>
+            <a:solidFill>
+              <a:srgbClr val="516263"/>
+            </a:solidFill>
+            <a:round/>
+          </a:ln>
+        </p:spPr>
+        <p:style>
+          <a:lnRef idx="2">
+            <a:schemeClr val="accent1">
+              <a:shade val="15000"/>
+            </a:schemeClr>
+          </a:lnRef>
+          <a:fillRef idx="1">
+            <a:schemeClr val="accent1"/>
+          </a:fillRef>
+          <a:effectRef idx="0">
+            <a:schemeClr val="accent1"/>
+          </a:effectRef>
+          <a:fontRef idx="minor"/>
+        </p:style>
+        <p:txBody>
+          <a:bodyPr lIns="90000" tIns="45000" rIns="90000" bIns="45000" anchor="ctr">
+            <a:noAutofit/>
+          </a:bodyPr>
+          <a:lstStyle/>
+          <a:p>
+            <a:pPr algn="ctr">
+              <a:lnSpc>
+                <a:spcPct val="100000"/>
+              </a:lnSpc>
+            </a:pPr>
+            <a:r>
+              <a:rPr lang="en-US" sz="1400" b="0" strike="noStrike" spc="-1" dirty="0">
+                <a:solidFill>
+                  <a:schemeClr val="dk1"/>
+                </a:solidFill>
+                <a:latin typeface="Arial"/>
+                <a:ea typeface="Arial"/>
+              </a:rPr>
+              <a:t>AXI Timer </a:t>
+            </a:r>
+          </a:p>
+          <a:p>
+            <a:pPr algn="ctr">
+              <a:lnSpc>
+                <a:spcPct val="100000"/>
+              </a:lnSpc>
+            </a:pPr>
+            <a:r>
+              <a:rPr lang="en-US" sz="1400" spc="-1" dirty="0">
+                <a:solidFill>
+                  <a:schemeClr val="dk1"/>
+                </a:solidFill>
+                <a:latin typeface="Arial"/>
+                <a:ea typeface="Arial"/>
+              </a:rPr>
+              <a:t>* 3</a:t>
+            </a:r>
+            <a:endParaRPr lang="en-US" sz="1400" b="0" strike="noStrike" spc="-1" dirty="0">
+              <a:solidFill>
+                <a:srgbClr val="000000"/>
+              </a:solidFill>
+              <a:latin typeface="Arial"/>
+            </a:endParaRPr>
+          </a:p>
+        </p:txBody>
+      </p:sp>
+      <p:sp>
+        <p:nvSpPr>
+          <p:cNvPr id="3" name="矩形: 圓角 7">
+            <a:extLst>
+              <a:ext uri="{FF2B5EF4-FFF2-40B4-BE49-F238E27FC236}">
+                <a16:creationId xmlns:a16="http://schemas.microsoft.com/office/drawing/2014/main" id="{B3DB2511-DD16-5E19-93C9-4ADFC212D75F}"/>
+              </a:ext>
+            </a:extLst>
+          </p:cNvPr>
+          <p:cNvSpPr/>
+          <p:nvPr/>
+        </p:nvSpPr>
+        <p:spPr>
+          <a:xfrm>
+            <a:off x="1362698" y="4608365"/>
+            <a:ext cx="1209600" cy="1045080"/>
+          </a:xfrm>
+          <a:prstGeom prst="roundRect">
+            <a:avLst>
+              <a:gd name="adj" fmla="val 16667"/>
+            </a:avLst>
+          </a:prstGeom>
+          <a:solidFill>
+            <a:srgbClr val="FFC000"/>
+          </a:solidFill>
+          <a:ln>
+            <a:solidFill>
+              <a:srgbClr val="516263"/>
+            </a:solidFill>
+            <a:round/>
+          </a:ln>
+        </p:spPr>
+        <p:style>
+          <a:lnRef idx="2">
+            <a:schemeClr val="accent1">
+              <a:shade val="15000"/>
+            </a:schemeClr>
+          </a:lnRef>
+          <a:fillRef idx="1">
+            <a:schemeClr val="accent1"/>
+          </a:fillRef>
+          <a:effectRef idx="0">
+            <a:schemeClr val="accent1"/>
+          </a:effectRef>
+          <a:fontRef idx="minor"/>
+        </p:style>
+        <p:txBody>
+          <a:bodyPr lIns="90000" tIns="45000" rIns="90000" bIns="45000" anchor="ctr">
+            <a:noAutofit/>
+          </a:bodyPr>
+          <a:lstStyle/>
+          <a:p>
+            <a:pPr algn="ctr">
+              <a:lnSpc>
+                <a:spcPct val="100000"/>
+              </a:lnSpc>
+            </a:pPr>
+            <a:r>
+              <a:rPr lang="en-US" altLang="zh-TW" sz="1400" b="0" strike="noStrike" spc="-1" dirty="0">
+                <a:solidFill>
+                  <a:srgbClr val="000000"/>
+                </a:solidFill>
+                <a:latin typeface="Arial"/>
+              </a:rPr>
+              <a:t>RISC-V</a:t>
+            </a:r>
+          </a:p>
+          <a:p>
+            <a:pPr algn="ctr">
+              <a:lnSpc>
+                <a:spcPct val="100000"/>
+              </a:lnSpc>
+            </a:pPr>
+            <a:r>
+              <a:rPr lang="en-US" sz="1400" spc="-1" dirty="0">
+                <a:solidFill>
+                  <a:srgbClr val="000000"/>
+                </a:solidFill>
+                <a:latin typeface="Arial"/>
+              </a:rPr>
+              <a:t>Core</a:t>
+            </a:r>
+            <a:endParaRPr lang="en-US" sz="1400" b="0" strike="noStrike" spc="-1" dirty="0">
+              <a:solidFill>
+                <a:srgbClr val="000000"/>
+              </a:solidFill>
+              <a:latin typeface="Arial"/>
+            </a:endParaRPr>
+          </a:p>
+        </p:txBody>
+      </p:sp>
+      <p:sp>
+        <p:nvSpPr>
+          <p:cNvPr id="4" name="矩形: 圓角 7">
+            <a:extLst>
+              <a:ext uri="{FF2B5EF4-FFF2-40B4-BE49-F238E27FC236}">
+                <a16:creationId xmlns:a16="http://schemas.microsoft.com/office/drawing/2014/main" id="{A15549A6-1837-4E78-1A3E-B7357020950C}"/>
+              </a:ext>
+            </a:extLst>
+          </p:cNvPr>
+          <p:cNvSpPr/>
+          <p:nvPr/>
+        </p:nvSpPr>
+        <p:spPr>
+          <a:xfrm>
+            <a:off x="1362698" y="2994853"/>
+            <a:ext cx="1209600" cy="1045080"/>
+          </a:xfrm>
+          <a:prstGeom prst="roundRect">
+            <a:avLst>
+              <a:gd name="adj" fmla="val 16667"/>
+            </a:avLst>
+          </a:prstGeom>
+          <a:solidFill>
+            <a:srgbClr val="00B0F0"/>
+          </a:solidFill>
+          <a:ln>
+            <a:solidFill>
+              <a:srgbClr val="516263"/>
+            </a:solidFill>
+            <a:round/>
+          </a:ln>
+        </p:spPr>
+        <p:style>
+          <a:lnRef idx="2">
+            <a:schemeClr val="accent1">
+              <a:shade val="15000"/>
+            </a:schemeClr>
+          </a:lnRef>
+          <a:fillRef idx="1">
+            <a:schemeClr val="accent1"/>
+          </a:fillRef>
+          <a:effectRef idx="0">
+            <a:schemeClr val="accent1"/>
+          </a:effectRef>
+          <a:fontRef idx="minor"/>
+        </p:style>
+        <p:txBody>
+          <a:bodyPr lIns="90000" tIns="45000" rIns="90000" bIns="45000" anchor="ctr">
+            <a:noAutofit/>
+          </a:bodyPr>
+          <a:lstStyle/>
+          <a:p>
+            <a:pPr algn="ctr">
+              <a:lnSpc>
+                <a:spcPct val="100000"/>
+              </a:lnSpc>
+            </a:pPr>
+            <a:r>
+              <a:rPr lang="en-US" sz="1400" dirty="0"/>
+              <a:t>AXI</a:t>
+            </a:r>
+          </a:p>
+          <a:p>
+            <a:pPr algn="ctr">
+              <a:lnSpc>
+                <a:spcPct val="100000"/>
+              </a:lnSpc>
+            </a:pPr>
+            <a:r>
+              <a:rPr lang="en-US" sz="1400" dirty="0"/>
+              <a:t>Interrupt</a:t>
+            </a:r>
+          </a:p>
+          <a:p>
+            <a:pPr algn="ctr">
+              <a:lnSpc>
+                <a:spcPct val="100000"/>
+              </a:lnSpc>
+            </a:pPr>
+            <a:r>
+              <a:rPr lang="en-US" sz="1400" dirty="0"/>
+              <a:t>Controller</a:t>
+            </a:r>
+          </a:p>
+        </p:txBody>
+      </p:sp>
+      <p:sp>
+        <p:nvSpPr>
+          <p:cNvPr id="5" name="矩形: 圓角 7">
+            <a:extLst>
+              <a:ext uri="{FF2B5EF4-FFF2-40B4-BE49-F238E27FC236}">
+                <a16:creationId xmlns:a16="http://schemas.microsoft.com/office/drawing/2014/main" id="{729A4D76-64B5-B230-AF12-9F23C1164B95}"/>
+              </a:ext>
+            </a:extLst>
+          </p:cNvPr>
+          <p:cNvSpPr/>
+          <p:nvPr/>
+        </p:nvSpPr>
+        <p:spPr>
+          <a:xfrm>
+            <a:off x="3105713" y="2994853"/>
+            <a:ext cx="1209600" cy="1045080"/>
+          </a:xfrm>
+          <a:prstGeom prst="roundRect">
+            <a:avLst>
+              <a:gd name="adj" fmla="val 16667"/>
+            </a:avLst>
+          </a:prstGeom>
+          <a:solidFill>
+            <a:schemeClr val="bg2">
+              <a:lumMod val="60000"/>
+              <a:lumOff val="40000"/>
+            </a:schemeClr>
+          </a:solidFill>
+          <a:ln>
+            <a:solidFill>
+              <a:srgbClr val="516263"/>
+            </a:solidFill>
+            <a:round/>
+          </a:ln>
+        </p:spPr>
+        <p:style>
+          <a:lnRef idx="2">
+            <a:schemeClr val="accent1">
+              <a:shade val="15000"/>
+            </a:schemeClr>
+          </a:lnRef>
+          <a:fillRef idx="1">
+            <a:schemeClr val="accent1"/>
+          </a:fillRef>
+          <a:effectRef idx="0">
+            <a:schemeClr val="accent1"/>
+          </a:effectRef>
+          <a:fontRef idx="minor"/>
+        </p:style>
+        <p:txBody>
+          <a:bodyPr lIns="90000" tIns="45000" rIns="90000" bIns="45000" anchor="ctr">
+            <a:noAutofit/>
+          </a:bodyPr>
+          <a:lstStyle/>
+          <a:p>
+            <a:pPr algn="ctr">
+              <a:lnSpc>
+                <a:spcPct val="100000"/>
+              </a:lnSpc>
+            </a:pPr>
+            <a:r>
+              <a:rPr lang="en-US" sz="1400" b="0" strike="noStrike" spc="-1" dirty="0" err="1">
+                <a:solidFill>
+                  <a:srgbClr val="000000"/>
+                </a:solidFill>
+                <a:latin typeface="Arial"/>
+              </a:rPr>
+              <a:t>Concat</a:t>
+            </a:r>
+            <a:endParaRPr lang="en-US" sz="1400" b="0" strike="noStrike" spc="-1" dirty="0">
+              <a:solidFill>
+                <a:srgbClr val="000000"/>
+              </a:solidFill>
+              <a:latin typeface="Arial"/>
+            </a:endParaRPr>
+          </a:p>
+        </p:txBody>
+      </p:sp>
+      <p:sp>
+        <p:nvSpPr>
+          <p:cNvPr id="6" name="矩形: 圓角 7">
+            <a:extLst>
+              <a:ext uri="{FF2B5EF4-FFF2-40B4-BE49-F238E27FC236}">
+                <a16:creationId xmlns:a16="http://schemas.microsoft.com/office/drawing/2014/main" id="{A20D8E79-5A1C-46C5-12E4-D1078D4AF899}"/>
+              </a:ext>
+            </a:extLst>
+          </p:cNvPr>
+          <p:cNvSpPr/>
+          <p:nvPr/>
+        </p:nvSpPr>
+        <p:spPr>
+          <a:xfrm>
+            <a:off x="4938144" y="2231520"/>
+            <a:ext cx="1209600" cy="1045080"/>
+          </a:xfrm>
+          <a:prstGeom prst="roundRect">
+            <a:avLst>
+              <a:gd name="adj" fmla="val 16667"/>
+            </a:avLst>
+          </a:prstGeom>
+          <a:solidFill>
+            <a:srgbClr val="BBE0E3"/>
+          </a:solidFill>
+          <a:ln>
+            <a:solidFill>
+              <a:srgbClr val="516263"/>
+            </a:solidFill>
+            <a:round/>
+          </a:ln>
+        </p:spPr>
+        <p:style>
+          <a:lnRef idx="2">
+            <a:schemeClr val="accent1">
+              <a:shade val="15000"/>
+            </a:schemeClr>
+          </a:lnRef>
+          <a:fillRef idx="1">
+            <a:schemeClr val="accent1"/>
+          </a:fillRef>
+          <a:effectRef idx="0">
+            <a:schemeClr val="accent1"/>
+          </a:effectRef>
+          <a:fontRef idx="minor"/>
+        </p:style>
+        <p:txBody>
+          <a:bodyPr lIns="90000" tIns="45000" rIns="90000" bIns="45000" anchor="ctr">
+            <a:noAutofit/>
+          </a:bodyPr>
+          <a:lstStyle/>
+          <a:p>
+            <a:pPr algn="ctr">
+              <a:lnSpc>
+                <a:spcPct val="100000"/>
+              </a:lnSpc>
+            </a:pPr>
+            <a:r>
+              <a:rPr lang="en-US" sz="1400" b="0" strike="noStrike" spc="-1" dirty="0">
+                <a:solidFill>
+                  <a:schemeClr val="dk1"/>
+                </a:solidFill>
+                <a:latin typeface="Arial"/>
+                <a:ea typeface="Arial"/>
+              </a:rPr>
+              <a:t>AXI Timer </a:t>
+            </a:r>
+          </a:p>
+          <a:p>
+            <a:pPr algn="ctr">
+              <a:lnSpc>
+                <a:spcPct val="100000"/>
+              </a:lnSpc>
+            </a:pPr>
+            <a:r>
+              <a:rPr lang="en-US" sz="1400" spc="-1" dirty="0">
+                <a:solidFill>
+                  <a:schemeClr val="dk1"/>
+                </a:solidFill>
+                <a:latin typeface="Arial"/>
+                <a:ea typeface="Arial"/>
+              </a:rPr>
+              <a:t>* 3</a:t>
+            </a:r>
+            <a:endParaRPr lang="en-US" sz="1400" b="0" strike="noStrike" spc="-1" dirty="0">
+              <a:solidFill>
+                <a:srgbClr val="000000"/>
+              </a:solidFill>
+              <a:latin typeface="Arial"/>
+            </a:endParaRPr>
+          </a:p>
+        </p:txBody>
+      </p:sp>
+      <p:sp>
+        <p:nvSpPr>
+          <p:cNvPr id="7" name="矩形: 圓角 7">
+            <a:extLst>
+              <a:ext uri="{FF2B5EF4-FFF2-40B4-BE49-F238E27FC236}">
+                <a16:creationId xmlns:a16="http://schemas.microsoft.com/office/drawing/2014/main" id="{27EA8936-13A4-647E-AF3B-E317B7AE4F8A}"/>
+              </a:ext>
+            </a:extLst>
+          </p:cNvPr>
+          <p:cNvSpPr/>
+          <p:nvPr/>
+        </p:nvSpPr>
+        <p:spPr>
+          <a:xfrm>
+            <a:off x="5090544" y="2383920"/>
+            <a:ext cx="1209600" cy="1045080"/>
+          </a:xfrm>
+          <a:prstGeom prst="roundRect">
+            <a:avLst>
+              <a:gd name="adj" fmla="val 16667"/>
+            </a:avLst>
+          </a:prstGeom>
+          <a:solidFill>
+            <a:srgbClr val="BBE0E3"/>
+          </a:solidFill>
+          <a:ln>
+            <a:solidFill>
+              <a:srgbClr val="516263"/>
+            </a:solidFill>
+            <a:round/>
+          </a:ln>
+        </p:spPr>
+        <p:style>
+          <a:lnRef idx="2">
+            <a:schemeClr val="accent1">
+              <a:shade val="15000"/>
+            </a:schemeClr>
+          </a:lnRef>
+          <a:fillRef idx="1">
+            <a:schemeClr val="accent1"/>
+          </a:fillRef>
+          <a:effectRef idx="0">
+            <a:schemeClr val="accent1"/>
+          </a:effectRef>
+          <a:fontRef idx="minor"/>
+        </p:style>
+        <p:txBody>
+          <a:bodyPr lIns="90000" tIns="45000" rIns="90000" bIns="45000" anchor="ctr">
+            <a:noAutofit/>
+          </a:bodyPr>
+          <a:lstStyle/>
+          <a:p>
+            <a:pPr algn="ctr">
+              <a:lnSpc>
+                <a:spcPct val="100000"/>
+              </a:lnSpc>
+            </a:pPr>
+            <a:r>
+              <a:rPr lang="en-US" sz="1400" b="0" strike="noStrike" spc="-1" dirty="0">
+                <a:solidFill>
+                  <a:schemeClr val="dk1"/>
+                </a:solidFill>
+                <a:latin typeface="Arial"/>
+                <a:ea typeface="Arial"/>
+              </a:rPr>
+              <a:t>AXI Timer </a:t>
+            </a:r>
+          </a:p>
+          <a:p>
+            <a:pPr algn="ctr">
+              <a:lnSpc>
+                <a:spcPct val="100000"/>
+              </a:lnSpc>
+            </a:pPr>
+            <a:r>
+              <a:rPr lang="en-US" sz="1400" spc="-1" dirty="0">
+                <a:solidFill>
+                  <a:schemeClr val="dk1"/>
+                </a:solidFill>
+                <a:latin typeface="Arial"/>
+                <a:ea typeface="Arial"/>
+              </a:rPr>
+              <a:t>* 3</a:t>
+            </a:r>
+            <a:endParaRPr lang="en-US" sz="1400" b="0" strike="noStrike" spc="-1" dirty="0">
+              <a:solidFill>
+                <a:srgbClr val="000000"/>
+              </a:solidFill>
+              <a:latin typeface="Arial"/>
+            </a:endParaRPr>
+          </a:p>
+        </p:txBody>
+      </p:sp>
+      <p:sp>
+        <p:nvSpPr>
+          <p:cNvPr id="9" name="矩形: 圓角 7">
+            <a:extLst>
+              <a:ext uri="{FF2B5EF4-FFF2-40B4-BE49-F238E27FC236}">
+                <a16:creationId xmlns:a16="http://schemas.microsoft.com/office/drawing/2014/main" id="{A76D9882-91B0-790B-02C1-BA456663A952}"/>
+              </a:ext>
+            </a:extLst>
+          </p:cNvPr>
+          <p:cNvSpPr/>
+          <p:nvPr/>
+        </p:nvSpPr>
+        <p:spPr>
+          <a:xfrm>
+            <a:off x="4785744" y="3616944"/>
+            <a:ext cx="1209600" cy="1045080"/>
+          </a:xfrm>
+          <a:prstGeom prst="roundRect">
+            <a:avLst>
+              <a:gd name="adj" fmla="val 16667"/>
+            </a:avLst>
+          </a:prstGeom>
+          <a:solidFill>
+            <a:schemeClr val="accent2">
+              <a:lumMod val="40000"/>
+              <a:lumOff val="60000"/>
+            </a:schemeClr>
+          </a:solidFill>
+          <a:ln>
+            <a:solidFill>
+              <a:srgbClr val="516263"/>
+            </a:solidFill>
+            <a:round/>
+          </a:ln>
+        </p:spPr>
+        <p:style>
+          <a:lnRef idx="2">
+            <a:schemeClr val="accent1">
+              <a:shade val="15000"/>
+            </a:schemeClr>
+          </a:lnRef>
+          <a:fillRef idx="1">
+            <a:schemeClr val="accent1"/>
+          </a:fillRef>
+          <a:effectRef idx="0">
+            <a:schemeClr val="accent1"/>
+          </a:effectRef>
+          <a:fontRef idx="minor"/>
+        </p:style>
+        <p:txBody>
+          <a:bodyPr lIns="90000" tIns="45000" rIns="90000" bIns="45000" anchor="ctr">
+            <a:noAutofit/>
+          </a:bodyPr>
+          <a:lstStyle/>
+          <a:p>
+            <a:pPr algn="ctr">
+              <a:lnSpc>
+                <a:spcPct val="100000"/>
+              </a:lnSpc>
+            </a:pPr>
+            <a:r>
+              <a:rPr lang="en-US" sz="1400" b="0" strike="noStrike" spc="-1" dirty="0">
+                <a:solidFill>
+                  <a:schemeClr val="dk1"/>
+                </a:solidFill>
+                <a:latin typeface="Arial"/>
+                <a:ea typeface="Arial"/>
+              </a:rPr>
+              <a:t>AXI </a:t>
+            </a:r>
+            <a:r>
+              <a:rPr lang="en-US" sz="1400" spc="-1" dirty="0">
+                <a:solidFill>
+                  <a:schemeClr val="dk1"/>
+                </a:solidFill>
+                <a:latin typeface="Arial"/>
+                <a:ea typeface="Arial"/>
+              </a:rPr>
+              <a:t>GPIO</a:t>
+            </a:r>
+            <a:r>
+              <a:rPr lang="en-US" sz="1400" b="0" strike="noStrike" spc="-1" dirty="0">
+                <a:solidFill>
+                  <a:schemeClr val="dk1"/>
+                </a:solidFill>
+                <a:latin typeface="Arial"/>
+                <a:ea typeface="Arial"/>
+              </a:rPr>
+              <a:t> </a:t>
+            </a:r>
+          </a:p>
+          <a:p>
+            <a:pPr algn="ctr">
+              <a:lnSpc>
+                <a:spcPct val="100000"/>
+              </a:lnSpc>
+            </a:pPr>
+            <a:r>
+              <a:rPr lang="en-US" sz="1400" spc="-1" dirty="0">
+                <a:solidFill>
+                  <a:schemeClr val="dk1"/>
+                </a:solidFill>
+                <a:latin typeface="Arial"/>
+              </a:rPr>
+              <a:t>w intr * 3</a:t>
+            </a:r>
+            <a:endParaRPr lang="en-US" sz="1400" b="0" strike="noStrike" spc="-1" dirty="0">
+              <a:solidFill>
+                <a:srgbClr val="000000"/>
+              </a:solidFill>
+              <a:latin typeface="Arial"/>
+            </a:endParaRPr>
+          </a:p>
+        </p:txBody>
+      </p:sp>
+      <p:sp>
+        <p:nvSpPr>
+          <p:cNvPr id="13" name="箭號: 上-下雙向 12">
+            <a:extLst>
+              <a:ext uri="{FF2B5EF4-FFF2-40B4-BE49-F238E27FC236}">
+                <a16:creationId xmlns:a16="http://schemas.microsoft.com/office/drawing/2014/main" id="{891DF948-B01D-13DB-05BE-01081BCD4588}"/>
+              </a:ext>
+            </a:extLst>
+          </p:cNvPr>
+          <p:cNvSpPr/>
+          <p:nvPr/>
+        </p:nvSpPr>
+        <p:spPr>
+          <a:xfrm rot="16200000">
+            <a:off x="661910" y="3065983"/>
+            <a:ext cx="429062" cy="902821"/>
+          </a:xfrm>
+          <a:prstGeom prst="upDownArrow">
+            <a:avLst/>
+          </a:prstGeom>
+          <a:solidFill>
+            <a:schemeClr val="tx1"/>
+          </a:solidFill>
+        </p:spPr>
+        <p:style>
+          <a:lnRef idx="2">
+            <a:schemeClr val="accent1">
+              <a:shade val="15000"/>
+            </a:schemeClr>
+          </a:lnRef>
+          <a:fillRef idx="1">
+            <a:schemeClr val="accent1"/>
+          </a:fillRef>
+          <a:effectRef idx="0">
+            <a:schemeClr val="accent1"/>
+          </a:effectRef>
+          <a:fontRef idx="minor">
+            <a:schemeClr val="lt1"/>
+          </a:fontRef>
+        </p:style>
+        <p:txBody>
+          <a:bodyPr rtlCol="0" anchor="ctr"/>
+          <a:lstStyle/>
+          <a:p>
+            <a:pPr algn="ctr"/>
+            <a:endParaRPr lang="en-US"/>
+          </a:p>
+        </p:txBody>
+      </p:sp>
+      <p:sp>
+        <p:nvSpPr>
+          <p:cNvPr id="14" name="箭號: 上-下雙向 13">
+            <a:extLst>
+              <a:ext uri="{FF2B5EF4-FFF2-40B4-BE49-F238E27FC236}">
+                <a16:creationId xmlns:a16="http://schemas.microsoft.com/office/drawing/2014/main" id="{F0671ADE-A805-4C9D-D176-0013C85F12C8}"/>
+              </a:ext>
+            </a:extLst>
+          </p:cNvPr>
+          <p:cNvSpPr/>
+          <p:nvPr/>
+        </p:nvSpPr>
+        <p:spPr>
+          <a:xfrm rot="16200000">
+            <a:off x="661911" y="4679495"/>
+            <a:ext cx="429062" cy="902821"/>
+          </a:xfrm>
+          <a:prstGeom prst="upDownArrow">
+            <a:avLst/>
+          </a:prstGeom>
+          <a:solidFill>
+            <a:schemeClr val="tx1"/>
+          </a:solidFill>
+        </p:spPr>
+        <p:style>
+          <a:lnRef idx="2">
+            <a:schemeClr val="accent1">
+              <a:shade val="15000"/>
+            </a:schemeClr>
+          </a:lnRef>
+          <a:fillRef idx="1">
+            <a:schemeClr val="accent1"/>
+          </a:fillRef>
+          <a:effectRef idx="0">
+            <a:schemeClr val="accent1"/>
+          </a:effectRef>
+          <a:fontRef idx="minor">
+            <a:schemeClr val="lt1"/>
+          </a:fontRef>
+        </p:style>
+        <p:txBody>
+          <a:bodyPr rtlCol="0" anchor="ctr"/>
+          <a:lstStyle/>
+          <a:p>
+            <a:pPr algn="ctr"/>
+            <a:endParaRPr lang="en-US"/>
+          </a:p>
+        </p:txBody>
+      </p:sp>
+      <p:cxnSp>
+        <p:nvCxnSpPr>
+          <p:cNvPr id="12" name="直線單箭頭接點 11">
+            <a:extLst>
+              <a:ext uri="{FF2B5EF4-FFF2-40B4-BE49-F238E27FC236}">
+                <a16:creationId xmlns:a16="http://schemas.microsoft.com/office/drawing/2014/main" id="{74A15068-2A97-DE1A-F162-6E3BF323A50C}"/>
+              </a:ext>
+            </a:extLst>
+          </p:cNvPr>
+          <p:cNvCxnSpPr>
+            <a:cxnSpLocks/>
+            <a:stCxn id="2" idx="1"/>
+            <a:endCxn id="5" idx="3"/>
+          </p:cNvCxnSpPr>
+          <p:nvPr/>
+        </p:nvCxnSpPr>
+        <p:spPr>
+          <a:xfrm flipH="1">
+            <a:off x="4315313" y="2601660"/>
+            <a:ext cx="470431" cy="915733"/>
+          </a:xfrm>
+          <a:prstGeom prst="straightConnector1">
+            <a:avLst/>
+          </a:prstGeom>
+          <a:ln>
+            <a:tailEnd type="triangle"/>
+          </a:ln>
+        </p:spPr>
+        <p:style>
+          <a:lnRef idx="1">
+            <a:schemeClr val="accent1"/>
+          </a:lnRef>
+          <a:fillRef idx="0">
+            <a:schemeClr val="accent1"/>
+          </a:fillRef>
+          <a:effectRef idx="0">
+            <a:schemeClr val="accent1"/>
+          </a:effectRef>
+          <a:fontRef idx="minor">
+            <a:schemeClr val="tx1"/>
+          </a:fontRef>
+        </p:style>
+      </p:cxnSp>
+      <p:cxnSp>
+        <p:nvCxnSpPr>
+          <p:cNvPr id="19" name="直線單箭頭接點 18">
+            <a:extLst>
+              <a:ext uri="{FF2B5EF4-FFF2-40B4-BE49-F238E27FC236}">
+                <a16:creationId xmlns:a16="http://schemas.microsoft.com/office/drawing/2014/main" id="{C92EC857-CB88-460D-40BD-26ACB03BA2F2}"/>
+              </a:ext>
+            </a:extLst>
+          </p:cNvPr>
+          <p:cNvCxnSpPr>
+            <a:cxnSpLocks/>
+            <a:stCxn id="2" idx="1"/>
+            <a:endCxn id="5" idx="3"/>
+          </p:cNvCxnSpPr>
+          <p:nvPr/>
+        </p:nvCxnSpPr>
+        <p:spPr>
+          <a:xfrm flipH="1">
+            <a:off x="4315313" y="2601660"/>
+            <a:ext cx="470431" cy="915733"/>
+          </a:xfrm>
+          <a:prstGeom prst="straightConnector1">
+            <a:avLst/>
+          </a:prstGeom>
+          <a:ln w="38100">
+            <a:solidFill>
+              <a:schemeClr val="tx1"/>
+            </a:solidFill>
+            <a:tailEnd type="triangle"/>
+          </a:ln>
+        </p:spPr>
+        <p:style>
+          <a:lnRef idx="1">
+            <a:schemeClr val="accent1"/>
+          </a:lnRef>
+          <a:fillRef idx="0">
+            <a:schemeClr val="accent1"/>
+          </a:fillRef>
+          <a:effectRef idx="0">
+            <a:schemeClr val="accent1"/>
+          </a:effectRef>
+          <a:fontRef idx="minor">
+            <a:schemeClr val="tx1"/>
+          </a:fontRef>
+        </p:style>
+      </p:cxnSp>
+      <p:cxnSp>
+        <p:nvCxnSpPr>
+          <p:cNvPr id="22" name="直線單箭頭接點 21">
+            <a:extLst>
+              <a:ext uri="{FF2B5EF4-FFF2-40B4-BE49-F238E27FC236}">
+                <a16:creationId xmlns:a16="http://schemas.microsoft.com/office/drawing/2014/main" id="{3BE96FE8-B65D-C45F-B1F5-71AD93531204}"/>
+              </a:ext>
+            </a:extLst>
+          </p:cNvPr>
+          <p:cNvCxnSpPr>
+            <a:cxnSpLocks/>
+            <a:stCxn id="9" idx="1"/>
+            <a:endCxn id="5" idx="3"/>
+          </p:cNvCxnSpPr>
+          <p:nvPr/>
+        </p:nvCxnSpPr>
+        <p:spPr>
+          <a:xfrm flipH="1" flipV="1">
+            <a:off x="4315313" y="3517393"/>
+            <a:ext cx="470431" cy="622091"/>
+          </a:xfrm>
+          <a:prstGeom prst="straightConnector1">
+            <a:avLst/>
+          </a:prstGeom>
+          <a:ln w="38100">
+            <a:solidFill>
+              <a:schemeClr val="tx1"/>
+            </a:solidFill>
+            <a:tailEnd type="triangle"/>
+          </a:ln>
+        </p:spPr>
+        <p:style>
+          <a:lnRef idx="1">
+            <a:schemeClr val="accent1"/>
+          </a:lnRef>
+          <a:fillRef idx="0">
+            <a:schemeClr val="accent1"/>
+          </a:fillRef>
+          <a:effectRef idx="0">
+            <a:schemeClr val="accent1"/>
+          </a:effectRef>
+          <a:fontRef idx="minor">
+            <a:schemeClr val="tx1"/>
+          </a:fontRef>
+        </p:style>
+      </p:cxnSp>
+      <p:cxnSp>
+        <p:nvCxnSpPr>
+          <p:cNvPr id="25" name="直線單箭頭接點 24">
+            <a:extLst>
+              <a:ext uri="{FF2B5EF4-FFF2-40B4-BE49-F238E27FC236}">
+                <a16:creationId xmlns:a16="http://schemas.microsoft.com/office/drawing/2014/main" id="{14A89BC4-1087-0A04-93A2-7077533F69D2}"/>
+              </a:ext>
+            </a:extLst>
+          </p:cNvPr>
+          <p:cNvCxnSpPr>
+            <a:cxnSpLocks/>
+            <a:stCxn id="5" idx="1"/>
+            <a:endCxn id="4" idx="3"/>
+          </p:cNvCxnSpPr>
+          <p:nvPr/>
+        </p:nvCxnSpPr>
+        <p:spPr>
+          <a:xfrm flipH="1">
+            <a:off x="2572298" y="3517393"/>
+            <a:ext cx="533415" cy="0"/>
+          </a:xfrm>
+          <a:prstGeom prst="straightConnector1">
+            <a:avLst/>
+          </a:prstGeom>
+          <a:ln w="38100">
+            <a:solidFill>
+              <a:schemeClr val="tx1"/>
+            </a:solidFill>
+            <a:tailEnd type="triangle"/>
+          </a:ln>
+        </p:spPr>
+        <p:style>
+          <a:lnRef idx="1">
+            <a:schemeClr val="accent1"/>
+          </a:lnRef>
+          <a:fillRef idx="0">
+            <a:schemeClr val="accent1"/>
+          </a:fillRef>
+          <a:effectRef idx="0">
+            <a:schemeClr val="accent1"/>
+          </a:effectRef>
+          <a:fontRef idx="minor">
+            <a:schemeClr val="tx1"/>
+          </a:fontRef>
+        </p:style>
+      </p:cxnSp>
+      <p:cxnSp>
+        <p:nvCxnSpPr>
+          <p:cNvPr id="31" name="直線單箭頭接點 30">
+            <a:extLst>
+              <a:ext uri="{FF2B5EF4-FFF2-40B4-BE49-F238E27FC236}">
+                <a16:creationId xmlns:a16="http://schemas.microsoft.com/office/drawing/2014/main" id="{F4C9E6B9-BFD0-A0C5-8454-B72FF3EDAB90}"/>
+              </a:ext>
+            </a:extLst>
+          </p:cNvPr>
+          <p:cNvCxnSpPr>
+            <a:cxnSpLocks/>
+            <a:stCxn id="4" idx="2"/>
+            <a:endCxn id="3" idx="0"/>
+          </p:cNvCxnSpPr>
+          <p:nvPr/>
+        </p:nvCxnSpPr>
+        <p:spPr>
+          <a:xfrm>
+            <a:off x="1967498" y="4039933"/>
+            <a:ext cx="0" cy="568432"/>
+          </a:xfrm>
+          <a:prstGeom prst="straightConnector1">
+            <a:avLst/>
+          </a:prstGeom>
+          <a:ln w="38100">
+            <a:solidFill>
+              <a:schemeClr val="tx1"/>
+            </a:solidFill>
+            <a:tailEnd type="triangle"/>
+          </a:ln>
+        </p:spPr>
+        <p:style>
+          <a:lnRef idx="1">
+            <a:schemeClr val="accent1"/>
+          </a:lnRef>
+          <a:fillRef idx="0">
+            <a:schemeClr val="accent1"/>
+          </a:fillRef>
+          <a:effectRef idx="0">
+            <a:schemeClr val="accent1"/>
+          </a:effectRef>
+          <a:fontRef idx="minor">
+            <a:schemeClr val="tx1"/>
+          </a:fontRef>
+        </p:style>
+      </p:cxnSp>
+      <p:sp>
+        <p:nvSpPr>
+          <p:cNvPr id="36" name="文字方塊 35">
+            <a:extLst>
+              <a:ext uri="{FF2B5EF4-FFF2-40B4-BE49-F238E27FC236}">
+                <a16:creationId xmlns:a16="http://schemas.microsoft.com/office/drawing/2014/main" id="{82C9269D-3EFB-5F6C-1BEA-AD339E589489}"/>
+              </a:ext>
+            </a:extLst>
+          </p:cNvPr>
+          <p:cNvSpPr txBox="1"/>
+          <p:nvPr/>
+        </p:nvSpPr>
+        <p:spPr>
+          <a:xfrm>
+            <a:off x="2028452" y="4139483"/>
+            <a:ext cx="441146" cy="369332"/>
+          </a:xfrm>
+          <a:prstGeom prst="rect">
+            <a:avLst/>
+          </a:prstGeom>
+          <a:noFill/>
+        </p:spPr>
+        <p:txBody>
+          <a:bodyPr wrap="square" rtlCol="0">
+            <a:spAutoFit/>
+          </a:bodyPr>
+          <a:lstStyle/>
+          <a:p>
+            <a:r>
+              <a:rPr lang="en-US" dirty="0" err="1"/>
+              <a:t>irq</a:t>
+            </a:r>
+            <a:endParaRPr lang="en-US" dirty="0"/>
+          </a:p>
+        </p:txBody>
+      </p:sp>
+      <p:sp>
+        <p:nvSpPr>
+          <p:cNvPr id="15" name="矩形: 圓角 23">
+            <a:extLst>
+              <a:ext uri="{FF2B5EF4-FFF2-40B4-BE49-F238E27FC236}">
+                <a16:creationId xmlns:a16="http://schemas.microsoft.com/office/drawing/2014/main" id="{838A1EBD-CA22-E23D-0CEB-30590C3BC877}"/>
+              </a:ext>
+            </a:extLst>
+          </p:cNvPr>
+          <p:cNvSpPr/>
+          <p:nvPr/>
+        </p:nvSpPr>
+        <p:spPr>
+          <a:xfrm>
+            <a:off x="4785744" y="4849968"/>
+            <a:ext cx="1209600" cy="1045080"/>
+          </a:xfrm>
+          <a:prstGeom prst="roundRect">
+            <a:avLst>
+              <a:gd name="adj" fmla="val 16667"/>
+            </a:avLst>
+          </a:prstGeom>
+          <a:solidFill>
+            <a:srgbClr val="92D050"/>
+          </a:solidFill>
+          <a:ln>
+            <a:solidFill>
+              <a:srgbClr val="516263"/>
+            </a:solidFill>
+            <a:round/>
+          </a:ln>
+        </p:spPr>
+        <p:style>
+          <a:lnRef idx="2">
+            <a:schemeClr val="accent1">
+              <a:shade val="15000"/>
+            </a:schemeClr>
+          </a:lnRef>
+          <a:fillRef idx="1">
+            <a:schemeClr val="accent1"/>
+          </a:fillRef>
+          <a:effectRef idx="0">
+            <a:schemeClr val="accent1"/>
+          </a:effectRef>
+          <a:fontRef idx="minor"/>
+        </p:style>
+        <p:txBody>
+          <a:bodyPr lIns="90000" tIns="45000" rIns="90000" bIns="45000" anchor="ctr">
+            <a:noAutofit/>
+          </a:bodyPr>
+          <a:lstStyle/>
+          <a:p>
+            <a:pPr algn="ctr">
+              <a:lnSpc>
+                <a:spcPct val="100000"/>
+              </a:lnSpc>
+            </a:pPr>
+            <a:r>
+              <a:rPr lang="en-US" sz="1400" b="0" strike="noStrike" spc="-1" dirty="0">
+                <a:solidFill>
+                  <a:schemeClr val="dk1"/>
+                </a:solidFill>
+                <a:latin typeface="Arial"/>
+                <a:ea typeface="Arial"/>
+              </a:rPr>
+              <a:t>AXI UART</a:t>
+            </a:r>
+          </a:p>
+          <a:p>
+            <a:pPr algn="ctr">
+              <a:lnSpc>
+                <a:spcPct val="100000"/>
+              </a:lnSpc>
+            </a:pPr>
+            <a:r>
+              <a:rPr lang="en-US" altLang="zh-TW" sz="1400" spc="-1" dirty="0">
+                <a:solidFill>
+                  <a:schemeClr val="dk1"/>
+                </a:solidFill>
+                <a:latin typeface="Arial"/>
+              </a:rPr>
+              <a:t>16550</a:t>
+            </a:r>
+            <a:endParaRPr lang="en-US" sz="1400" b="0" strike="noStrike" spc="-1" dirty="0">
+              <a:solidFill>
+                <a:srgbClr val="000000"/>
+              </a:solidFill>
+              <a:latin typeface="Arial"/>
+            </a:endParaRPr>
+          </a:p>
+        </p:txBody>
+      </p:sp>
+      <p:sp>
+        <p:nvSpPr>
+          <p:cNvPr id="16" name="矩形: 圓角 23">
+            <a:extLst>
+              <a:ext uri="{FF2B5EF4-FFF2-40B4-BE49-F238E27FC236}">
+                <a16:creationId xmlns:a16="http://schemas.microsoft.com/office/drawing/2014/main" id="{7C33956F-CB99-AB9E-AB08-69F54BB688C9}"/>
+              </a:ext>
+            </a:extLst>
+          </p:cNvPr>
+          <p:cNvSpPr/>
+          <p:nvPr/>
+        </p:nvSpPr>
+        <p:spPr>
+          <a:xfrm>
+            <a:off x="4904935" y="5002368"/>
+            <a:ext cx="1209600" cy="1045080"/>
+          </a:xfrm>
+          <a:prstGeom prst="roundRect">
+            <a:avLst>
+              <a:gd name="adj" fmla="val 16667"/>
+            </a:avLst>
+          </a:prstGeom>
+          <a:solidFill>
+            <a:srgbClr val="92D050"/>
+          </a:solidFill>
+          <a:ln>
+            <a:solidFill>
+              <a:srgbClr val="516263"/>
+            </a:solidFill>
+            <a:round/>
+          </a:ln>
+        </p:spPr>
+        <p:style>
+          <a:lnRef idx="2">
+            <a:schemeClr val="accent1">
+              <a:shade val="15000"/>
+            </a:schemeClr>
+          </a:lnRef>
+          <a:fillRef idx="1">
+            <a:schemeClr val="accent1"/>
+          </a:fillRef>
+          <a:effectRef idx="0">
+            <a:schemeClr val="accent1"/>
+          </a:effectRef>
+          <a:fontRef idx="minor"/>
+        </p:style>
+        <p:txBody>
+          <a:bodyPr lIns="90000" tIns="45000" rIns="90000" bIns="45000" anchor="ctr">
+            <a:noAutofit/>
+          </a:bodyPr>
+          <a:lstStyle/>
+          <a:p>
+            <a:pPr algn="ctr">
+              <a:lnSpc>
+                <a:spcPct val="100000"/>
+              </a:lnSpc>
+            </a:pPr>
+            <a:r>
+              <a:rPr lang="en-US" sz="1400" b="0" strike="noStrike" spc="-1" dirty="0">
+                <a:solidFill>
+                  <a:schemeClr val="dk1"/>
+                </a:solidFill>
+                <a:latin typeface="Arial"/>
+                <a:ea typeface="Arial"/>
+              </a:rPr>
+              <a:t>AXI UART</a:t>
+            </a:r>
+          </a:p>
+          <a:p>
+            <a:pPr algn="ctr">
+              <a:lnSpc>
+                <a:spcPct val="100000"/>
+              </a:lnSpc>
+            </a:pPr>
+            <a:r>
+              <a:rPr lang="en-US" altLang="zh-TW" sz="1400" spc="-1" dirty="0">
+                <a:solidFill>
+                  <a:schemeClr val="dk1"/>
+                </a:solidFill>
+                <a:latin typeface="Arial"/>
+              </a:rPr>
+              <a:t>16550 * 2</a:t>
+            </a:r>
+            <a:endParaRPr lang="en-US" sz="1400" b="0" strike="noStrike" spc="-1" dirty="0">
+              <a:solidFill>
+                <a:srgbClr val="000000"/>
+              </a:solidFill>
+              <a:latin typeface="Arial"/>
+            </a:endParaRPr>
+          </a:p>
+        </p:txBody>
+      </p:sp>
+      <p:cxnSp>
+        <p:nvCxnSpPr>
+          <p:cNvPr id="17" name="直線單箭頭接點 16">
+            <a:extLst>
+              <a:ext uri="{FF2B5EF4-FFF2-40B4-BE49-F238E27FC236}">
+                <a16:creationId xmlns:a16="http://schemas.microsoft.com/office/drawing/2014/main" id="{2FCF5381-FE96-D7C0-965B-639E5E545202}"/>
+              </a:ext>
+            </a:extLst>
+          </p:cNvPr>
+          <p:cNvCxnSpPr>
+            <a:cxnSpLocks/>
+            <a:stCxn id="15" idx="1"/>
+            <a:endCxn id="5" idx="3"/>
+          </p:cNvCxnSpPr>
+          <p:nvPr/>
+        </p:nvCxnSpPr>
+        <p:spPr>
+          <a:xfrm flipH="1" flipV="1">
+            <a:off x="4315313" y="3517393"/>
+            <a:ext cx="470431" cy="1855115"/>
+          </a:xfrm>
+          <a:prstGeom prst="straightConnector1">
+            <a:avLst/>
+          </a:prstGeom>
+          <a:ln w="38100">
+            <a:solidFill>
+              <a:schemeClr val="tx1"/>
+            </a:solidFill>
+            <a:tailEnd type="triangle"/>
+          </a:ln>
+        </p:spPr>
+        <p:style>
+          <a:lnRef idx="1">
+            <a:schemeClr val="accent1"/>
+          </a:lnRef>
+          <a:fillRef idx="0">
+            <a:schemeClr val="accent1"/>
+          </a:fillRef>
+          <a:effectRef idx="0">
+            <a:schemeClr val="accent1"/>
+          </a:effectRef>
+          <a:fontRef idx="minor">
+            <a:schemeClr val="tx1"/>
+          </a:fontRef>
+        </p:style>
+      </p:cxnSp>
+      <p:sp>
+        <p:nvSpPr>
+          <p:cNvPr id="21" name="Rectangle 1">
+            <a:extLst>
+              <a:ext uri="{FF2B5EF4-FFF2-40B4-BE49-F238E27FC236}">
+                <a16:creationId xmlns:a16="http://schemas.microsoft.com/office/drawing/2014/main" id="{791EBDD3-CEF3-62B4-301B-C400B2FF7C3F}"/>
+              </a:ext>
+            </a:extLst>
+          </p:cNvPr>
+          <p:cNvSpPr>
+            <a:spLocks noChangeArrowheads="1"/>
+          </p:cNvSpPr>
+          <p:nvPr/>
+        </p:nvSpPr>
+        <p:spPr bwMode="auto">
+          <a:xfrm>
+            <a:off x="6394727" y="1525655"/>
+            <a:ext cx="5663241" cy="5028556"/>
+          </a:xfrm>
+          <a:prstGeom prst="rect">
+            <a:avLst/>
+          </a:prstGeom>
+          <a:noFill/>
+          <a:ln>
+            <a:noFill/>
+          </a:ln>
+          <a:effectLst/>
+          <a:extLst>
+            <a:ext uri="{909E8E84-426E-40DD-AFC4-6F175D3DCCD1}">
+              <a14:hiddenFill xmlns:a14="http://schemas.microsoft.com/office/drawing/2010/main">
+                <a:solidFill>
+                  <a:schemeClr val="accent1"/>
+                </a:solidFill>
+              </a14:hiddenFill>
+            </a:ext>
+            <a:ext uri="{91240B29-F687-4F45-9708-019B960494DF}">
+              <a14:hiddenLine xmlns:a14="http://schemas.microsoft.com/office/drawing/2010/main" w="9525">
+                <a:solidFill>
+                  <a:schemeClr val="tx1"/>
+                </a:solidFill>
+                <a:miter lim="800000"/>
+                <a:headEnd/>
+                <a:tailEnd/>
+              </a14:hiddenLine>
+            </a:ext>
+            <a:ext uri="{AF507438-7753-43E0-B8FC-AC1667EBCBE1}">
+              <a14:hiddenEffects xmlns:a14="http://schemas.microsoft.com/office/drawing/2010/main">
+                <a:effectLst>
+                  <a:outerShdw dist="35921" dir="2700000" algn="ctr" rotWithShape="0">
+                    <a:schemeClr val="bg2"/>
+                  </a:outerShdw>
+                </a:effectLst>
+              </a14:hiddenEffects>
+            </a:ext>
+          </a:extLst>
+        </p:spPr>
+        <p:txBody>
+          <a:bodyPr vert="horz" wrap="square" lIns="91440" tIns="45720" rIns="91440" bIns="45720" numCol="1" anchor="ctr" anchorCtr="0" compatLnSpc="1">
+            <a:prstTxWarp prst="textNoShape">
+              <a:avLst/>
+            </a:prstTxWarp>
+            <a:spAutoFit/>
+          </a:bodyPr>
+          <a:lstStyle/>
+          <a:p>
+            <a:pPr marL="0" marR="0" lvl="0" indent="0" algn="l" defTabSz="914400" rtl="0" eaLnBrk="0" fontAlgn="base" latinLnBrk="0" hangingPunct="0">
+              <a:lnSpc>
+                <a:spcPct val="150000"/>
+              </a:lnSpc>
+              <a:spcBef>
+                <a:spcPct val="0"/>
+              </a:spcBef>
+              <a:spcAft>
+                <a:spcPct val="0"/>
+              </a:spcAft>
+              <a:buClrTx/>
+              <a:buSzTx/>
+              <a:buFontTx/>
+              <a:buNone/>
+              <a:tabLst/>
+            </a:pPr>
+            <a:r>
+              <a:rPr kumimoji="0" lang="en-US" altLang="en-US" sz="1800" b="1" i="0" u="none" strike="noStrike" cap="none" normalizeH="0" baseline="0" dirty="0">
+                <a:ln>
+                  <a:noFill/>
+                </a:ln>
+                <a:solidFill>
+                  <a:schemeClr val="tx1"/>
+                </a:solidFill>
+                <a:effectLst/>
+                <a:latin typeface="Times New Roman" panose="02020603050405020304" pitchFamily="18" charset="0"/>
+                <a:cs typeface="Times New Roman" panose="02020603050405020304" pitchFamily="18" charset="0"/>
+              </a:rPr>
+              <a:t>Interrupt handling flow (Normal Mode) :</a:t>
+            </a:r>
+            <a:endParaRPr kumimoji="0" lang="en-US" altLang="en-US" sz="1800" b="0" i="0" u="none" strike="noStrike" cap="none" normalizeH="0" baseline="0" dirty="0">
+              <a:ln>
+                <a:noFill/>
+              </a:ln>
+              <a:solidFill>
+                <a:schemeClr val="tx1"/>
+              </a:solidFill>
+              <a:effectLst/>
+              <a:latin typeface="Times New Roman" panose="02020603050405020304" pitchFamily="18" charset="0"/>
+              <a:cs typeface="Times New Roman" panose="02020603050405020304" pitchFamily="18" charset="0"/>
+            </a:endParaRPr>
+          </a:p>
+          <a:p>
+            <a:pPr marL="0" marR="0" lvl="0" indent="0" algn="l" defTabSz="914400" rtl="0" eaLnBrk="0" fontAlgn="base" latinLnBrk="0" hangingPunct="0">
+              <a:lnSpc>
+                <a:spcPct val="150000"/>
+              </a:lnSpc>
+              <a:spcBef>
+                <a:spcPct val="0"/>
+              </a:spcBef>
+              <a:spcAft>
+                <a:spcPct val="0"/>
+              </a:spcAft>
+              <a:buClrTx/>
+              <a:buSzTx/>
+              <a:buFontTx/>
+              <a:buAutoNum type="arabicPeriod"/>
+              <a:tabLst/>
+            </a:pPr>
+            <a:r>
+              <a:rPr kumimoji="0" lang="en-US" altLang="en-US" sz="1800" b="0" i="0" u="none" strike="noStrike" cap="none" normalizeH="0" baseline="0" dirty="0">
+                <a:ln>
+                  <a:noFill/>
+                </a:ln>
+                <a:solidFill>
+                  <a:schemeClr val="tx1"/>
+                </a:solidFill>
+                <a:effectLst/>
+                <a:latin typeface="Times New Roman" panose="02020603050405020304" pitchFamily="18" charset="0"/>
+                <a:cs typeface="Times New Roman" panose="02020603050405020304" pitchFamily="18" charset="0"/>
+              </a:rPr>
+              <a:t>Peripheral asserts interrupt line</a:t>
+            </a:r>
+          </a:p>
+          <a:p>
+            <a:pPr marL="0" marR="0" lvl="0" indent="0" algn="l" defTabSz="914400" rtl="0" eaLnBrk="0" fontAlgn="base" latinLnBrk="0" hangingPunct="0">
+              <a:lnSpc>
+                <a:spcPct val="150000"/>
+              </a:lnSpc>
+              <a:spcBef>
+                <a:spcPct val="0"/>
+              </a:spcBef>
+              <a:spcAft>
+                <a:spcPct val="0"/>
+              </a:spcAft>
+              <a:buClrTx/>
+              <a:buSzTx/>
+              <a:buFontTx/>
+              <a:buAutoNum type="arabicPeriod" startAt="2"/>
+              <a:tabLst/>
+            </a:pPr>
+            <a:r>
+              <a:rPr kumimoji="0" lang="en-US" altLang="en-US" sz="1800" b="0" i="0" u="none" strike="noStrike" cap="none" normalizeH="0" baseline="0" dirty="0" err="1">
+                <a:ln>
+                  <a:noFill/>
+                </a:ln>
+                <a:solidFill>
+                  <a:schemeClr val="tx1"/>
+                </a:solidFill>
+                <a:effectLst/>
+                <a:latin typeface="Times New Roman" panose="02020603050405020304" pitchFamily="18" charset="0"/>
+                <a:cs typeface="Times New Roman" panose="02020603050405020304" pitchFamily="18" charset="0"/>
+              </a:rPr>
+              <a:t>Concat</a:t>
+            </a:r>
+            <a:r>
+              <a:rPr kumimoji="0" lang="en-US" altLang="en-US" sz="1800" b="0" i="0" u="none" strike="noStrike" cap="none" normalizeH="0" baseline="0" dirty="0">
+                <a:ln>
+                  <a:noFill/>
+                </a:ln>
+                <a:solidFill>
+                  <a:schemeClr val="tx1"/>
+                </a:solidFill>
+                <a:effectLst/>
+                <a:latin typeface="Times New Roman" panose="02020603050405020304" pitchFamily="18" charset="0"/>
+                <a:cs typeface="Times New Roman" panose="02020603050405020304" pitchFamily="18" charset="0"/>
+              </a:rPr>
+              <a:t> interrupt lines → AXI Interrupt Controller </a:t>
+            </a:r>
+          </a:p>
+          <a:p>
+            <a:pPr marL="0" marR="0" lvl="0" indent="0" algn="l" defTabSz="914400" rtl="0" eaLnBrk="0" fontAlgn="base" latinLnBrk="0" hangingPunct="0">
+              <a:lnSpc>
+                <a:spcPct val="150000"/>
+              </a:lnSpc>
+              <a:spcBef>
+                <a:spcPct val="0"/>
+              </a:spcBef>
+              <a:spcAft>
+                <a:spcPct val="0"/>
+              </a:spcAft>
+              <a:buClrTx/>
+              <a:buSzTx/>
+              <a:buFontTx/>
+              <a:buAutoNum type="arabicPeriod" startAt="3"/>
+              <a:tabLst/>
+            </a:pPr>
+            <a:r>
+              <a:rPr kumimoji="0" lang="en-US" altLang="en-US" sz="1800" b="0" i="0" u="none" strike="noStrike" cap="none" normalizeH="0" baseline="0" dirty="0">
+                <a:ln>
+                  <a:noFill/>
+                </a:ln>
+                <a:solidFill>
+                  <a:schemeClr val="tx1"/>
+                </a:solidFill>
+                <a:effectLst/>
+                <a:latin typeface="Times New Roman" panose="02020603050405020304" pitchFamily="18" charset="0"/>
+                <a:cs typeface="Times New Roman" panose="02020603050405020304" pitchFamily="18" charset="0"/>
+              </a:rPr>
+              <a:t>AXI Interrupt Controller asserts IRQ → CPU</a:t>
+            </a:r>
+          </a:p>
+          <a:p>
+            <a:pPr marL="0" marR="0" lvl="0" indent="0" algn="l" defTabSz="914400" rtl="0" eaLnBrk="0" fontAlgn="base" latinLnBrk="0" hangingPunct="0">
+              <a:lnSpc>
+                <a:spcPct val="150000"/>
+              </a:lnSpc>
+              <a:spcBef>
+                <a:spcPct val="0"/>
+              </a:spcBef>
+              <a:spcAft>
+                <a:spcPct val="0"/>
+              </a:spcAft>
+              <a:buClrTx/>
+              <a:buSzTx/>
+              <a:buFontTx/>
+              <a:buAutoNum type="arabicPeriod" startAt="4"/>
+              <a:tabLst/>
+            </a:pPr>
+            <a:r>
+              <a:rPr lang="en-US" altLang="en-US" dirty="0">
+                <a:latin typeface="Times New Roman" panose="02020603050405020304" pitchFamily="18" charset="0"/>
+                <a:cs typeface="Times New Roman" panose="02020603050405020304" pitchFamily="18" charset="0"/>
+              </a:rPr>
+              <a:t>CPU</a:t>
+            </a:r>
+            <a:r>
+              <a:rPr kumimoji="0" lang="en-US" altLang="en-US" sz="1800" b="0" i="0" u="none" strike="noStrike" cap="none" normalizeH="0" baseline="0" dirty="0">
+                <a:ln>
+                  <a:noFill/>
+                </a:ln>
+                <a:solidFill>
+                  <a:schemeClr val="tx1"/>
+                </a:solidFill>
+                <a:effectLst/>
+                <a:latin typeface="Times New Roman" panose="02020603050405020304" pitchFamily="18" charset="0"/>
+                <a:cs typeface="Times New Roman" panose="02020603050405020304" pitchFamily="18" charset="0"/>
+              </a:rPr>
+              <a:t> jumps to fixed ISR entry point </a:t>
+            </a:r>
+          </a:p>
+          <a:p>
+            <a:pPr marL="0" marR="0" lvl="0" indent="0" algn="l" defTabSz="914400" rtl="0" eaLnBrk="0" fontAlgn="base" latinLnBrk="0" hangingPunct="0">
+              <a:lnSpc>
+                <a:spcPct val="150000"/>
+              </a:lnSpc>
+              <a:spcBef>
+                <a:spcPct val="0"/>
+              </a:spcBef>
+              <a:spcAft>
+                <a:spcPct val="0"/>
+              </a:spcAft>
+              <a:buClrTx/>
+              <a:buSzTx/>
+              <a:buFontTx/>
+              <a:buAutoNum type="arabicPeriod" startAt="5"/>
+              <a:tabLst/>
+            </a:pPr>
+            <a:r>
+              <a:rPr lang="en-US" altLang="en-US" dirty="0">
+                <a:latin typeface="Times New Roman" panose="02020603050405020304" pitchFamily="18" charset="0"/>
+                <a:cs typeface="Times New Roman" panose="02020603050405020304" pitchFamily="18" charset="0"/>
+              </a:rPr>
+              <a:t>R</a:t>
+            </a:r>
+            <a:r>
+              <a:rPr kumimoji="0" lang="en-US" altLang="en-US" sz="1800" b="0" i="0" u="none" strike="noStrike" cap="none" normalizeH="0" baseline="0" dirty="0">
+                <a:ln>
+                  <a:noFill/>
+                </a:ln>
+                <a:solidFill>
+                  <a:schemeClr val="tx1"/>
+                </a:solidFill>
+                <a:effectLst/>
+                <a:latin typeface="Times New Roman" panose="02020603050405020304" pitchFamily="18" charset="0"/>
+                <a:cs typeface="Times New Roman" panose="02020603050405020304" pitchFamily="18" charset="0"/>
+              </a:rPr>
+              <a:t>eads </a:t>
+            </a:r>
+            <a:r>
+              <a:rPr lang="en-US" altLang="en-US" dirty="0" err="1">
+                <a:latin typeface="Times New Roman" panose="02020603050405020304" pitchFamily="18" charset="0"/>
+                <a:cs typeface="Times New Roman" panose="02020603050405020304" pitchFamily="18" charset="0"/>
+              </a:rPr>
+              <a:t>axi_intc</a:t>
+            </a:r>
+            <a:r>
+              <a:rPr lang="en-US" altLang="en-US" dirty="0">
+                <a:latin typeface="Times New Roman" panose="02020603050405020304" pitchFamily="18" charset="0"/>
+                <a:cs typeface="Times New Roman" panose="02020603050405020304" pitchFamily="18" charset="0"/>
+              </a:rPr>
+              <a:t> register </a:t>
+            </a:r>
+            <a:r>
+              <a:rPr kumimoji="0" lang="en-US" altLang="en-US" sz="1800" b="0" i="0" u="none" strike="noStrike" cap="none" normalizeH="0" baseline="0" dirty="0">
+                <a:ln>
+                  <a:noFill/>
+                </a:ln>
+                <a:solidFill>
+                  <a:schemeClr val="tx1"/>
+                </a:solidFill>
+                <a:effectLst/>
+                <a:latin typeface="Times New Roman" panose="02020603050405020304" pitchFamily="18" charset="0"/>
+                <a:cs typeface="Times New Roman" panose="02020603050405020304" pitchFamily="18" charset="0"/>
+              </a:rPr>
+              <a:t>to identify source</a:t>
+            </a:r>
+          </a:p>
+          <a:p>
+            <a:pPr marL="0" marR="0" lvl="0" indent="0" algn="l" defTabSz="914400" rtl="0" eaLnBrk="0" fontAlgn="base" latinLnBrk="0" hangingPunct="0">
+              <a:lnSpc>
+                <a:spcPct val="150000"/>
+              </a:lnSpc>
+              <a:spcBef>
+                <a:spcPct val="0"/>
+              </a:spcBef>
+              <a:spcAft>
+                <a:spcPct val="0"/>
+              </a:spcAft>
+              <a:buClrTx/>
+              <a:buSzTx/>
+              <a:buFontTx/>
+              <a:buAutoNum type="arabicPeriod" startAt="6"/>
+              <a:tabLst/>
+            </a:pPr>
+            <a:r>
+              <a:rPr kumimoji="0" lang="en-US" altLang="en-US" sz="1800" b="0" i="0" u="none" strike="noStrike" cap="none" normalizeH="0" baseline="0" dirty="0">
+                <a:ln>
+                  <a:noFill/>
+                </a:ln>
+                <a:solidFill>
+                  <a:schemeClr val="tx1"/>
+                </a:solidFill>
+                <a:effectLst/>
+                <a:latin typeface="Times New Roman" panose="02020603050405020304" pitchFamily="18" charset="0"/>
+                <a:cs typeface="Times New Roman" panose="02020603050405020304" pitchFamily="18" charset="0"/>
+              </a:rPr>
+              <a:t>Branches to corresponding handler </a:t>
+            </a:r>
+          </a:p>
+          <a:p>
+            <a:pPr marL="0" marR="0" lvl="0" indent="0" algn="l" defTabSz="914400" rtl="0" eaLnBrk="0" fontAlgn="base" latinLnBrk="0" hangingPunct="0">
+              <a:lnSpc>
+                <a:spcPct val="150000"/>
+              </a:lnSpc>
+              <a:spcBef>
+                <a:spcPct val="0"/>
+              </a:spcBef>
+              <a:spcAft>
+                <a:spcPct val="0"/>
+              </a:spcAft>
+              <a:buClrTx/>
+              <a:buSzTx/>
+              <a:buFontTx/>
+              <a:buAutoNum type="arabicPeriod" startAt="7"/>
+              <a:tabLst/>
+            </a:pPr>
+            <a:r>
+              <a:rPr kumimoji="0" lang="en-US" altLang="en-US" sz="1800" b="0" i="0" u="none" strike="noStrike" cap="none" normalizeH="0" baseline="0" dirty="0">
+                <a:ln>
+                  <a:noFill/>
+                </a:ln>
+                <a:solidFill>
+                  <a:schemeClr val="tx1"/>
+                </a:solidFill>
+                <a:effectLst/>
+                <a:latin typeface="Times New Roman" panose="02020603050405020304" pitchFamily="18" charset="0"/>
+                <a:cs typeface="Times New Roman" panose="02020603050405020304" pitchFamily="18" charset="0"/>
+              </a:rPr>
+              <a:t>Handler processes the event</a:t>
+            </a:r>
+          </a:p>
+          <a:p>
+            <a:pPr marL="0" marR="0" lvl="0" indent="0" algn="l" defTabSz="914400" rtl="0" eaLnBrk="0" fontAlgn="base" latinLnBrk="0" hangingPunct="0">
+              <a:lnSpc>
+                <a:spcPct val="150000"/>
+              </a:lnSpc>
+              <a:spcBef>
+                <a:spcPct val="0"/>
+              </a:spcBef>
+              <a:spcAft>
+                <a:spcPct val="0"/>
+              </a:spcAft>
+              <a:buClrTx/>
+              <a:buSzTx/>
+              <a:buFontTx/>
+              <a:buAutoNum type="arabicPeriod" startAt="8"/>
+              <a:tabLst/>
+            </a:pPr>
+            <a:r>
+              <a:rPr kumimoji="0" lang="en-US" altLang="en-US" sz="1800" b="1" i="0" u="none" strike="noStrike" cap="none" normalizeH="0" baseline="0" dirty="0">
+                <a:ln>
+                  <a:noFill/>
+                </a:ln>
+                <a:solidFill>
+                  <a:schemeClr val="tx1"/>
+                </a:solidFill>
+                <a:effectLst/>
+                <a:latin typeface="Times New Roman" panose="02020603050405020304" pitchFamily="18" charset="0"/>
+                <a:cs typeface="Times New Roman" panose="02020603050405020304" pitchFamily="18" charset="0"/>
+              </a:rPr>
+              <a:t>Clear peripheral interrupt first</a:t>
+            </a:r>
+            <a:endParaRPr kumimoji="0" lang="en-US" altLang="en-US" sz="1800" b="0" i="0" u="none" strike="noStrike" cap="none" normalizeH="0" baseline="0" dirty="0">
+              <a:ln>
+                <a:noFill/>
+              </a:ln>
+              <a:solidFill>
+                <a:schemeClr val="tx1"/>
+              </a:solidFill>
+              <a:effectLst/>
+              <a:latin typeface="Times New Roman" panose="02020603050405020304" pitchFamily="18" charset="0"/>
+              <a:cs typeface="Times New Roman" panose="02020603050405020304" pitchFamily="18" charset="0"/>
+            </a:endParaRPr>
+          </a:p>
+          <a:p>
+            <a:pPr marL="0" marR="0" lvl="0" indent="0" algn="l" defTabSz="914400" rtl="0" eaLnBrk="0" fontAlgn="base" latinLnBrk="0" hangingPunct="0">
+              <a:lnSpc>
+                <a:spcPct val="150000"/>
+              </a:lnSpc>
+              <a:spcBef>
+                <a:spcPct val="0"/>
+              </a:spcBef>
+              <a:spcAft>
+                <a:spcPct val="0"/>
+              </a:spcAft>
+              <a:buClrTx/>
+              <a:buSzTx/>
+              <a:buFontTx/>
+              <a:buAutoNum type="arabicPeriod" startAt="9"/>
+              <a:tabLst/>
+            </a:pPr>
+            <a:r>
+              <a:rPr kumimoji="0" lang="en-US" altLang="en-US" sz="1800" b="1" i="0" u="none" strike="noStrike" cap="none" normalizeH="0" baseline="0" dirty="0">
+                <a:ln>
+                  <a:noFill/>
+                </a:ln>
+                <a:solidFill>
+                  <a:schemeClr val="tx1"/>
+                </a:solidFill>
+                <a:effectLst/>
+                <a:latin typeface="Times New Roman" panose="02020603050405020304" pitchFamily="18" charset="0"/>
+                <a:cs typeface="Times New Roman" panose="02020603050405020304" pitchFamily="18" charset="0"/>
+              </a:rPr>
+              <a:t>Then clear </a:t>
+            </a:r>
+            <a:r>
+              <a:rPr kumimoji="0" lang="en-US" altLang="en-US" sz="1800" b="1" i="0" u="none" strike="noStrike" cap="none" normalizeH="0" baseline="0" dirty="0" err="1">
+                <a:ln>
+                  <a:noFill/>
+                </a:ln>
+                <a:solidFill>
+                  <a:schemeClr val="tx1"/>
+                </a:solidFill>
+                <a:effectLst/>
+                <a:latin typeface="Times New Roman" panose="02020603050405020304" pitchFamily="18" charset="0"/>
+                <a:cs typeface="Times New Roman" panose="02020603050405020304" pitchFamily="18" charset="0"/>
+              </a:rPr>
+              <a:t>axi_intc</a:t>
+            </a:r>
+            <a:endParaRPr kumimoji="0" lang="en-US" altLang="en-US" sz="1800" b="0" i="0" u="none" strike="noStrike" cap="none" normalizeH="0" baseline="0" dirty="0">
+              <a:ln>
+                <a:noFill/>
+              </a:ln>
+              <a:solidFill>
+                <a:schemeClr val="tx1"/>
+              </a:solidFill>
+              <a:effectLst/>
+              <a:latin typeface="Times New Roman" panose="02020603050405020304" pitchFamily="18" charset="0"/>
+              <a:cs typeface="Times New Roman" panose="02020603050405020304" pitchFamily="18" charset="0"/>
+            </a:endParaRPr>
+          </a:p>
+          <a:p>
+            <a:pPr marL="0" marR="0" lvl="0" indent="0" algn="l" defTabSz="914400" rtl="0" eaLnBrk="0" fontAlgn="base" latinLnBrk="0" hangingPunct="0">
+              <a:lnSpc>
+                <a:spcPct val="150000"/>
+              </a:lnSpc>
+              <a:spcBef>
+                <a:spcPct val="0"/>
+              </a:spcBef>
+              <a:spcAft>
+                <a:spcPct val="0"/>
+              </a:spcAft>
+              <a:buClrTx/>
+              <a:buSzTx/>
+              <a:buFontTx/>
+              <a:buAutoNum type="arabicPeriod" startAt="10"/>
+              <a:tabLst/>
+            </a:pPr>
+            <a:r>
+              <a:rPr kumimoji="0" lang="en-US" altLang="en-US" sz="1800" b="0" i="0" u="none" strike="noStrike" cap="none" normalizeH="0" baseline="0" dirty="0">
+                <a:ln>
+                  <a:noFill/>
+                </a:ln>
+                <a:solidFill>
+                  <a:schemeClr val="tx1"/>
+                </a:solidFill>
+                <a:effectLst/>
+                <a:latin typeface="Times New Roman" panose="02020603050405020304" pitchFamily="18" charset="0"/>
+                <a:cs typeface="Times New Roman" panose="02020603050405020304" pitchFamily="18" charset="0"/>
+              </a:rPr>
+              <a:t>Return from ISR, CPU resumes normal execution</a:t>
+            </a:r>
+          </a:p>
+          <a:p>
+            <a:pPr marL="0" marR="0" lvl="0" indent="0" algn="l" defTabSz="914400" rtl="0" eaLnBrk="0" fontAlgn="base" latinLnBrk="0" hangingPunct="0">
+              <a:lnSpc>
+                <a:spcPct val="150000"/>
+              </a:lnSpc>
+              <a:spcBef>
+                <a:spcPct val="0"/>
+              </a:spcBef>
+              <a:spcAft>
+                <a:spcPct val="0"/>
+              </a:spcAft>
+              <a:buClrTx/>
+              <a:buSzTx/>
+              <a:buFontTx/>
+              <a:buNone/>
+              <a:tabLst/>
+            </a:pPr>
+            <a:endParaRPr kumimoji="0" lang="en-US" altLang="en-US" sz="1800" b="0" i="0" u="none" strike="noStrike" cap="none" normalizeH="0" baseline="0" dirty="0">
+              <a:ln>
+                <a:noFill/>
+              </a:ln>
+              <a:solidFill>
+                <a:schemeClr val="tx1"/>
+              </a:solidFill>
+              <a:effectLst/>
+              <a:latin typeface="Times New Roman" panose="02020603050405020304" pitchFamily="18" charset="0"/>
+              <a:cs typeface="Times New Roman" panose="02020603050405020304" pitchFamily="18" charset="0"/>
+            </a:endParaRPr>
+          </a:p>
+        </p:txBody>
+      </p:sp>
+    </p:spTree>
+    <p:extLst>
+      <p:ext uri="{BB962C8B-B14F-4D97-AF65-F5344CB8AC3E}">
+        <p14:creationId xmlns:p14="http://schemas.microsoft.com/office/powerpoint/2010/main" val="1375800246"/>
+      </p:ext>
+    </p:extLst>
+  </p:cSld>
+  <p:clrMapOvr>
+    <a:masterClrMapping/>
+  </p:clrMapOvr>
+</p:sld>
+</file>
+
+<file path=ppt/slides/slide13.xml><?xml version="1.0" encoding="utf-8"?>
+<p:sld xmlns:a="http://schemas.openxmlformats.org/drawingml/2006/main" xmlns:r="http://schemas.openxmlformats.org/officeDocument/2006/relationships" xmlns:p="http://schemas.openxmlformats.org/presentationml/2006/main">
+  <p:cSld>
+    <p:spTree>
+      <p:nvGrpSpPr>
+        <p:cNvPr id="1" name="">
+          <a:extLst>
+            <a:ext uri="{FF2B5EF4-FFF2-40B4-BE49-F238E27FC236}">
+              <a16:creationId xmlns:a16="http://schemas.microsoft.com/office/drawing/2014/main" id="{1ADECECB-41EC-6E98-3333-33569C1AD5DF}"/>
+            </a:ext>
+          </a:extLst>
+        </p:cNvPr>
+        <p:cNvGrpSpPr/>
+        <p:nvPr/>
+      </p:nvGrpSpPr>
+      <p:grpSpPr>
+        <a:xfrm>
+          <a:off x="0" y="0"/>
+          <a:ext cx="0" cy="0"/>
+          <a:chOff x="0" y="0"/>
+          <a:chExt cx="0" cy="0"/>
+        </a:xfrm>
+      </p:grpSpPr>
+      <p:sp>
+        <p:nvSpPr>
+          <p:cNvPr id="69" name="PlaceHolder 1">
+            <a:extLst>
+              <a:ext uri="{FF2B5EF4-FFF2-40B4-BE49-F238E27FC236}">
+                <a16:creationId xmlns:a16="http://schemas.microsoft.com/office/drawing/2014/main" id="{03AFB70B-EDCA-913A-326C-8E9129EB3887}"/>
+              </a:ext>
+            </a:extLst>
+          </p:cNvPr>
+          <p:cNvSpPr>
+            <a:spLocks noGrp="1"/>
+          </p:cNvSpPr>
+          <p:nvPr>
+            <p:ph type="title"/>
+          </p:nvPr>
+        </p:nvSpPr>
+        <p:spPr>
+          <a:xfrm>
+            <a:off x="1015920" y="0"/>
+            <a:ext cx="10972080" cy="1142280"/>
+          </a:xfrm>
+          <a:prstGeom prst="rect">
+            <a:avLst/>
+          </a:prstGeom>
+          <a:noFill/>
+          <a:ln w="0">
+            <a:noFill/>
+          </a:ln>
+        </p:spPr>
+        <p:txBody>
+          <a:bodyPr lIns="91440" tIns="45720" rIns="91440" bIns="45720" anchor="ctr">
+            <a:noAutofit/>
+          </a:bodyPr>
+          <a:lstStyle/>
+          <a:p>
+            <a:pPr>
+              <a:lnSpc>
+                <a:spcPct val="100000"/>
+              </a:lnSpc>
+              <a:tabLst>
+                <a:tab pos="0" algn="l"/>
+              </a:tabLst>
+            </a:pPr>
+            <a:r>
+              <a:rPr lang="en-US" sz="4000" b="1" spc="-1" dirty="0">
+                <a:solidFill>
+                  <a:srgbClr val="DDDDDD"/>
+                </a:solidFill>
+                <a:latin typeface="Calibri"/>
+                <a:ea typeface="Calibri"/>
+              </a:rPr>
+              <a:t>Memory Hierarchy</a:t>
+            </a:r>
+            <a:endParaRPr lang="en-US" sz="4000" b="0" strike="noStrike" spc="-1" dirty="0">
+              <a:solidFill>
+                <a:srgbClr val="000000"/>
+              </a:solidFill>
+              <a:latin typeface="Arial"/>
+            </a:endParaRPr>
+          </a:p>
+        </p:txBody>
+      </p:sp>
+      <p:sp>
+        <p:nvSpPr>
+          <p:cNvPr id="2" name="動作按鈕: 說明 1">
+            <a:hlinkClick r:id="" action="ppaction://noaction" highlightClick="1"/>
+            <a:extLst>
+              <a:ext uri="{FF2B5EF4-FFF2-40B4-BE49-F238E27FC236}">
+                <a16:creationId xmlns:a16="http://schemas.microsoft.com/office/drawing/2014/main" id="{1070CD87-99C3-73D7-5A50-FC5F6F95ECD1}"/>
+              </a:ext>
+            </a:extLst>
+          </p:cNvPr>
+          <p:cNvSpPr/>
+          <p:nvPr/>
+        </p:nvSpPr>
+        <p:spPr>
+          <a:xfrm>
+            <a:off x="2554664" y="2309567"/>
+            <a:ext cx="6985262" cy="3167406"/>
+          </a:xfrm>
+          <a:prstGeom prst="actionButtonHelp">
+            <a:avLst/>
+          </a:prstGeom>
+        </p:spPr>
+        <p:style>
+          <a:lnRef idx="2">
+            <a:schemeClr val="accent1">
+              <a:shade val="15000"/>
+            </a:schemeClr>
+          </a:lnRef>
+          <a:fillRef idx="1">
+            <a:schemeClr val="accent1"/>
+          </a:fillRef>
+          <a:effectRef idx="0">
+            <a:schemeClr val="accent1"/>
+          </a:effectRef>
+          <a:fontRef idx="minor">
+            <a:schemeClr val="lt1"/>
+          </a:fontRef>
+        </p:style>
+        <p:txBody>
+          <a:bodyPr rtlCol="0" anchor="ctr"/>
+          <a:lstStyle/>
+          <a:p>
+            <a:pPr algn="ctr"/>
+            <a:endParaRPr lang="en-US"/>
+          </a:p>
+        </p:txBody>
+      </p:sp>
+    </p:spTree>
+    <p:extLst>
+      <p:ext uri="{BB962C8B-B14F-4D97-AF65-F5344CB8AC3E}">
+        <p14:creationId xmlns:p14="http://schemas.microsoft.com/office/powerpoint/2010/main" val="440317662"/>
+      </p:ext>
+    </p:extLst>
+  </p:cSld>
+  <p:clrMapOvr>
+    <a:masterClrMapping/>
+  </p:clrMapOvr>
+</p:sld>
+</file>
+
+<file path=ppt/slides/slide14.xml><?xml version="1.0" encoding="utf-8"?>
+<p:sld xmlns:a="http://schemas.openxmlformats.org/drawingml/2006/main" xmlns:r="http://schemas.openxmlformats.org/officeDocument/2006/relationships" xmlns:p="http://schemas.openxmlformats.org/presentationml/2006/main">
+  <p:cSld>
+    <p:spTree>
+      <p:nvGrpSpPr>
+        <p:cNvPr id="1" name="">
+          <a:extLst>
+            <a:ext uri="{FF2B5EF4-FFF2-40B4-BE49-F238E27FC236}">
+              <a16:creationId xmlns:a16="http://schemas.microsoft.com/office/drawing/2014/main" id="{7326CA2E-524A-9072-A35F-49D89CA22699}"/>
+            </a:ext>
+          </a:extLst>
+        </p:cNvPr>
+        <p:cNvGrpSpPr/>
+        <p:nvPr/>
+      </p:nvGrpSpPr>
+      <p:grpSpPr>
+        <a:xfrm>
+          <a:off x="0" y="0"/>
+          <a:ext cx="0" cy="0"/>
+          <a:chOff x="0" y="0"/>
+          <a:chExt cx="0" cy="0"/>
+        </a:xfrm>
+      </p:grpSpPr>
+      <p:sp>
+        <p:nvSpPr>
+          <p:cNvPr id="69" name="PlaceHolder 1">
+            <a:extLst>
+              <a:ext uri="{FF2B5EF4-FFF2-40B4-BE49-F238E27FC236}">
+                <a16:creationId xmlns:a16="http://schemas.microsoft.com/office/drawing/2014/main" id="{6C0240C6-792C-15A6-F3FA-A8FAFC19401D}"/>
+              </a:ext>
+            </a:extLst>
+          </p:cNvPr>
+          <p:cNvSpPr>
+            <a:spLocks noGrp="1"/>
+          </p:cNvSpPr>
+          <p:nvPr>
+            <p:ph type="title"/>
+          </p:nvPr>
+        </p:nvSpPr>
+        <p:spPr>
+          <a:xfrm>
+            <a:off x="1015920" y="0"/>
+            <a:ext cx="10972080" cy="1142280"/>
+          </a:xfrm>
+          <a:prstGeom prst="rect">
+            <a:avLst/>
+          </a:prstGeom>
+          <a:noFill/>
+          <a:ln w="0">
+            <a:noFill/>
+          </a:ln>
+        </p:spPr>
+        <p:txBody>
+          <a:bodyPr lIns="91440" tIns="45720" rIns="91440" bIns="45720" anchor="ctr">
+            <a:noAutofit/>
+          </a:bodyPr>
+          <a:lstStyle/>
+          <a:p>
+            <a:pPr>
+              <a:lnSpc>
+                <a:spcPct val="100000"/>
+              </a:lnSpc>
+              <a:tabLst>
+                <a:tab pos="0" algn="l"/>
+              </a:tabLst>
+            </a:pPr>
+            <a:r>
+              <a:rPr lang="en-US" sz="4000" b="1" spc="-1" dirty="0">
+                <a:solidFill>
+                  <a:srgbClr val="DDDDDD"/>
+                </a:solidFill>
+                <a:latin typeface="Calibri"/>
+                <a:ea typeface="Calibri"/>
+              </a:rPr>
+              <a:t>IP Memory Mapped</a:t>
+            </a:r>
+            <a:endParaRPr lang="en-US" sz="4000" b="0" strike="noStrike" spc="-1" dirty="0">
+              <a:solidFill>
+                <a:srgbClr val="000000"/>
+              </a:solidFill>
+              <a:latin typeface="Arial"/>
+            </a:endParaRPr>
+          </a:p>
+        </p:txBody>
+      </p:sp>
+      <p:pic>
+        <p:nvPicPr>
+          <p:cNvPr id="3" name="圖片 2">
+            <a:extLst>
+              <a:ext uri="{FF2B5EF4-FFF2-40B4-BE49-F238E27FC236}">
+                <a16:creationId xmlns:a16="http://schemas.microsoft.com/office/drawing/2014/main" id="{7BBD7C3D-B530-67EC-DF8C-5BA1728DA59C}"/>
+              </a:ext>
+            </a:extLst>
+          </p:cNvPr>
+          <p:cNvPicPr>
+            <a:picLocks noChangeAspect="1"/>
+          </p:cNvPicPr>
+          <p:nvPr/>
+        </p:nvPicPr>
+        <p:blipFill>
+          <a:blip r:embed="rId2"/>
+          <a:stretch>
+            <a:fillRect/>
+          </a:stretch>
+        </p:blipFill>
+        <p:spPr>
+          <a:xfrm>
+            <a:off x="77433" y="2169777"/>
+            <a:ext cx="5997179" cy="3910511"/>
+          </a:xfrm>
+          <a:prstGeom prst="rect">
+            <a:avLst/>
+          </a:prstGeom>
+        </p:spPr>
+      </p:pic>
+      <p:pic>
+        <p:nvPicPr>
+          <p:cNvPr id="5" name="圖片 4">
+            <a:extLst>
+              <a:ext uri="{FF2B5EF4-FFF2-40B4-BE49-F238E27FC236}">
+                <a16:creationId xmlns:a16="http://schemas.microsoft.com/office/drawing/2014/main" id="{4CAD433B-7B69-93CF-7F87-2691D5FB9F8E}"/>
+              </a:ext>
+            </a:extLst>
+          </p:cNvPr>
+          <p:cNvPicPr>
+            <a:picLocks noChangeAspect="1"/>
+          </p:cNvPicPr>
+          <p:nvPr/>
+        </p:nvPicPr>
+        <p:blipFill>
+          <a:blip r:embed="rId3"/>
+          <a:stretch>
+            <a:fillRect/>
+          </a:stretch>
+        </p:blipFill>
+        <p:spPr>
+          <a:xfrm>
+            <a:off x="6074612" y="3341230"/>
+            <a:ext cx="5997179" cy="2739058"/>
+          </a:xfrm>
+          <a:prstGeom prst="rect">
+            <a:avLst/>
+          </a:prstGeom>
+        </p:spPr>
+      </p:pic>
+    </p:spTree>
+    <p:extLst>
+      <p:ext uri="{BB962C8B-B14F-4D97-AF65-F5344CB8AC3E}">
+        <p14:creationId xmlns:p14="http://schemas.microsoft.com/office/powerpoint/2010/main" val="3283215765"/>
+      </p:ext>
+    </p:extLst>
+  </p:cSld>
+  <p:clrMapOvr>
+    <a:masterClrMapping/>
+  </p:clrMapOvr>
+</p:sld>
+</file>
+
+<file path=ppt/slides/slide15.xml><?xml version="1.0" encoding="utf-8"?>
+<p:sld xmlns:a="http://schemas.openxmlformats.org/drawingml/2006/main" xmlns:r="http://schemas.openxmlformats.org/officeDocument/2006/relationships" xmlns:p="http://schemas.openxmlformats.org/presentationml/2006/main">
+  <p:cSld>
+    <p:spTree>
+      <p:nvGrpSpPr>
+        <p:cNvPr id="1" name=""/>
+        <p:cNvGrpSpPr/>
+        <p:nvPr/>
+      </p:nvGrpSpPr>
+      <p:grpSpPr>
+        <a:xfrm>
+          <a:off x="0" y="0"/>
+          <a:ext cx="0" cy="0"/>
+          <a:chOff x="0" y="0"/>
+          <a:chExt cx="0" cy="0"/>
+        </a:xfrm>
+      </p:grpSpPr>
+      <p:sp>
+        <p:nvSpPr>
+          <p:cNvPr id="120" name="PlaceHolder 1"/>
+          <p:cNvSpPr>
+            <a:spLocks noGrp="1"/>
+          </p:cNvSpPr>
+          <p:nvPr>
+            <p:ph type="title"/>
+          </p:nvPr>
+        </p:nvSpPr>
+        <p:spPr>
+          <a:xfrm>
+            <a:off x="1015920" y="0"/>
+            <a:ext cx="10972080" cy="1142280"/>
+          </a:xfrm>
+          <a:prstGeom prst="rect">
+            <a:avLst/>
+          </a:prstGeom>
+          <a:noFill/>
+          <a:ln w="0">
+            <a:noFill/>
+          </a:ln>
+        </p:spPr>
+        <p:txBody>
+          <a:bodyPr lIns="91440" tIns="45720" rIns="91440" bIns="45720" anchor="ctr">
+            <a:noAutofit/>
+          </a:bodyPr>
+          <a:lstStyle/>
+          <a:p>
+            <a:pPr indent="0">
+              <a:lnSpc>
+                <a:spcPct val="100000"/>
+              </a:lnSpc>
+              <a:buNone/>
+              <a:tabLst>
+                <a:tab pos="0" algn="l"/>
+              </a:tabLst>
+            </a:pPr>
+            <a:r>
+              <a:rPr lang="en-US" sz="4000" b="1" strike="noStrike" spc="-1" dirty="0">
+                <a:solidFill>
+                  <a:srgbClr val="DDDDDD"/>
+                </a:solidFill>
+                <a:latin typeface="Calibri"/>
+                <a:ea typeface="Calibri"/>
+              </a:rPr>
+              <a:t>Report</a:t>
+            </a:r>
+            <a:endParaRPr lang="en-US" sz="4000" b="0" strike="noStrike" spc="-1" dirty="0">
+              <a:solidFill>
+                <a:srgbClr val="000000"/>
+              </a:solidFill>
+              <a:latin typeface="Arial"/>
+            </a:endParaRPr>
+          </a:p>
+        </p:txBody>
+      </p:sp>
+      <p:pic>
+        <p:nvPicPr>
+          <p:cNvPr id="6" name="圖片 5">
+            <a:extLst>
+              <a:ext uri="{FF2B5EF4-FFF2-40B4-BE49-F238E27FC236}">
+                <a16:creationId xmlns:a16="http://schemas.microsoft.com/office/drawing/2014/main" id="{064D29A8-FD95-783A-AD15-F9C499BE20F3}"/>
+              </a:ext>
+            </a:extLst>
+          </p:cNvPr>
+          <p:cNvPicPr>
+            <a:picLocks noChangeAspect="1"/>
+          </p:cNvPicPr>
+          <p:nvPr/>
+        </p:nvPicPr>
+        <p:blipFill>
+          <a:blip r:embed="rId2">
+            <a:extLst>
+              <a:ext uri="{28A0092B-C50C-407E-A947-70E740481C1C}">
+                <a14:useLocalDpi xmlns:a14="http://schemas.microsoft.com/office/drawing/2010/main" val="0"/>
+              </a:ext>
+            </a:extLst>
+          </a:blip>
+          <a:srcRect l="437"/>
+          <a:stretch>
+            <a:fillRect/>
+          </a:stretch>
+        </p:blipFill>
+        <p:spPr>
+          <a:xfrm>
+            <a:off x="1171638" y="1466849"/>
+            <a:ext cx="4003618" cy="2683615"/>
+          </a:xfrm>
+          <a:prstGeom prst="rect">
+            <a:avLst/>
+          </a:prstGeom>
+        </p:spPr>
+      </p:pic>
+      <p:pic>
+        <p:nvPicPr>
+          <p:cNvPr id="8" name="圖片 7">
+            <a:extLst>
+              <a:ext uri="{FF2B5EF4-FFF2-40B4-BE49-F238E27FC236}">
+                <a16:creationId xmlns:a16="http://schemas.microsoft.com/office/drawing/2014/main" id="{7E5BD6BE-DE73-149C-1877-D7A6E9C1DF36}"/>
+              </a:ext>
+            </a:extLst>
+          </p:cNvPr>
+          <p:cNvPicPr>
+            <a:picLocks noChangeAspect="1"/>
+          </p:cNvPicPr>
+          <p:nvPr/>
+        </p:nvPicPr>
+        <p:blipFill>
+          <a:blip r:embed="rId3">
+            <a:extLst>
+              <a:ext uri="{28A0092B-C50C-407E-A947-70E740481C1C}">
+                <a14:useLocalDpi xmlns:a14="http://schemas.microsoft.com/office/drawing/2010/main" val="0"/>
+              </a:ext>
+            </a:extLst>
+          </a:blip>
+          <a:stretch>
+            <a:fillRect/>
+          </a:stretch>
+        </p:blipFill>
+        <p:spPr>
+          <a:xfrm>
+            <a:off x="6226607" y="1466850"/>
+            <a:ext cx="5095875" cy="1676400"/>
+          </a:xfrm>
+          <a:prstGeom prst="rect">
+            <a:avLst/>
+          </a:prstGeom>
+        </p:spPr>
+      </p:pic>
+      <p:pic>
+        <p:nvPicPr>
+          <p:cNvPr id="10" name="圖片 9">
+            <a:extLst>
+              <a:ext uri="{FF2B5EF4-FFF2-40B4-BE49-F238E27FC236}">
+                <a16:creationId xmlns:a16="http://schemas.microsoft.com/office/drawing/2014/main" id="{6604B8F8-797E-2C2F-ACA8-7C68F608AF60}"/>
+              </a:ext>
+            </a:extLst>
+          </p:cNvPr>
+          <p:cNvPicPr>
+            <a:picLocks noChangeAspect="1"/>
+          </p:cNvPicPr>
+          <p:nvPr/>
+        </p:nvPicPr>
+        <p:blipFill>
+          <a:blip r:embed="rId4">
+            <a:extLst>
+              <a:ext uri="{28A0092B-C50C-407E-A947-70E740481C1C}">
+                <a14:useLocalDpi xmlns:a14="http://schemas.microsoft.com/office/drawing/2010/main" val="0"/>
+              </a:ext>
+            </a:extLst>
+          </a:blip>
+          <a:stretch>
+            <a:fillRect/>
+          </a:stretch>
+        </p:blipFill>
+        <p:spPr>
+          <a:xfrm>
+            <a:off x="6226607" y="3143250"/>
+            <a:ext cx="5114925" cy="3714750"/>
+          </a:xfrm>
+          <a:prstGeom prst="rect">
+            <a:avLst/>
+          </a:prstGeom>
+        </p:spPr>
+      </p:pic>
+      <p:pic>
+        <p:nvPicPr>
+          <p:cNvPr id="12" name="圖片 11">
+            <a:extLst>
+              <a:ext uri="{FF2B5EF4-FFF2-40B4-BE49-F238E27FC236}">
+                <a16:creationId xmlns:a16="http://schemas.microsoft.com/office/drawing/2014/main" id="{9C0E433F-D3EC-6B12-9EAC-B42CBADB704D}"/>
+              </a:ext>
+            </a:extLst>
+          </p:cNvPr>
+          <p:cNvPicPr>
+            <a:picLocks noChangeAspect="1"/>
+          </p:cNvPicPr>
+          <p:nvPr/>
+        </p:nvPicPr>
+        <p:blipFill>
+          <a:blip r:embed="rId5">
+            <a:extLst>
+              <a:ext uri="{28A0092B-C50C-407E-A947-70E740481C1C}">
+                <a14:useLocalDpi xmlns:a14="http://schemas.microsoft.com/office/drawing/2010/main" val="0"/>
+              </a:ext>
+            </a:extLst>
+          </a:blip>
+          <a:stretch>
+            <a:fillRect/>
+          </a:stretch>
+        </p:blipFill>
+        <p:spPr>
+          <a:xfrm>
+            <a:off x="1171638" y="4197644"/>
+            <a:ext cx="4003617" cy="2660356"/>
+          </a:xfrm>
+          <a:prstGeom prst="rect">
+            <a:avLst/>
+          </a:prstGeom>
+        </p:spPr>
+      </p:pic>
+    </p:spTree>
+  </p:cSld>
+  <p:clrMapOvr>
+    <a:masterClrMapping/>
+  </p:clrMapOvr>
+</p:sld>
+</file>
+
+<file path=ppt/slides/slide16.xml><?xml version="1.0" encoding="utf-8"?>
+<p:sld xmlns:a="http://schemas.openxmlformats.org/drawingml/2006/main" xmlns:r="http://schemas.openxmlformats.org/officeDocument/2006/relationships" xmlns:p="http://schemas.openxmlformats.org/presentationml/2006/main">
+  <p:cSld>
+    <p:spTree>
+      <p:nvGrpSpPr>
+        <p:cNvPr id="1" name="">
+          <a:extLst>
+            <a:ext uri="{FF2B5EF4-FFF2-40B4-BE49-F238E27FC236}">
+              <a16:creationId xmlns:a16="http://schemas.microsoft.com/office/drawing/2014/main" id="{83ABAE03-C579-AA4B-69B3-D1D72D14AA46}"/>
+            </a:ext>
+          </a:extLst>
+        </p:cNvPr>
+        <p:cNvGrpSpPr/>
+        <p:nvPr/>
+      </p:nvGrpSpPr>
+      <p:grpSpPr>
+        <a:xfrm>
+          <a:off x="0" y="0"/>
+          <a:ext cx="0" cy="0"/>
+          <a:chOff x="0" y="0"/>
+          <a:chExt cx="0" cy="0"/>
+        </a:xfrm>
+      </p:grpSpPr>
+      <p:pic>
+        <p:nvPicPr>
+          <p:cNvPr id="7" name="圖片 6" descr="一張含有 文字, 螢幕擷取畫面, 軟體, 陳列 的圖片&#10;&#10;AI 產生的內容可能不正確。">
+            <a:extLst>
+              <a:ext uri="{FF2B5EF4-FFF2-40B4-BE49-F238E27FC236}">
+                <a16:creationId xmlns:a16="http://schemas.microsoft.com/office/drawing/2014/main" id="{5CBEF84A-A771-0317-6BEE-0A132B0D968B}"/>
+              </a:ext>
+            </a:extLst>
+          </p:cNvPr>
+          <p:cNvPicPr>
+            <a:picLocks noChangeAspect="1"/>
+          </p:cNvPicPr>
+          <p:nvPr/>
+        </p:nvPicPr>
+        <p:blipFill>
+          <a:blip r:embed="rId2"/>
+          <a:stretch>
+            <a:fillRect/>
+          </a:stretch>
+        </p:blipFill>
+        <p:spPr>
+          <a:xfrm>
+            <a:off x="1392826" y="1542473"/>
+            <a:ext cx="9406348" cy="5315527"/>
+          </a:xfrm>
+          <a:prstGeom prst="rect">
+            <a:avLst/>
+          </a:prstGeom>
+        </p:spPr>
+      </p:pic>
+      <p:sp>
+        <p:nvSpPr>
+          <p:cNvPr id="5" name="標題 1">
+            <a:extLst>
+              <a:ext uri="{FF2B5EF4-FFF2-40B4-BE49-F238E27FC236}">
+                <a16:creationId xmlns:a16="http://schemas.microsoft.com/office/drawing/2014/main" id="{5EE4AFDB-0585-DC74-0BE3-E5BAFECB3BA1}"/>
+              </a:ext>
+            </a:extLst>
+          </p:cNvPr>
+          <p:cNvSpPr>
+            <a:spLocks noGrp="1"/>
+          </p:cNvSpPr>
+          <p:nvPr>
+            <p:ph type="title"/>
+          </p:nvPr>
+        </p:nvSpPr>
+        <p:spPr>
+          <a:xfrm>
+            <a:off x="1015920" y="0"/>
+            <a:ext cx="10972080" cy="1142280"/>
+          </a:xfrm>
+        </p:spPr>
+        <p:txBody>
+          <a:bodyPr/>
+          <a:lstStyle/>
+          <a:p>
+            <a:r>
+              <a:rPr lang="en-US" b="1" spc="-1" dirty="0">
+                <a:solidFill>
+                  <a:srgbClr val="DDDDDD"/>
+                </a:solidFill>
+                <a:latin typeface="Calibri"/>
+                <a:ea typeface="Calibri"/>
+              </a:rPr>
+              <a:t>Software Design Flow</a:t>
+            </a:r>
+            <a:endParaRPr lang="en-US" dirty="0"/>
+          </a:p>
+        </p:txBody>
+      </p:sp>
+    </p:spTree>
+    <p:extLst>
+      <p:ext uri="{BB962C8B-B14F-4D97-AF65-F5344CB8AC3E}">
+        <p14:creationId xmlns:p14="http://schemas.microsoft.com/office/powerpoint/2010/main" val="3315420108"/>
+      </p:ext>
+    </p:extLst>
+  </p:cSld>
+  <p:clrMapOvr>
+    <a:masterClrMapping/>
+  </p:clrMapOvr>
+</p:sld>
+</file>
+
+<file path=ppt/slides/slide17.xml><?xml version="1.0" encoding="utf-8"?>
+<p:sld xmlns:a="http://schemas.openxmlformats.org/drawingml/2006/main" xmlns:r="http://schemas.openxmlformats.org/officeDocument/2006/relationships" xmlns:p="http://schemas.openxmlformats.org/presentationml/2006/main">
+  <p:cSld>
+    <p:spTree>
+      <p:nvGrpSpPr>
+        <p:cNvPr id="1" name=""/>
+        <p:cNvGrpSpPr/>
+        <p:nvPr/>
+      </p:nvGrpSpPr>
+      <p:grpSpPr>
+        <a:xfrm>
+          <a:off x="0" y="0"/>
+          <a:ext cx="0" cy="0"/>
+          <a:chOff x="0" y="0"/>
+          <a:chExt cx="0" cy="0"/>
+        </a:xfrm>
+      </p:grpSpPr>
+      <p:sp>
+        <p:nvSpPr>
+          <p:cNvPr id="3" name="標題 1">
+            <a:extLst>
+              <a:ext uri="{FF2B5EF4-FFF2-40B4-BE49-F238E27FC236}">
+                <a16:creationId xmlns:a16="http://schemas.microsoft.com/office/drawing/2014/main" id="{8BF885F3-C385-1956-B801-98996BADBBF2}"/>
+              </a:ext>
+            </a:extLst>
+          </p:cNvPr>
+          <p:cNvSpPr txBox="1">
+            <a:spLocks/>
+          </p:cNvSpPr>
+          <p:nvPr/>
+        </p:nvSpPr>
+        <p:spPr>
+          <a:xfrm>
+            <a:off x="1015920" y="0"/>
+            <a:ext cx="10972080" cy="1142280"/>
+          </a:xfrm>
+          <a:prstGeom prst="rect">
+            <a:avLst/>
+          </a:prstGeom>
+          <a:noFill/>
+          <a:ln w="0">
+            <a:noFill/>
+          </a:ln>
+        </p:spPr>
+        <p:txBody>
+          <a:bodyPr spcFirstLastPara="1" wrap="square" lIns="91425" tIns="45700" rIns="91425" bIns="45700" anchor="ctr" anchorCtr="0">
+            <a:noAutofit/>
+          </a:bodyPr>
+          <a:lstStyle>
+            <a:lvl1pPr lvl="0" algn="l" defTabSz="914400" rtl="0" eaLnBrk="1" latinLnBrk="0" hangingPunct="1">
+              <a:lnSpc>
+                <a:spcPct val="90000"/>
+              </a:lnSpc>
+              <a:spcBef>
+                <a:spcPts val="0"/>
+              </a:spcBef>
+              <a:spcAft>
+                <a:spcPts val="0"/>
+              </a:spcAft>
+              <a:buSzPts val="1400"/>
+              <a:buNone/>
+              <a:defRPr sz="4400" kern="1200">
+                <a:solidFill>
+                  <a:schemeClr val="tx1"/>
+                </a:solidFill>
+                <a:latin typeface="+mj-lt"/>
+                <a:ea typeface="+mj-ea"/>
+                <a:cs typeface="+mj-cs"/>
+              </a:defRPr>
+            </a:lvl1pPr>
+            <a:lvl2pPr lvl="1" algn="l">
+              <a:spcBef>
+                <a:spcPts val="0"/>
+              </a:spcBef>
+              <a:spcAft>
+                <a:spcPts val="0"/>
+              </a:spcAft>
+              <a:buSzPts val="1400"/>
+              <a:buNone/>
+              <a:defRPr/>
+            </a:lvl2pPr>
+            <a:lvl3pPr lvl="2" algn="l">
+              <a:spcBef>
+                <a:spcPts val="0"/>
+              </a:spcBef>
+              <a:spcAft>
+                <a:spcPts val="0"/>
+              </a:spcAft>
+              <a:buSzPts val="1400"/>
+              <a:buNone/>
+              <a:defRPr/>
+            </a:lvl3pPr>
+            <a:lvl4pPr lvl="3" algn="l">
+              <a:spcBef>
+                <a:spcPts val="0"/>
+              </a:spcBef>
+              <a:spcAft>
+                <a:spcPts val="0"/>
+              </a:spcAft>
+              <a:buSzPts val="1400"/>
+              <a:buNone/>
+              <a:defRPr/>
+            </a:lvl4pPr>
+            <a:lvl5pPr lvl="4" algn="l">
+              <a:spcBef>
+                <a:spcPts val="0"/>
+              </a:spcBef>
+              <a:spcAft>
+                <a:spcPts val="0"/>
+              </a:spcAft>
+              <a:buSzPts val="1400"/>
+              <a:buNone/>
+              <a:defRPr/>
+            </a:lvl5pPr>
+            <a:lvl6pPr lvl="5" algn="l">
+              <a:spcBef>
+                <a:spcPts val="0"/>
+              </a:spcBef>
+              <a:spcAft>
+                <a:spcPts val="0"/>
+              </a:spcAft>
+              <a:buSzPts val="1400"/>
+              <a:buNone/>
+              <a:defRPr/>
+            </a:lvl6pPr>
+            <a:lvl7pPr lvl="6" algn="l">
+              <a:spcBef>
+                <a:spcPts val="0"/>
+              </a:spcBef>
+              <a:spcAft>
+                <a:spcPts val="0"/>
+              </a:spcAft>
+              <a:buSzPts val="1400"/>
+              <a:buNone/>
+              <a:defRPr/>
+            </a:lvl7pPr>
+            <a:lvl8pPr lvl="7" algn="l">
+              <a:spcBef>
+                <a:spcPts val="0"/>
+              </a:spcBef>
+              <a:spcAft>
+                <a:spcPts val="0"/>
+              </a:spcAft>
+              <a:buSzPts val="1400"/>
+              <a:buNone/>
+              <a:defRPr/>
+            </a:lvl8pPr>
+            <a:lvl9pPr lvl="8" algn="l">
+              <a:spcBef>
+                <a:spcPts val="0"/>
+              </a:spcBef>
+              <a:spcAft>
+                <a:spcPts val="0"/>
+              </a:spcAft>
+              <a:buSzPts val="1400"/>
+              <a:buNone/>
+              <a:defRPr/>
+            </a:lvl9pPr>
+          </a:lstStyle>
+          <a:p>
+            <a:r>
+              <a:rPr lang="en-US" b="1" spc="-1" dirty="0">
+                <a:solidFill>
+                  <a:srgbClr val="DDDDDD"/>
+                </a:solidFill>
+                <a:latin typeface="Calibri"/>
+                <a:ea typeface="Calibri"/>
+              </a:rPr>
+              <a:t>Software Design Flow</a:t>
+            </a:r>
+            <a:endParaRPr lang="en-US" dirty="0"/>
+          </a:p>
+        </p:txBody>
+      </p:sp>
+      <p:pic>
+        <p:nvPicPr>
+          <p:cNvPr id="9" name="圖片 8" descr="一張含有 文字, 螢幕擷取畫面, 軟體, 數字 的圖片&#10;&#10;AI 產生的內容可能不正確。">
+            <a:extLst>
+              <a:ext uri="{FF2B5EF4-FFF2-40B4-BE49-F238E27FC236}">
+                <a16:creationId xmlns:a16="http://schemas.microsoft.com/office/drawing/2014/main" id="{76A925FA-6E34-B744-4808-C88EE86A1B3C}"/>
+              </a:ext>
+            </a:extLst>
+          </p:cNvPr>
+          <p:cNvPicPr>
+            <a:picLocks noChangeAspect="1"/>
+          </p:cNvPicPr>
+          <p:nvPr/>
+        </p:nvPicPr>
+        <p:blipFill>
+          <a:blip r:embed="rId2"/>
+          <a:stretch>
+            <a:fillRect/>
+          </a:stretch>
+        </p:blipFill>
+        <p:spPr>
+          <a:xfrm>
+            <a:off x="1372754" y="1563476"/>
+            <a:ext cx="9446491" cy="5294524"/>
+          </a:xfrm>
+          <a:prstGeom prst="rect">
+            <a:avLst/>
+          </a:prstGeom>
+        </p:spPr>
+      </p:pic>
+    </p:spTree>
+    <p:extLst>
+      <p:ext uri="{BB962C8B-B14F-4D97-AF65-F5344CB8AC3E}">
+        <p14:creationId xmlns:p14="http://schemas.microsoft.com/office/powerpoint/2010/main" val="236656645"/>
+      </p:ext>
+    </p:extLst>
+  </p:cSld>
+  <p:clrMapOvr>
+    <a:masterClrMapping/>
+  </p:clrMapOvr>
+</p:sld>
+</file>
+
+<file path=ppt/slides/slide18.xml><?xml version="1.0" encoding="utf-8"?>
+<p:sld xmlns:a="http://schemas.openxmlformats.org/drawingml/2006/main" xmlns:r="http://schemas.openxmlformats.org/officeDocument/2006/relationships" xmlns:p="http://schemas.openxmlformats.org/presentationml/2006/main">
+  <p:cSld>
+    <p:spTree>
+      <p:nvGrpSpPr>
+        <p:cNvPr id="1" name="">
+          <a:extLst>
+            <a:ext uri="{FF2B5EF4-FFF2-40B4-BE49-F238E27FC236}">
               <a16:creationId xmlns:a16="http://schemas.microsoft.com/office/drawing/2014/main" id="{2C0710B4-A7EA-2DFC-F7A3-8DCE98731E52}"/>
             </a:ext>
           </a:extLst>
@@ -9733,6 +14229,26 @@
                 <a:ea typeface="Calibri"/>
               </a:rPr>
               <a:t>Software Design Flow</a:t>
+            </a:r>
+            <a:r>
+              <a:rPr lang="zh-TW" altLang="en-US" b="1" spc="-1" dirty="0">
+                <a:solidFill>
+                  <a:srgbClr val="DDDDDD"/>
+                </a:solidFill>
+                <a:latin typeface="Calibri"/>
+                <a:ea typeface="Calibri"/>
+              </a:rPr>
+              <a:t> </a:t>
+            </a:r>
+            <a:r>
+              <a:rPr lang="en-US" altLang="zh-TW" b="1" spc="-1" dirty="0">
+                <a:solidFill>
+                  <a:srgbClr val="DDDDDD"/>
+                </a:solidFill>
+                <a:latin typeface="Calibri"/>
+                <a:ea typeface="Calibri"/>
+              </a:rPr>
+              <a:t>for Debug</a:t>
             </a:r>
             <a:endParaRPr lang="en-US" dirty="0"/>
           </a:p>
@@ -10090,7 +14606,7 @@
 </p:sld>
 </file>
 
-<file path=ppt/slides/slide11.xml><?xml version="1.0" encoding="utf-8"?>
+<file path=ppt/slides/slide19.xml><?xml version="1.0" encoding="utf-8"?>
 <p:sld xmlns:a="http://schemas.openxmlformats.org/drawingml/2006/main" xmlns:r="http://schemas.openxmlformats.org/officeDocument/2006/relationships" xmlns:p="http://schemas.openxmlformats.org/presentationml/2006/main">
   <p:cSld>
     <p:spTree>
@@ -10173,7 +14689,7 @@
                 <a:latin typeface="Calibri"/>
                 <a:ea typeface="Calibri"/>
               </a:rPr>
-              <a:t>Software Design Flow</a:t>
+              <a:t>Software Design Flow for Debug</a:t>
             </a:r>
             <a:endParaRPr lang="en-US" dirty="0"/>
           </a:p>
@@ -10263,17 +14779,30 @@
             </a:r>
             <a:r>
               <a:rPr lang="en-US" dirty="0" err="1">
+                <a:solidFill>
+                  <a:srgbClr val="FF0000"/>
+                </a:solidFill>
                 <a:latin typeface="Times New Roman" panose="02020603050405020304" pitchFamily="18" charset="0"/>
                 <a:cs typeface="Times New Roman" panose="02020603050405020304" pitchFamily="18" charset="0"/>
               </a:rPr>
               <a:t>MicroBlaze</a:t>
+            </a:r>
+            <a:r>
+              <a:rPr lang="en-US" dirty="0">
+                <a:solidFill>
+                  <a:srgbClr val="FF0000"/>
+                </a:solidFill>
+                <a:latin typeface="Times New Roman" panose="02020603050405020304" pitchFamily="18" charset="0"/>
+                <a:cs typeface="Times New Roman" panose="02020603050405020304" pitchFamily="18" charset="0"/>
+              </a:rPr>
+              <a:t> Debug Module</a:t>
             </a:r>
             <a:r>
               <a:rPr lang="en-US" dirty="0">
                 <a:latin typeface="Times New Roman" panose="02020603050405020304" pitchFamily="18" charset="0"/>
                 <a:cs typeface="Times New Roman" panose="02020603050405020304" pitchFamily="18" charset="0"/>
               </a:rPr>
-              <a:t> Debug Module)</a:t>
+              <a:t>)</a:t>
             </a:r>
           </a:p>
           <a:p>
@@ -10372,140 +14901,6 @@
         <p14:creationId xmlns:p14="http://schemas.microsoft.com/office/powerpoint/2010/main" val="3864692339"/>
       </p:ext>
     </p:extLst>
-  </p:cSld>
-  <p:clrMapOvr>
-    <a:masterClrMapping/>
-  </p:clrMapOvr>
-</p:sld>
-</file>
-
-<file path=ppt/slides/slide12.xml><?xml version="1.0" encoding="utf-8"?>
-<p:sld xmlns:a="http://schemas.openxmlformats.org/drawingml/2006/main" xmlns:r="http://schemas.openxmlformats.org/officeDocument/2006/relationships" xmlns:p="http://schemas.openxmlformats.org/presentationml/2006/main">
-  <p:cSld>
-    <p:spTree>
-      <p:nvGrpSpPr>
-        <p:cNvPr id="1" name=""/>
-        <p:cNvGrpSpPr/>
-        <p:nvPr/>
-      </p:nvGrpSpPr>
-      <p:grpSpPr>
-        <a:xfrm>
-          <a:off x="0" y="0"/>
-          <a:ext cx="0" cy="0"/>
-          <a:chOff x="0" y="0"/>
-          <a:chExt cx="0" cy="0"/>
-        </a:xfrm>
-      </p:grpSpPr>
-      <p:sp>
-        <p:nvSpPr>
-          <p:cNvPr id="129" name="PlaceHolder 1"/>
-          <p:cNvSpPr>
-            <a:spLocks noGrp="1"/>
-          </p:cNvSpPr>
-          <p:nvPr>
-            <p:ph type="title"/>
-          </p:nvPr>
-        </p:nvSpPr>
-        <p:spPr>
-          <a:xfrm>
-            <a:off x="1015920" y="0"/>
-            <a:ext cx="10972080" cy="1142280"/>
-          </a:xfrm>
-          <a:prstGeom prst="rect">
-            <a:avLst/>
-          </a:prstGeom>
-          <a:noFill/>
-          <a:ln w="0">
-            <a:noFill/>
-          </a:ln>
-        </p:spPr>
-        <p:txBody>
-          <a:bodyPr lIns="91440" tIns="45720" rIns="91440" bIns="45720" anchor="ctr">
-            <a:noAutofit/>
-          </a:bodyPr>
-          <a:lstStyle/>
-          <a:p>
-            <a:pPr indent="0">
-              <a:lnSpc>
-                <a:spcPct val="100000"/>
-              </a:lnSpc>
-              <a:buNone/>
-              <a:tabLst>
-                <a:tab pos="0" algn="l"/>
-              </a:tabLst>
-            </a:pPr>
-            <a:r>
-              <a:rPr lang="en-US" sz="4000" b="1" spc="-1" dirty="0">
-                <a:solidFill>
-                  <a:srgbClr val="DDDDDD"/>
-                </a:solidFill>
-                <a:latin typeface="Calibri"/>
-                <a:ea typeface="Calibri"/>
-              </a:rPr>
-              <a:t>Standalone Boot Sequence</a:t>
-            </a:r>
-            <a:endParaRPr lang="en-US" sz="4000" b="0" strike="noStrike" spc="-1" dirty="0">
-              <a:solidFill>
-                <a:srgbClr val="000000"/>
-              </a:solidFill>
-              <a:latin typeface="Arial"/>
-            </a:endParaRPr>
-          </a:p>
-        </p:txBody>
-      </p:sp>
-      <p:sp>
-        <p:nvSpPr>
-          <p:cNvPr id="131" name="AutoShape 3"/>
-          <p:cNvSpPr/>
-          <p:nvPr/>
-        </p:nvSpPr>
-        <p:spPr>
-          <a:xfrm>
-            <a:off x="5943600" y="3276720"/>
-            <a:ext cx="304200" cy="304200"/>
-          </a:xfrm>
-          <a:prstGeom prst="rect">
-            <a:avLst/>
-          </a:prstGeom>
-          <a:noFill/>
-          <a:ln w="0">
-            <a:noFill/>
-          </a:ln>
-        </p:spPr>
-        <p:style>
-          <a:lnRef idx="0">
-            <a:scrgbClr r="0" g="0" b="0"/>
-          </a:lnRef>
-          <a:fillRef idx="0">
-            <a:scrgbClr r="0" g="0" b="0"/>
-          </a:fillRef>
-          <a:effectRef idx="0">
-            <a:scrgbClr r="0" g="0" b="0"/>
-          </a:effectRef>
-          <a:fontRef idx="minor"/>
-        </p:style>
-        <p:txBody>
-          <a:bodyPr lIns="90000" tIns="45000" rIns="90000" bIns="45000" numCol="1" spcCol="0" anchor="t">
-            <a:noAutofit/>
-          </a:bodyPr>
-          <a:lstStyle/>
-          <a:p>
-            <a:pPr>
-              <a:lnSpc>
-                <a:spcPct val="100000"/>
-              </a:lnSpc>
-            </a:pPr>
-            <a:endParaRPr lang="en-US" sz="1400" b="0" strike="noStrike" spc="-1">
-              <a:solidFill>
-                <a:srgbClr val="000000"/>
-              </a:solidFill>
-              <a:latin typeface="Arial"/>
-              <a:ea typeface="Arial"/>
-            </a:endParaRPr>
-          </a:p>
-        </p:txBody>
-      </p:sp>
-    </p:spTree>
   </p:cSld>
   <p:clrMapOvr>
     <a:masterClrMapping/>
@@ -10614,7 +15009,7 @@
         <p:spPr>
           <a:xfrm>
             <a:off x="572575" y="1468582"/>
-            <a:ext cx="11213772" cy="5174493"/>
+            <a:ext cx="11213772" cy="5185522"/>
           </a:xfrm>
           <a:prstGeom prst="rect">
             <a:avLst/>
@@ -10635,7 +15030,7 @@
               <a:buChar char="•"/>
             </a:pPr>
             <a:r>
-              <a:rPr lang="en-US" sz="3200" dirty="0">
+              <a:rPr lang="en-US" sz="2800" dirty="0">
                 <a:latin typeface="Times New Roman" panose="02020603050405020304" pitchFamily="18" charset="0"/>
                 <a:cs typeface="Times New Roman" panose="02020603050405020304" pitchFamily="18" charset="0"/>
               </a:rPr>
@@ -10651,7 +15046,7 @@
               <a:buChar char="•"/>
             </a:pPr>
             <a:r>
-              <a:rPr lang="en-US" sz="3200" dirty="0">
+              <a:rPr lang="en-US" sz="2800" dirty="0">
                 <a:latin typeface="Times New Roman" panose="02020603050405020304" pitchFamily="18" charset="0"/>
                 <a:cs typeface="Times New Roman" panose="02020603050405020304" pitchFamily="18" charset="0"/>
               </a:rPr>
@@ -10667,21 +15062,21 @@
               <a:buChar char="•"/>
             </a:pPr>
             <a:r>
-              <a:rPr lang="en-US" sz="3200" dirty="0">
+              <a:rPr lang="en-US" sz="2800" dirty="0">
                 <a:latin typeface="Times New Roman" panose="02020603050405020304" pitchFamily="18" charset="0"/>
                 <a:cs typeface="Times New Roman" panose="02020603050405020304" pitchFamily="18" charset="0"/>
               </a:rPr>
               <a:t>GPIO / Interrupt System / </a:t>
             </a:r>
             <a:r>
-              <a:rPr lang="zh-TW" altLang="en-US" sz="3200" dirty="0">
+              <a:rPr lang="zh-TW" altLang="en-US" sz="2800" dirty="0">
                 <a:latin typeface="Times New Roman" panose="02020603050405020304" pitchFamily="18" charset="0"/>
                 <a:cs typeface="Times New Roman" panose="02020603050405020304" pitchFamily="18" charset="0"/>
               </a:rPr>
               <a:t> </a:t>
             </a:r>
             <a:r>
-              <a:rPr lang="en-US" altLang="zh-TW" sz="3200" dirty="0">
+              <a:rPr lang="en-US" altLang="zh-TW" sz="2800" dirty="0">
                 <a:latin typeface="Times New Roman" panose="02020603050405020304" pitchFamily="18" charset="0"/>
                 <a:cs typeface="Times New Roman" panose="02020603050405020304" pitchFamily="18" charset="0"/>
               </a:rPr>
@@ -10697,7 +15092,10 @@
               <a:buChar char="•"/>
             </a:pPr>
             <a:r>
-              <a:rPr lang="en-US" sz="3200" dirty="0">
+              <a:rPr lang="en-US" sz="2800" dirty="0">
+                <a:solidFill>
+                  <a:srgbClr val="FF0000"/>
+                </a:solidFill>
                 <a:latin typeface="Times New Roman" panose="02020603050405020304" pitchFamily="18" charset="0"/>
                 <a:cs typeface="Times New Roman" panose="02020603050405020304" pitchFamily="18" charset="0"/>
               </a:rPr>
@@ -10713,13 +15111,27 @@
               <a:buChar char="•"/>
             </a:pPr>
             <a:r>
-              <a:rPr lang="en-US" altLang="zh-TW" sz="3200" dirty="0">
+              <a:rPr lang="en-US" altLang="zh-TW" sz="2800" dirty="0">
                 <a:latin typeface="Times New Roman" panose="02020603050405020304" pitchFamily="18" charset="0"/>
                 <a:cs typeface="Times New Roman" panose="02020603050405020304" pitchFamily="18" charset="0"/>
               </a:rPr>
-              <a:t>Report</a:t>
-            </a:r>
-            <a:endParaRPr lang="en-US" sz="3200" dirty="0">
+              <a:t>IP</a:t>
+            </a:r>
+            <a:r>
+              <a:rPr lang="zh-TW" altLang="en-US" sz="2800" dirty="0">
+                <a:latin typeface="Times New Roman" panose="02020603050405020304" pitchFamily="18" charset="0"/>
+                <a:cs typeface="Times New Roman" panose="02020603050405020304" pitchFamily="18" charset="0"/>
+              </a:rPr>
+              <a:t> </a:t>
+            </a:r>
+            <a:r>
+              <a:rPr lang="en-US" altLang="zh-TW" sz="2800" dirty="0">
+                <a:latin typeface="Times New Roman" panose="02020603050405020304" pitchFamily="18" charset="0"/>
+                <a:cs typeface="Times New Roman" panose="02020603050405020304" pitchFamily="18" charset="0"/>
+              </a:rPr>
+              <a:t>Memory Mapped</a:t>
+            </a:r>
+            <a:endParaRPr lang="en-US" sz="2800" dirty="0">
               <a:latin typeface="Times New Roman" panose="02020603050405020304" pitchFamily="18" charset="0"/>
               <a:cs typeface="Times New Roman" panose="02020603050405020304" pitchFamily="18" charset="0"/>
             </a:endParaRPr>
@@ -10733,12 +15145,16 @@
               <a:buChar char="•"/>
             </a:pPr>
             <a:r>
-              <a:rPr lang="en-US" sz="3200" dirty="0">
+              <a:rPr lang="en-US" altLang="zh-TW" sz="2800" dirty="0">
                 <a:latin typeface="Times New Roman" panose="02020603050405020304" pitchFamily="18" charset="0"/>
                 <a:cs typeface="Times New Roman" panose="02020603050405020304" pitchFamily="18" charset="0"/>
               </a:rPr>
-              <a:t>Software Design Flow</a:t>
-            </a:r>
+              <a:t>Report</a:t>
+            </a:r>
+            <a:endParaRPr lang="en-US" sz="2800" dirty="0">
+              <a:latin typeface="Times New Roman" panose="02020603050405020304" pitchFamily="18" charset="0"/>
+              <a:cs typeface="Times New Roman" panose="02020603050405020304" pitchFamily="18" charset="0"/>
+            </a:endParaRPr>
           </a:p>
           <a:p>
             <a:pPr marL="285750" indent="-285750">
@@ -10749,7 +15165,26 @@
               <a:buChar char="•"/>
             </a:pPr>
             <a:r>
-              <a:rPr lang="en-US" sz="3200" dirty="0">
+              <a:rPr lang="en-US" sz="2800" dirty="0">
+                <a:latin typeface="Times New Roman" panose="02020603050405020304" pitchFamily="18" charset="0"/>
+                <a:cs typeface="Times New Roman" panose="02020603050405020304" pitchFamily="18" charset="0"/>
+              </a:rPr>
+              <a:t>Software Design Flow</a:t>
+            </a:r>
+          </a:p>
+          <a:p>
+            <a:pPr marL="285750" indent="-285750">
+              <a:lnSpc>
+                <a:spcPct val="150000"/>
+              </a:lnSpc>
+              <a:buFont typeface="Arial" panose="020B0604020202020204" pitchFamily="34" charset="0"/>
+              <a:buChar char="•"/>
+            </a:pPr>
+            <a:r>
+              <a:rPr lang="en-US" sz="2800" dirty="0">
+                <a:solidFill>
+                  <a:srgbClr val="FF0000"/>
+                </a:solidFill>
                 <a:latin typeface="Times New Roman" panose="02020603050405020304" pitchFamily="18" charset="0"/>
                 <a:cs typeface="Times New Roman" panose="02020603050405020304" pitchFamily="18" charset="0"/>
               </a:rPr>
@@ -10762,6 +15197,567 @@
     <p:extLst>
       <p:ext uri="{BB962C8B-B14F-4D97-AF65-F5344CB8AC3E}">
         <p14:creationId xmlns:p14="http://schemas.microsoft.com/office/powerpoint/2010/main" val="1176634423"/>
+      </p:ext>
+    </p:extLst>
+  </p:cSld>
+  <p:clrMapOvr>
+    <a:masterClrMapping/>
+  </p:clrMapOvr>
+</p:sld>
+</file>
+
+<file path=ppt/slides/slide20.xml><?xml version="1.0" encoding="utf-8"?>
+<p:sld xmlns:a="http://schemas.openxmlformats.org/drawingml/2006/main" xmlns:r="http://schemas.openxmlformats.org/officeDocument/2006/relationships" xmlns:p="http://schemas.openxmlformats.org/presentationml/2006/main">
+  <p:cSld>
+    <p:spTree>
+      <p:nvGrpSpPr>
+        <p:cNvPr id="1" name=""/>
+        <p:cNvGrpSpPr/>
+        <p:nvPr/>
+      </p:nvGrpSpPr>
+      <p:grpSpPr>
+        <a:xfrm>
+          <a:off x="0" y="0"/>
+          <a:ext cx="0" cy="0"/>
+          <a:chOff x="0" y="0"/>
+          <a:chExt cx="0" cy="0"/>
+        </a:xfrm>
+      </p:grpSpPr>
+      <p:sp>
+        <p:nvSpPr>
+          <p:cNvPr id="129" name="PlaceHolder 1"/>
+          <p:cNvSpPr>
+            <a:spLocks noGrp="1"/>
+          </p:cNvSpPr>
+          <p:nvPr>
+            <p:ph type="title"/>
+          </p:nvPr>
+        </p:nvSpPr>
+        <p:spPr>
+          <a:xfrm>
+            <a:off x="1015920" y="0"/>
+            <a:ext cx="10972080" cy="1142280"/>
+          </a:xfrm>
+          <a:prstGeom prst="rect">
+            <a:avLst/>
+          </a:prstGeom>
+          <a:noFill/>
+          <a:ln w="0">
+            <a:noFill/>
+          </a:ln>
+        </p:spPr>
+        <p:txBody>
+          <a:bodyPr lIns="91440" tIns="45720" rIns="91440" bIns="45720" anchor="ctr">
+            <a:noAutofit/>
+          </a:bodyPr>
+          <a:lstStyle/>
+          <a:p>
+            <a:pPr indent="0">
+              <a:lnSpc>
+                <a:spcPct val="100000"/>
+              </a:lnSpc>
+              <a:buNone/>
+              <a:tabLst>
+                <a:tab pos="0" algn="l"/>
+              </a:tabLst>
+            </a:pPr>
+            <a:r>
+              <a:rPr lang="en-US" sz="4000" b="1" spc="-1" dirty="0">
+                <a:solidFill>
+                  <a:srgbClr val="DDDDDD"/>
+                </a:solidFill>
+                <a:latin typeface="Calibri"/>
+                <a:ea typeface="Calibri"/>
+              </a:rPr>
+              <a:t>Standalone Boot Sequence</a:t>
+            </a:r>
+            <a:endParaRPr lang="en-US" sz="4000" b="0" strike="noStrike" spc="-1" dirty="0">
+              <a:solidFill>
+                <a:srgbClr val="000000"/>
+              </a:solidFill>
+              <a:latin typeface="Arial"/>
+            </a:endParaRPr>
+          </a:p>
+        </p:txBody>
+      </p:sp>
+      <p:sp>
+        <p:nvSpPr>
+          <p:cNvPr id="131" name="AutoShape 3"/>
+          <p:cNvSpPr/>
+          <p:nvPr/>
+        </p:nvSpPr>
+        <p:spPr>
+          <a:xfrm>
+            <a:off x="5943600" y="3276720"/>
+            <a:ext cx="304200" cy="304200"/>
+          </a:xfrm>
+          <a:prstGeom prst="rect">
+            <a:avLst/>
+          </a:prstGeom>
+          <a:noFill/>
+          <a:ln w="0">
+            <a:noFill/>
+          </a:ln>
+        </p:spPr>
+        <p:style>
+          <a:lnRef idx="0">
+            <a:scrgbClr r="0" g="0" b="0"/>
+          </a:lnRef>
+          <a:fillRef idx="0">
+            <a:scrgbClr r="0" g="0" b="0"/>
+          </a:fillRef>
+          <a:effectRef idx="0">
+            <a:scrgbClr r="0" g="0" b="0"/>
+          </a:effectRef>
+          <a:fontRef idx="minor"/>
+        </p:style>
+        <p:txBody>
+          <a:bodyPr lIns="90000" tIns="45000" rIns="90000" bIns="45000" numCol="1" spcCol="0" anchor="t">
+            <a:noAutofit/>
+          </a:bodyPr>
+          <a:lstStyle/>
+          <a:p>
+            <a:pPr>
+              <a:lnSpc>
+                <a:spcPct val="100000"/>
+              </a:lnSpc>
+            </a:pPr>
+            <a:endParaRPr lang="en-US" sz="1400" b="0" strike="noStrike" spc="-1">
+              <a:solidFill>
+                <a:srgbClr val="000000"/>
+              </a:solidFill>
+              <a:latin typeface="Arial"/>
+              <a:ea typeface="Arial"/>
+            </a:endParaRPr>
+          </a:p>
+        </p:txBody>
+      </p:sp>
+      <p:sp>
+        <p:nvSpPr>
+          <p:cNvPr id="2" name="動作按鈕: 說明 1">
+            <a:hlinkClick r:id="" action="ppaction://noaction" highlightClick="1"/>
+            <a:extLst>
+              <a:ext uri="{FF2B5EF4-FFF2-40B4-BE49-F238E27FC236}">
+                <a16:creationId xmlns:a16="http://schemas.microsoft.com/office/drawing/2014/main" id="{003DCC72-29F7-D867-D27E-E276AEB886E7}"/>
+              </a:ext>
+            </a:extLst>
+          </p:cNvPr>
+          <p:cNvSpPr/>
+          <p:nvPr/>
+        </p:nvSpPr>
+        <p:spPr>
+          <a:xfrm>
+            <a:off x="2554664" y="2309567"/>
+            <a:ext cx="6985262" cy="3167406"/>
+          </a:xfrm>
+          <a:prstGeom prst="actionButtonHelp">
+            <a:avLst/>
+          </a:prstGeom>
+        </p:spPr>
+        <p:style>
+          <a:lnRef idx="2">
+            <a:schemeClr val="accent1">
+              <a:shade val="15000"/>
+            </a:schemeClr>
+          </a:lnRef>
+          <a:fillRef idx="1">
+            <a:schemeClr val="accent1"/>
+          </a:fillRef>
+          <a:effectRef idx="0">
+            <a:schemeClr val="accent1"/>
+          </a:effectRef>
+          <a:fontRef idx="minor">
+            <a:schemeClr val="lt1"/>
+          </a:fontRef>
+        </p:style>
+        <p:txBody>
+          <a:bodyPr rtlCol="0" anchor="ctr"/>
+          <a:lstStyle/>
+          <a:p>
+            <a:pPr algn="ctr"/>
+            <a:endParaRPr lang="en-US"/>
+          </a:p>
+        </p:txBody>
+      </p:sp>
+    </p:spTree>
+  </p:cSld>
+  <p:clrMapOvr>
+    <a:masterClrMapping/>
+  </p:clrMapOvr>
+</p:sld>
+</file>
+
+<file path=ppt/slides/slide21.xml><?xml version="1.0" encoding="utf-8"?>
+<p:sld xmlns:a="http://schemas.openxmlformats.org/drawingml/2006/main" xmlns:r="http://schemas.openxmlformats.org/officeDocument/2006/relationships" xmlns:p="http://schemas.openxmlformats.org/presentationml/2006/main">
+  <p:cSld>
+    <p:spTree>
+      <p:nvGrpSpPr>
+        <p:cNvPr id="1" name="">
+          <a:extLst>
+            <a:ext uri="{FF2B5EF4-FFF2-40B4-BE49-F238E27FC236}">
+              <a16:creationId xmlns:a16="http://schemas.microsoft.com/office/drawing/2014/main" id="{EF09146F-4393-892E-2F12-74F505DADA0A}"/>
+            </a:ext>
+          </a:extLst>
+        </p:cNvPr>
+        <p:cNvGrpSpPr/>
+        <p:nvPr/>
+      </p:nvGrpSpPr>
+      <p:grpSpPr>
+        <a:xfrm>
+          <a:off x="0" y="0"/>
+          <a:ext cx="0" cy="0"/>
+          <a:chOff x="0" y="0"/>
+          <a:chExt cx="0" cy="0"/>
+        </a:xfrm>
+      </p:grpSpPr>
+      <p:sp>
+        <p:nvSpPr>
+          <p:cNvPr id="129" name="PlaceHolder 1">
+            <a:extLst>
+              <a:ext uri="{FF2B5EF4-FFF2-40B4-BE49-F238E27FC236}">
+                <a16:creationId xmlns:a16="http://schemas.microsoft.com/office/drawing/2014/main" id="{733187EC-F55F-314C-501F-ABB344AAF66F}"/>
+              </a:ext>
+            </a:extLst>
+          </p:cNvPr>
+          <p:cNvSpPr>
+            <a:spLocks noGrp="1"/>
+          </p:cNvSpPr>
+          <p:nvPr>
+            <p:ph type="title"/>
+          </p:nvPr>
+        </p:nvSpPr>
+        <p:spPr>
+          <a:xfrm>
+            <a:off x="1015920" y="0"/>
+            <a:ext cx="10972080" cy="1142280"/>
+          </a:xfrm>
+          <a:prstGeom prst="rect">
+            <a:avLst/>
+          </a:prstGeom>
+          <a:noFill/>
+          <a:ln w="0">
+            <a:noFill/>
+          </a:ln>
+        </p:spPr>
+        <p:txBody>
+          <a:bodyPr lIns="91440" tIns="45720" rIns="91440" bIns="45720" anchor="ctr">
+            <a:noAutofit/>
+          </a:bodyPr>
+          <a:lstStyle/>
+          <a:p>
+            <a:pPr indent="0">
+              <a:lnSpc>
+                <a:spcPct val="100000"/>
+              </a:lnSpc>
+              <a:buNone/>
+              <a:tabLst>
+                <a:tab pos="0" algn="l"/>
+              </a:tabLst>
+            </a:pPr>
+            <a:r>
+              <a:rPr lang="en-US" altLang="zh-TW" sz="4000" b="1" strike="noStrike" spc="-1" dirty="0">
+                <a:solidFill>
+                  <a:srgbClr val="DDDDDD"/>
+                </a:solidFill>
+                <a:latin typeface="Calibri"/>
+                <a:ea typeface="Calibri"/>
+              </a:rPr>
+              <a:t>Issue to Address</a:t>
+            </a:r>
+            <a:endParaRPr lang="en-US" sz="4000" b="0" strike="noStrike" spc="-1" dirty="0">
+              <a:solidFill>
+                <a:srgbClr val="000000"/>
+              </a:solidFill>
+              <a:latin typeface="Arial"/>
+            </a:endParaRPr>
+          </a:p>
+        </p:txBody>
+      </p:sp>
+      <p:sp>
+        <p:nvSpPr>
+          <p:cNvPr id="131" name="AutoShape 3">
+            <a:extLst>
+              <a:ext uri="{FF2B5EF4-FFF2-40B4-BE49-F238E27FC236}">
+                <a16:creationId xmlns:a16="http://schemas.microsoft.com/office/drawing/2014/main" id="{2CC01002-543C-89A6-5077-F58D57F7F171}"/>
+              </a:ext>
+            </a:extLst>
+          </p:cNvPr>
+          <p:cNvSpPr/>
+          <p:nvPr/>
+        </p:nvSpPr>
+        <p:spPr>
+          <a:xfrm>
+            <a:off x="5943600" y="3276720"/>
+            <a:ext cx="304200" cy="304200"/>
+          </a:xfrm>
+          <a:prstGeom prst="rect">
+            <a:avLst/>
+          </a:prstGeom>
+          <a:noFill/>
+          <a:ln w="0">
+            <a:noFill/>
+          </a:ln>
+        </p:spPr>
+        <p:style>
+          <a:lnRef idx="0">
+            <a:scrgbClr r="0" g="0" b="0"/>
+          </a:lnRef>
+          <a:fillRef idx="0">
+            <a:scrgbClr r="0" g="0" b="0"/>
+          </a:fillRef>
+          <a:effectRef idx="0">
+            <a:scrgbClr r="0" g="0" b="0"/>
+          </a:effectRef>
+          <a:fontRef idx="minor"/>
+        </p:style>
+        <p:txBody>
+          <a:bodyPr lIns="90000" tIns="45000" rIns="90000" bIns="45000" numCol="1" spcCol="0" anchor="t">
+            <a:noAutofit/>
+          </a:bodyPr>
+          <a:lstStyle/>
+          <a:p>
+            <a:pPr>
+              <a:lnSpc>
+                <a:spcPct val="100000"/>
+              </a:lnSpc>
+            </a:pPr>
+            <a:endParaRPr lang="en-US" sz="1400" b="0" strike="noStrike" spc="-1">
+              <a:solidFill>
+                <a:srgbClr val="000000"/>
+              </a:solidFill>
+              <a:latin typeface="Arial"/>
+              <a:ea typeface="Arial"/>
+            </a:endParaRPr>
+          </a:p>
+        </p:txBody>
+      </p:sp>
+      <p:sp>
+        <p:nvSpPr>
+          <p:cNvPr id="2" name="文字方塊 1">
+            <a:extLst>
+              <a:ext uri="{FF2B5EF4-FFF2-40B4-BE49-F238E27FC236}">
+                <a16:creationId xmlns:a16="http://schemas.microsoft.com/office/drawing/2014/main" id="{00ADD298-6CC4-87F8-4C0B-13D75EAD4D37}"/>
+              </a:ext>
+            </a:extLst>
+          </p:cNvPr>
+          <p:cNvSpPr txBox="1"/>
+          <p:nvPr/>
+        </p:nvSpPr>
+        <p:spPr>
+          <a:xfrm>
+            <a:off x="598394" y="1707776"/>
+            <a:ext cx="10972080" cy="3046988"/>
+          </a:xfrm>
+          <a:prstGeom prst="rect">
+            <a:avLst/>
+          </a:prstGeom>
+          <a:noFill/>
+        </p:spPr>
+        <p:txBody>
+          <a:bodyPr wrap="square" rtlCol="0">
+            <a:spAutoFit/>
+          </a:bodyPr>
+          <a:lstStyle/>
+          <a:p>
+            <a:pPr marL="285750" indent="-285750">
+              <a:buFont typeface="Arial" panose="020B0604020202020204" pitchFamily="34" charset="0"/>
+              <a:buChar char="•"/>
+            </a:pPr>
+            <a:r>
+              <a:rPr lang="en-US" sz="2400" dirty="0">
+                <a:latin typeface="Times New Roman" panose="02020603050405020304" pitchFamily="18" charset="0"/>
+                <a:cs typeface="Times New Roman" panose="02020603050405020304" pitchFamily="18" charset="0"/>
+              </a:rPr>
+              <a:t>Interrupt (GPIO / Timer)</a:t>
+            </a:r>
+          </a:p>
+          <a:p>
+            <a:pPr marL="285750" indent="-285750">
+              <a:buFont typeface="Arial" panose="020B0604020202020204" pitchFamily="34" charset="0"/>
+              <a:buChar char="•"/>
+            </a:pPr>
+            <a:r>
+              <a:rPr lang="en-US" sz="2400" dirty="0">
+                <a:latin typeface="Times New Roman" panose="02020603050405020304" pitchFamily="18" charset="0"/>
+                <a:cs typeface="Times New Roman" panose="02020603050405020304" pitchFamily="18" charset="0"/>
+              </a:rPr>
+              <a:t>GPIO input </a:t>
+            </a:r>
+          </a:p>
+          <a:p>
+            <a:pPr marL="285750" indent="-285750">
+              <a:buFont typeface="Arial" panose="020B0604020202020204" pitchFamily="34" charset="0"/>
+              <a:buChar char="•"/>
+            </a:pPr>
+            <a:r>
+              <a:rPr lang="en-US" sz="2400" dirty="0" err="1">
+                <a:latin typeface="Times New Roman" panose="02020603050405020304" pitchFamily="18" charset="0"/>
+                <a:cs typeface="Times New Roman" panose="02020603050405020304" pitchFamily="18" charset="0"/>
+              </a:rPr>
+              <a:t>uart</a:t>
+            </a:r>
+            <a:r>
+              <a:rPr lang="en-US" sz="2400" dirty="0">
+                <a:latin typeface="Times New Roman" panose="02020603050405020304" pitchFamily="18" charset="0"/>
+                <a:cs typeface="Times New Roman" panose="02020603050405020304" pitchFamily="18" charset="0"/>
+              </a:rPr>
+              <a:t> 16550 Baud Rate </a:t>
+            </a:r>
+            <a:r>
+              <a:rPr lang="zh-TW" altLang="en-US" sz="2400" dirty="0">
+                <a:latin typeface="Times New Roman" panose="02020603050405020304" pitchFamily="18" charset="0"/>
+                <a:cs typeface="Times New Roman" panose="02020603050405020304" pitchFamily="18" charset="0"/>
+              </a:rPr>
+              <a:t>更改 </a:t>
+            </a:r>
+            <a:endParaRPr lang="en-US" altLang="zh-TW" sz="2400" dirty="0">
+              <a:latin typeface="Times New Roman" panose="02020603050405020304" pitchFamily="18" charset="0"/>
+              <a:cs typeface="Times New Roman" panose="02020603050405020304" pitchFamily="18" charset="0"/>
+            </a:endParaRPr>
+          </a:p>
+          <a:p>
+            <a:pPr marL="285750" indent="-285750">
+              <a:buFont typeface="Arial" panose="020B0604020202020204" pitchFamily="34" charset="0"/>
+              <a:buChar char="•"/>
+            </a:pPr>
+            <a:r>
+              <a:rPr lang="en-US" sz="2400" dirty="0">
+                <a:latin typeface="Times New Roman" panose="02020603050405020304" pitchFamily="18" charset="0"/>
+                <a:cs typeface="Times New Roman" panose="02020603050405020304" pitchFamily="18" charset="0"/>
+              </a:rPr>
+              <a:t>XADC </a:t>
+            </a:r>
+            <a:r>
+              <a:rPr lang="zh-TW" altLang="en-US" sz="2400" dirty="0">
+                <a:latin typeface="Times New Roman" panose="02020603050405020304" pitchFamily="18" charset="0"/>
+                <a:cs typeface="Times New Roman" panose="02020603050405020304" pitchFamily="18" charset="0"/>
+              </a:rPr>
+              <a:t>五個</a:t>
+            </a:r>
+            <a:r>
+              <a:rPr lang="en-US" altLang="zh-TW" sz="2400" dirty="0">
+                <a:latin typeface="Times New Roman" panose="02020603050405020304" pitchFamily="18" charset="0"/>
+                <a:cs typeface="Times New Roman" panose="02020603050405020304" pitchFamily="18" charset="0"/>
+              </a:rPr>
+              <a:t>channel</a:t>
+            </a:r>
+            <a:r>
+              <a:rPr lang="zh-TW" altLang="en-US" sz="2400" dirty="0">
+                <a:latin typeface="Times New Roman" panose="02020603050405020304" pitchFamily="18" charset="0"/>
+                <a:cs typeface="Times New Roman" panose="02020603050405020304" pitchFamily="18" charset="0"/>
+              </a:rPr>
+              <a:t>讀值</a:t>
+            </a:r>
+            <a:endParaRPr lang="en-US" sz="2400" dirty="0">
+              <a:latin typeface="Times New Roman" panose="02020603050405020304" pitchFamily="18" charset="0"/>
+              <a:cs typeface="Times New Roman" panose="02020603050405020304" pitchFamily="18" charset="0"/>
+            </a:endParaRPr>
+          </a:p>
+          <a:p>
+            <a:pPr marL="285750" indent="-285750">
+              <a:buFont typeface="Arial" panose="020B0604020202020204" pitchFamily="34" charset="0"/>
+              <a:buChar char="•"/>
+            </a:pPr>
+            <a:r>
+              <a:rPr lang="en-US" sz="2400" dirty="0">
+                <a:latin typeface="Times New Roman" panose="02020603050405020304" pitchFamily="18" charset="0"/>
+                <a:cs typeface="Times New Roman" panose="02020603050405020304" pitchFamily="18" charset="0"/>
+              </a:rPr>
+              <a:t>QSPI </a:t>
+            </a:r>
+            <a:r>
+              <a:rPr lang="zh-TW" altLang="en-US" sz="2400" dirty="0">
+                <a:latin typeface="Times New Roman" panose="02020603050405020304" pitchFamily="18" charset="0"/>
+                <a:cs typeface="Times New Roman" panose="02020603050405020304" pitchFamily="18" charset="0"/>
+              </a:rPr>
+              <a:t>內建 </a:t>
+            </a:r>
+            <a:r>
+              <a:rPr lang="en-US" sz="2400" dirty="0">
+                <a:latin typeface="Times New Roman" panose="02020603050405020304" pitchFamily="18" charset="0"/>
+                <a:cs typeface="Times New Roman" panose="02020603050405020304" pitchFamily="18" charset="0"/>
+              </a:rPr>
+              <a:t>Bitstream </a:t>
+            </a:r>
+          </a:p>
+          <a:p>
+            <a:pPr marL="285750" indent="-285750">
+              <a:buFont typeface="Arial" panose="020B0604020202020204" pitchFamily="34" charset="0"/>
+              <a:buChar char="•"/>
+            </a:pPr>
+            <a:r>
+              <a:rPr lang="en-US" sz="2400" dirty="0">
+                <a:latin typeface="Times New Roman" panose="02020603050405020304" pitchFamily="18" charset="0"/>
+                <a:cs typeface="Times New Roman" panose="02020603050405020304" pitchFamily="18" charset="0"/>
+              </a:rPr>
+              <a:t>EMC SRAM </a:t>
+            </a:r>
+            <a:r>
+              <a:rPr lang="zh-TW" altLang="en-US" sz="2400" dirty="0">
+                <a:latin typeface="Times New Roman" panose="02020603050405020304" pitchFamily="18" charset="0"/>
+                <a:cs typeface="Times New Roman" panose="02020603050405020304" pitchFamily="18" charset="0"/>
+              </a:rPr>
+              <a:t>使用</a:t>
+            </a:r>
+            <a:endParaRPr lang="en-US" altLang="zh-TW" sz="2400" dirty="0">
+              <a:latin typeface="Times New Roman" panose="02020603050405020304" pitchFamily="18" charset="0"/>
+              <a:cs typeface="Times New Roman" panose="02020603050405020304" pitchFamily="18" charset="0"/>
+            </a:endParaRPr>
+          </a:p>
+          <a:p>
+            <a:pPr marL="285750" indent="-285750">
+              <a:buFont typeface="Arial" panose="020B0604020202020204" pitchFamily="34" charset="0"/>
+              <a:buChar char="•"/>
+            </a:pPr>
+            <a:r>
+              <a:rPr lang="en-US" sz="2400" dirty="0">
+                <a:latin typeface="Times New Roman" panose="02020603050405020304" pitchFamily="18" charset="0"/>
+                <a:cs typeface="Times New Roman" panose="02020603050405020304" pitchFamily="18" charset="0"/>
+              </a:rPr>
+              <a:t>Memory Hier</a:t>
+            </a:r>
+            <a:r>
+              <a:rPr lang="zh-TW" altLang="en-US" sz="2400" dirty="0">
+                <a:latin typeface="Times New Roman" panose="02020603050405020304" pitchFamily="18" charset="0"/>
+                <a:cs typeface="Times New Roman" panose="02020603050405020304" pitchFamily="18" charset="0"/>
+              </a:rPr>
+              <a:t> 設計</a:t>
+            </a:r>
+            <a:endParaRPr lang="en-US" altLang="zh-TW" sz="2400" dirty="0">
+              <a:latin typeface="Times New Roman" panose="02020603050405020304" pitchFamily="18" charset="0"/>
+              <a:cs typeface="Times New Roman" panose="02020603050405020304" pitchFamily="18" charset="0"/>
+            </a:endParaRPr>
+          </a:p>
+          <a:p>
+            <a:pPr marL="285750" indent="-285750">
+              <a:buFont typeface="Arial" panose="020B0604020202020204" pitchFamily="34" charset="0"/>
+              <a:buChar char="•"/>
+            </a:pPr>
+            <a:r>
+              <a:rPr lang="en-US" altLang="zh-TW" sz="2400" dirty="0">
+                <a:latin typeface="Times New Roman" panose="02020603050405020304" pitchFamily="18" charset="0"/>
+                <a:cs typeface="Times New Roman" panose="02020603050405020304" pitchFamily="18" charset="0"/>
+              </a:rPr>
+              <a:t>Standalone Boot Sequence</a:t>
+            </a:r>
+            <a:r>
+              <a:rPr lang="zh-TW" altLang="en-US" sz="2400" dirty="0">
+                <a:latin typeface="Times New Roman" panose="02020603050405020304" pitchFamily="18" charset="0"/>
+                <a:cs typeface="Times New Roman" panose="02020603050405020304" pitchFamily="18" charset="0"/>
+              </a:rPr>
+              <a:t>流程</a:t>
+            </a:r>
+            <a:endParaRPr lang="en-US" sz="2400" dirty="0">
+              <a:latin typeface="Times New Roman" panose="02020603050405020304" pitchFamily="18" charset="0"/>
+              <a:cs typeface="Times New Roman" panose="02020603050405020304" pitchFamily="18" charset="0"/>
+            </a:endParaRPr>
+          </a:p>
+        </p:txBody>
+      </p:sp>
+    </p:spTree>
+    <p:extLst>
+      <p:ext uri="{BB962C8B-B14F-4D97-AF65-F5344CB8AC3E}">
+        <p14:creationId xmlns:p14="http://schemas.microsoft.com/office/powerpoint/2010/main" val="1021360517"/>
       </p:ext>
     </p:extLst>
   </p:cSld>
@@ -11402,8 +16398,8 @@
           </a:p>
         </p:txBody>
       </p:sp>
-      <mc:AlternateContent xmlns:mc="http://schemas.openxmlformats.org/markup-compatibility/2006">
-        <mc:Choice xmlns:a14="http://schemas.microsoft.com/office/drawing/2010/main" Requires="a14">
+      <mc:AlternateContent xmlns:mc="http://schemas.openxmlformats.org/markup-compatibility/2006" xmlns:a14="http://schemas.microsoft.com/office/drawing/2010/main">
+        <mc:Choice Requires="a14">
           <p:sp>
             <p:nvSpPr>
               <p:cNvPr id="7" name="文字方塊 6">
@@ -11432,6 +16428,7 @@
               </a:bodyPr>
               <a:lstStyle/>
               <a:p>
+                <a:pPr/>
                 <a14:m>
                   <m:oMathPara xmlns:m="http://schemas.openxmlformats.org/officeDocument/2006/math">
                     <m:oMathParaPr>
@@ -11752,7 +16749,7 @@
             </p:txBody>
           </p:sp>
         </mc:Choice>
-        <mc:Fallback>
+        <mc:Fallback xmlns="">
           <p:sp>
             <p:nvSpPr>
               <p:cNvPr id="7" name="文字方塊 6">
@@ -11797,8 +16794,8 @@
           </p:sp>
         </mc:Fallback>
       </mc:AlternateContent>
-      <mc:AlternateContent xmlns:mc="http://schemas.openxmlformats.org/markup-compatibility/2006">
-        <mc:Choice xmlns:a14="http://schemas.microsoft.com/office/drawing/2010/main" Requires="a14">
+      <mc:AlternateContent xmlns:mc="http://schemas.openxmlformats.org/markup-compatibility/2006" xmlns:a14="http://schemas.microsoft.com/office/drawing/2010/main">
+        <mc:Choice Requires="a14">
           <p:sp>
             <p:nvSpPr>
               <p:cNvPr id="8" name="文字方塊 7">
@@ -11827,6 +16824,7 @@
               </a:bodyPr>
               <a:lstStyle/>
               <a:p>
+                <a:pPr/>
                 <a14:m>
                   <m:oMathPara xmlns:m="http://schemas.openxmlformats.org/officeDocument/2006/math">
                     <m:oMathParaPr>
@@ -11878,7 +16876,7 @@
             </p:txBody>
           </p:sp>
         </mc:Choice>
-        <mc:Fallback>
+        <mc:Fallback xmlns="">
           <p:sp>
             <p:nvSpPr>
               <p:cNvPr id="8" name="文字方塊 7">
@@ -11923,8 +16921,8 @@
           </p:sp>
         </mc:Fallback>
       </mc:AlternateContent>
-      <mc:AlternateContent xmlns:mc="http://schemas.openxmlformats.org/markup-compatibility/2006">
-        <mc:Choice xmlns:a14="http://schemas.microsoft.com/office/drawing/2010/main" Requires="a14">
+      <mc:AlternateContent xmlns:mc="http://schemas.openxmlformats.org/markup-compatibility/2006" xmlns:a14="http://schemas.microsoft.com/office/drawing/2010/main">
+        <mc:Choice Requires="a14">
           <p:sp>
             <p:nvSpPr>
               <p:cNvPr id="9" name="文字方塊 8">
@@ -11953,6 +16951,7 @@
               </a:bodyPr>
               <a:lstStyle/>
               <a:p>
+                <a:pPr/>
                 <a14:m>
                   <m:oMathPara xmlns:m="http://schemas.openxmlformats.org/officeDocument/2006/math">
                     <m:oMathParaPr>
@@ -12001,7 +17000,7 @@
             </p:txBody>
           </p:sp>
         </mc:Choice>
-        <mc:Fallback>
+        <mc:Fallback xmlns="">
           <p:sp>
             <p:nvSpPr>
               <p:cNvPr id="9" name="文字方塊 8">
@@ -12046,8 +17045,8 @@
           </p:sp>
         </mc:Fallback>
       </mc:AlternateContent>
-      <mc:AlternateContent xmlns:mc="http://schemas.openxmlformats.org/markup-compatibility/2006">
-        <mc:Choice xmlns:a14="http://schemas.microsoft.com/office/drawing/2010/main" Requires="a14">
+      <mc:AlternateContent xmlns:mc="http://schemas.openxmlformats.org/markup-compatibility/2006" xmlns:a14="http://schemas.microsoft.com/office/drawing/2010/main">
+        <mc:Choice Requires="a14">
           <p:sp>
             <p:nvSpPr>
               <p:cNvPr id="12" name="文字方塊 11">
@@ -12076,6 +17075,7 @@
               </a:bodyPr>
               <a:lstStyle/>
               <a:p>
+                <a:pPr/>
                 <a14:m>
                   <m:oMathPara xmlns:m="http://schemas.openxmlformats.org/officeDocument/2006/math">
                     <m:oMathParaPr>
@@ -12136,7 +17136,7 @@
             </p:txBody>
           </p:sp>
         </mc:Choice>
-        <mc:Fallback>
+        <mc:Fallback xmlns="">
           <p:sp>
             <p:nvSpPr>
               <p:cNvPr id="12" name="文字方塊 11">
@@ -12181,8 +17181,8 @@
           </p:sp>
         </mc:Fallback>
       </mc:AlternateContent>
-      <mc:AlternateContent xmlns:mc="http://schemas.openxmlformats.org/markup-compatibility/2006">
-        <mc:Choice xmlns:a14="http://schemas.microsoft.com/office/drawing/2010/main" Requires="a14">
+      <mc:AlternateContent xmlns:mc="http://schemas.openxmlformats.org/markup-compatibility/2006" xmlns:a14="http://schemas.microsoft.com/office/drawing/2010/main">
+        <mc:Choice Requires="a14">
           <p:sp>
             <p:nvSpPr>
               <p:cNvPr id="13" name="文字方塊 12">
@@ -12211,6 +17211,7 @@
               </a:bodyPr>
               <a:lstStyle/>
               <a:p>
+                <a:pPr/>
                 <a14:m>
                   <m:oMathPara xmlns:m="http://schemas.openxmlformats.org/officeDocument/2006/math">
                     <m:oMathParaPr>
@@ -12385,7 +17386,7 @@
             </p:txBody>
           </p:sp>
         </mc:Choice>
-        <mc:Fallback>
+        <mc:Fallback xmlns="">
           <p:sp>
             <p:nvSpPr>
               <p:cNvPr id="13" name="文字方塊 12">
@@ -12570,6 +17571,47 @@
                 <a:cs typeface="Times New Roman" panose="02020603050405020304" pitchFamily="18" charset="0"/>
               </a:rPr>
               <a:t>Filter Capacitor</a:t>
+            </a:r>
+          </a:p>
+        </p:txBody>
+      </p:sp>
+      <p:sp>
+        <p:nvSpPr>
+          <p:cNvPr id="5" name="文字方塊 4">
+            <a:extLst>
+              <a:ext uri="{FF2B5EF4-FFF2-40B4-BE49-F238E27FC236}">
+                <a16:creationId xmlns:a16="http://schemas.microsoft.com/office/drawing/2014/main" id="{CFBCC309-A6C3-9EB9-6B7A-A14AF2B359F8}"/>
+              </a:ext>
+            </a:extLst>
+          </p:cNvPr>
+          <p:cNvSpPr txBox="1"/>
+          <p:nvPr/>
+        </p:nvSpPr>
+        <p:spPr>
+          <a:xfrm>
+            <a:off x="7852527" y="2148378"/>
+            <a:ext cx="1001236" cy="369332"/>
+          </a:xfrm>
+          <a:prstGeom prst="rect">
+            <a:avLst/>
+          </a:prstGeom>
+          <a:noFill/>
+        </p:spPr>
+        <p:txBody>
+          <a:bodyPr wrap="none" rtlCol="0">
+            <a:spAutoFit/>
+          </a:bodyPr>
+          <a:lstStyle/>
+          <a:p>
+            <a:r>
+              <a:rPr lang="en-US" dirty="0">
+                <a:solidFill>
+                  <a:srgbClr val="FF0000"/>
+                </a:solidFill>
+                <a:latin typeface="Times New Roman" panose="02020603050405020304" pitchFamily="18" charset="0"/>
+                <a:cs typeface="Times New Roman" panose="02020603050405020304" pitchFamily="18" charset="0"/>
+              </a:rPr>
+              <a:t>DIP pin:</a:t>
             </a:r>
           </a:p>
         </p:txBody>
@@ -16650,7 +21692,7 @@
         <p:cNvPr id="1" name="">
           <a:extLst>
             <a:ext uri="{FF2B5EF4-FFF2-40B4-BE49-F238E27FC236}">
-              <a16:creationId xmlns:a16="http://schemas.microsoft.com/office/drawing/2014/main" id="{53A962C5-35FB-4D9A-B910-67CDA9F80CBF}"/>
+              <a16:creationId xmlns:a16="http://schemas.microsoft.com/office/drawing/2014/main" id="{62191831-2A4C-DF65-567C-EE4D11008643}"/>
             </a:ext>
           </a:extLst>
         </p:cNvPr>
@@ -16670,7 +21712,7 @@
           <p:cNvPr id="69" name="PlaceHolder 1">
             <a:extLst>
               <a:ext uri="{FF2B5EF4-FFF2-40B4-BE49-F238E27FC236}">
-                <a16:creationId xmlns:a16="http://schemas.microsoft.com/office/drawing/2014/main" id="{65A7F29A-BED8-ADEF-1DC5-B113ECF26AF7}"/>
+                <a16:creationId xmlns:a16="http://schemas.microsoft.com/office/drawing/2014/main" id="{88F64A03-2CB4-0443-D6BF-EF2E219B8EEB}"/>
               </a:ext>
             </a:extLst>
           </p:cNvPr>
@@ -16709,34 +21751,14 @@
               </a:tabLst>
             </a:pPr>
             <a:r>
-              <a:rPr lang="en-US" sz="4000" b="1" spc="-1" dirty="0">
+              <a:rPr lang="en-US" sz="4000" b="1" strike="noStrike" spc="-1" dirty="0">
                 <a:solidFill>
                   <a:srgbClr val="DDDDDD"/>
                 </a:solidFill>
                 <a:latin typeface="Calibri"/>
                 <a:ea typeface="Calibri"/>
               </a:rPr>
-              <a:t>Interrupt</a:t>
-            </a:r>
-            <a:r>
-              <a:rPr lang="zh-TW" altLang="en-US" sz="4000" b="1" spc="-1" dirty="0">
-                <a:solidFill>
-                  <a:srgbClr val="DDDDDD"/>
-                </a:solidFill>
-                <a:latin typeface="Calibri"/>
-                <a:ea typeface="Calibri"/>
-              </a:rPr>
-              <a:t> </a:t>
-            </a:r>
-            <a:r>
-              <a:rPr lang="en-US" altLang="zh-TW" sz="4000" b="1" spc="-1" dirty="0">
-                <a:solidFill>
-                  <a:srgbClr val="DDDDDD"/>
-                </a:solidFill>
-                <a:latin typeface="Calibri"/>
-                <a:ea typeface="Calibri"/>
-              </a:rPr>
-              <a:t>System</a:t>
+              <a:t>Timer &amp; PWM</a:t>
             </a:r>
             <a:endParaRPr lang="en-US" sz="4000" b="0" strike="noStrike" spc="-1" dirty="0">
               <a:solidFill>
@@ -16752,7 +21774,7 @@
           <p:cNvPr id="76" name="矩形 12">
             <a:extLst>
               <a:ext uri="{FF2B5EF4-FFF2-40B4-BE49-F238E27FC236}">
-                <a16:creationId xmlns:a16="http://schemas.microsoft.com/office/drawing/2014/main" id="{F4784BC0-8636-768D-15C1-BB566F7930FC}"/>
+                <a16:creationId xmlns:a16="http://schemas.microsoft.com/office/drawing/2014/main" id="{B73EC499-2E25-D0CE-FF66-8E24EDC6E0A0}"/>
               </a:ext>
             </a:extLst>
           </p:cNvPr>
@@ -16761,7 +21783,7 @@
         </p:nvSpPr>
         <p:spPr>
           <a:xfrm rot="16200000">
-            <a:off x="-1482979" y="4079962"/>
+            <a:off x="-1831771" y="3985694"/>
             <a:ext cx="4367745" cy="254880"/>
           </a:xfrm>
           <a:prstGeom prst="rect">
@@ -16826,7 +21848,7 @@
           <p:cNvPr id="2" name="矩形: 圓角 7">
             <a:extLst>
               <a:ext uri="{FF2B5EF4-FFF2-40B4-BE49-F238E27FC236}">
-                <a16:creationId xmlns:a16="http://schemas.microsoft.com/office/drawing/2014/main" id="{A071B250-DC67-5C0F-A3A6-5D493E72E98A}"/>
+                <a16:creationId xmlns:a16="http://schemas.microsoft.com/office/drawing/2014/main" id="{DA963C86-4AF0-F188-C28F-B45DDF0D177B}"/>
               </a:ext>
             </a:extLst>
           </p:cNvPr>
@@ -16835,7 +21857,7 @@
         </p:nvSpPr>
         <p:spPr>
           <a:xfrm>
-            <a:off x="5791200" y="2116283"/>
+            <a:off x="5442408" y="1929261"/>
             <a:ext cx="1209600" cy="1045080"/>
           </a:xfrm>
           <a:prstGeom prst="roundRect">
@@ -16919,7 +21941,7 @@
           <p:cNvPr id="3" name="矩形: 圓角 7">
             <a:extLst>
               <a:ext uri="{FF2B5EF4-FFF2-40B4-BE49-F238E27FC236}">
-                <a16:creationId xmlns:a16="http://schemas.microsoft.com/office/drawing/2014/main" id="{B3DB2511-DD16-5E19-93C9-4ADFC212D75F}"/>
+                <a16:creationId xmlns:a16="http://schemas.microsoft.com/office/drawing/2014/main" id="{0D078FA6-F4E3-A452-94C1-B5246FA49933}"/>
               </a:ext>
             </a:extLst>
           </p:cNvPr>
@@ -16928,7 +21950,7 @@
         </p:nvSpPr>
         <p:spPr>
           <a:xfrm>
-            <a:off x="2106330" y="4645529"/>
+            <a:off x="1757538" y="3547954"/>
             <a:ext cx="1209600" cy="1045080"/>
           </a:xfrm>
           <a:prstGeom prst="roundRect">
@@ -17010,7 +22032,7 @@
           <p:cNvPr id="4" name="矩形: 圓角 7">
             <a:extLst>
               <a:ext uri="{FF2B5EF4-FFF2-40B4-BE49-F238E27FC236}">
-                <a16:creationId xmlns:a16="http://schemas.microsoft.com/office/drawing/2014/main" id="{A15549A6-1837-4E78-1A3E-B7357020950C}"/>
+                <a16:creationId xmlns:a16="http://schemas.microsoft.com/office/drawing/2014/main" id="{1563438C-8107-06E5-0ECA-3DE53EB058C8}"/>
               </a:ext>
             </a:extLst>
           </p:cNvPr>
@@ -17019,7 +22041,7 @@
         </p:nvSpPr>
         <p:spPr>
           <a:xfrm>
-            <a:off x="2106330" y="3032017"/>
+            <a:off x="1757538" y="1934442"/>
             <a:ext cx="1209600" cy="1045080"/>
           </a:xfrm>
           <a:prstGeom prst="roundRect">
@@ -17096,7 +22118,7 @@
           <p:cNvPr id="5" name="矩形: 圓角 7">
             <a:extLst>
               <a:ext uri="{FF2B5EF4-FFF2-40B4-BE49-F238E27FC236}">
-                <a16:creationId xmlns:a16="http://schemas.microsoft.com/office/drawing/2014/main" id="{729A4D76-64B5-B230-AF12-9F23C1164B95}"/>
+                <a16:creationId xmlns:a16="http://schemas.microsoft.com/office/drawing/2014/main" id="{9330BF17-07A0-79FA-C755-2A6BF2229D71}"/>
               </a:ext>
             </a:extLst>
           </p:cNvPr>
@@ -17105,7 +22127,7 @@
         </p:nvSpPr>
         <p:spPr>
           <a:xfrm>
-            <a:off x="3849345" y="3032017"/>
+            <a:off x="3500553" y="1934442"/>
             <a:ext cx="1209600" cy="1045080"/>
           </a:xfrm>
           <a:prstGeom prst="roundRect">
@@ -17174,7 +22196,7 @@
           <p:cNvPr id="6" name="矩形: 圓角 7">
             <a:extLst>
               <a:ext uri="{FF2B5EF4-FFF2-40B4-BE49-F238E27FC236}">
-                <a16:creationId xmlns:a16="http://schemas.microsoft.com/office/drawing/2014/main" id="{A20D8E79-5A1C-46C5-12E4-D1078D4AF899}"/>
+                <a16:creationId xmlns:a16="http://schemas.microsoft.com/office/drawing/2014/main" id="{C818A15C-38A4-16FC-2D13-50E819D511FD}"/>
               </a:ext>
             </a:extLst>
           </p:cNvPr>
@@ -17183,7 +22205,7 @@
         </p:nvSpPr>
         <p:spPr>
           <a:xfrm>
-            <a:off x="5943600" y="2268683"/>
+            <a:off x="5594808" y="2081661"/>
             <a:ext cx="1209600" cy="1045080"/>
           </a:xfrm>
           <a:prstGeom prst="roundRect">
@@ -17267,7 +22289,7 @@
           <p:cNvPr id="7" name="矩形: 圓角 7">
             <a:extLst>
               <a:ext uri="{FF2B5EF4-FFF2-40B4-BE49-F238E27FC236}">
-                <a16:creationId xmlns:a16="http://schemas.microsoft.com/office/drawing/2014/main" id="{27EA8936-13A4-647E-AF3B-E317B7AE4F8A}"/>
+                <a16:creationId xmlns:a16="http://schemas.microsoft.com/office/drawing/2014/main" id="{B691A30F-739D-06E5-2FCB-3067AF7E65C5}"/>
               </a:ext>
             </a:extLst>
           </p:cNvPr>
@@ -17276,7 +22298,7 @@
         </p:nvSpPr>
         <p:spPr>
           <a:xfrm>
-            <a:off x="6096000" y="2421083"/>
+            <a:off x="5747208" y="2234061"/>
             <a:ext cx="1209600" cy="1045080"/>
           </a:xfrm>
           <a:prstGeom prst="roundRect">
@@ -17357,355 +22379,10 @@
       </p:sp>
       <p:sp>
         <p:nvSpPr>
-          <p:cNvPr id="9" name="矩形: 圓角 7">
-            <a:extLst>
-              <a:ext uri="{FF2B5EF4-FFF2-40B4-BE49-F238E27FC236}">
-                <a16:creationId xmlns:a16="http://schemas.microsoft.com/office/drawing/2014/main" id="{A76D9882-91B0-790B-02C1-BA456663A952}"/>
-              </a:ext>
-            </a:extLst>
-          </p:cNvPr>
-          <p:cNvSpPr/>
-          <p:nvPr/>
-        </p:nvSpPr>
-        <p:spPr>
-          <a:xfrm>
-            <a:off x="5791200" y="3797805"/>
-            <a:ext cx="1209600" cy="1045080"/>
-          </a:xfrm>
-          <a:prstGeom prst="roundRect">
-            <a:avLst>
-              <a:gd name="adj" fmla="val 16667"/>
-            </a:avLst>
-          </a:prstGeom>
-          <a:solidFill>
-            <a:schemeClr val="accent2">
-              <a:lumMod val="40000"/>
-              <a:lumOff val="60000"/>
-            </a:schemeClr>
-          </a:solidFill>
-          <a:ln>
-            <a:solidFill>
-              <a:srgbClr val="516263"/>
-            </a:solidFill>
-            <a:round/>
-          </a:ln>
-        </p:spPr>
-        <p:style>
-          <a:lnRef idx="2">
-            <a:schemeClr val="accent1">
-              <a:shade val="15000"/>
-            </a:schemeClr>
-          </a:lnRef>
-          <a:fillRef idx="1">
-            <a:schemeClr val="accent1"/>
-          </a:fillRef>
-          <a:effectRef idx="0">
-            <a:schemeClr val="accent1"/>
-          </a:effectRef>
-          <a:fontRef idx="minor"/>
-        </p:style>
-        <p:txBody>
-          <a:bodyPr lIns="90000" tIns="45000" rIns="90000" bIns="45000" anchor="ctr">
-            <a:noAutofit/>
-          </a:bodyPr>
-          <a:lstStyle/>
-          <a:p>
-            <a:pPr algn="ctr">
-              <a:lnSpc>
-                <a:spcPct val="100000"/>
-              </a:lnSpc>
-            </a:pPr>
-            <a:r>
-              <a:rPr lang="en-US" sz="1400" b="0" strike="noStrike" spc="-1" dirty="0">
-                <a:solidFill>
-                  <a:schemeClr val="dk1"/>
-                </a:solidFill>
-                <a:latin typeface="Arial"/>
-                <a:ea typeface="Arial"/>
-              </a:rPr>
-              <a:t>AXI </a:t>
-            </a:r>
-            <a:r>
-              <a:rPr lang="en-US" sz="1400" spc="-1" dirty="0">
-                <a:solidFill>
-                  <a:schemeClr val="dk1"/>
-                </a:solidFill>
-                <a:latin typeface="Arial"/>
-                <a:ea typeface="Arial"/>
-              </a:rPr>
-              <a:t>GPIO</a:t>
-            </a:r>
-            <a:r>
-              <a:rPr lang="en-US" sz="1400" b="0" strike="noStrike" spc="-1" dirty="0">
-                <a:solidFill>
-                  <a:schemeClr val="dk1"/>
-                </a:solidFill>
-                <a:latin typeface="Arial"/>
-                <a:ea typeface="Arial"/>
-              </a:rPr>
-              <a:t> </a:t>
-            </a:r>
-          </a:p>
-          <a:p>
-            <a:pPr algn="ctr">
-              <a:lnSpc>
-                <a:spcPct val="100000"/>
-              </a:lnSpc>
-            </a:pPr>
-            <a:r>
-              <a:rPr lang="en-US" sz="1400" spc="-1" dirty="0">
-                <a:solidFill>
-                  <a:schemeClr val="dk1"/>
-                </a:solidFill>
-                <a:latin typeface="Arial"/>
-              </a:rPr>
-              <a:t>w intr * 3</a:t>
-            </a:r>
-            <a:endParaRPr lang="en-US" sz="1400" b="0" strike="noStrike" spc="-1" dirty="0">
-              <a:solidFill>
-                <a:srgbClr val="000000"/>
-              </a:solidFill>
-              <a:latin typeface="Arial"/>
-            </a:endParaRPr>
-          </a:p>
-        </p:txBody>
-      </p:sp>
-      <p:sp>
-        <p:nvSpPr>
-          <p:cNvPr id="10" name="矩形: 圓角 7">
-            <a:extLst>
-              <a:ext uri="{FF2B5EF4-FFF2-40B4-BE49-F238E27FC236}">
-                <a16:creationId xmlns:a16="http://schemas.microsoft.com/office/drawing/2014/main" id="{4CE44F2F-71D2-B5F1-3EDF-258F174256DB}"/>
-              </a:ext>
-            </a:extLst>
-          </p:cNvPr>
-          <p:cNvSpPr/>
-          <p:nvPr/>
-        </p:nvSpPr>
-        <p:spPr>
-          <a:xfrm>
-            <a:off x="5943600" y="3950205"/>
-            <a:ext cx="1209600" cy="1045080"/>
-          </a:xfrm>
-          <a:prstGeom prst="roundRect">
-            <a:avLst>
-              <a:gd name="adj" fmla="val 16667"/>
-            </a:avLst>
-          </a:prstGeom>
-          <a:solidFill>
-            <a:schemeClr val="accent2">
-              <a:lumMod val="40000"/>
-              <a:lumOff val="60000"/>
-            </a:schemeClr>
-          </a:solidFill>
-          <a:ln>
-            <a:solidFill>
-              <a:srgbClr val="516263"/>
-            </a:solidFill>
-            <a:round/>
-          </a:ln>
-        </p:spPr>
-        <p:style>
-          <a:lnRef idx="2">
-            <a:schemeClr val="accent1">
-              <a:shade val="15000"/>
-            </a:schemeClr>
-          </a:lnRef>
-          <a:fillRef idx="1">
-            <a:schemeClr val="accent1"/>
-          </a:fillRef>
-          <a:effectRef idx="0">
-            <a:schemeClr val="accent1"/>
-          </a:effectRef>
-          <a:fontRef idx="minor"/>
-        </p:style>
-        <p:txBody>
-          <a:bodyPr lIns="90000" tIns="45000" rIns="90000" bIns="45000" anchor="ctr">
-            <a:noAutofit/>
-          </a:bodyPr>
-          <a:lstStyle/>
-          <a:p>
-            <a:pPr algn="ctr">
-              <a:lnSpc>
-                <a:spcPct val="100000"/>
-              </a:lnSpc>
-            </a:pPr>
-            <a:r>
-              <a:rPr lang="en-US" sz="1400" b="0" strike="noStrike" spc="-1" dirty="0">
-                <a:solidFill>
-                  <a:schemeClr val="dk1"/>
-                </a:solidFill>
-                <a:latin typeface="Arial"/>
-                <a:ea typeface="Arial"/>
-              </a:rPr>
-              <a:t>AXI </a:t>
-            </a:r>
-            <a:r>
-              <a:rPr lang="en-US" sz="1400" spc="-1" dirty="0">
-                <a:solidFill>
-                  <a:schemeClr val="dk1"/>
-                </a:solidFill>
-                <a:latin typeface="Arial"/>
-                <a:ea typeface="Arial"/>
-              </a:rPr>
-              <a:t>GPIO</a:t>
-            </a:r>
-            <a:r>
-              <a:rPr lang="en-US" sz="1400" b="0" strike="noStrike" spc="-1" dirty="0">
-                <a:solidFill>
-                  <a:schemeClr val="dk1"/>
-                </a:solidFill>
-                <a:latin typeface="Arial"/>
-                <a:ea typeface="Arial"/>
-              </a:rPr>
-              <a:t> </a:t>
-            </a:r>
-          </a:p>
-          <a:p>
-            <a:pPr algn="ctr">
-              <a:lnSpc>
-                <a:spcPct val="100000"/>
-              </a:lnSpc>
-            </a:pPr>
-            <a:r>
-              <a:rPr lang="en-US" sz="1400" spc="-1" dirty="0">
-                <a:solidFill>
-                  <a:schemeClr val="dk1"/>
-                </a:solidFill>
-                <a:latin typeface="Arial"/>
-              </a:rPr>
-              <a:t>w intr * 3</a:t>
-            </a:r>
-            <a:endParaRPr lang="en-US" sz="1400" b="0" strike="noStrike" spc="-1" dirty="0">
-              <a:solidFill>
-                <a:srgbClr val="000000"/>
-              </a:solidFill>
-              <a:latin typeface="Arial"/>
-            </a:endParaRPr>
-          </a:p>
-        </p:txBody>
-      </p:sp>
-      <p:sp>
-        <p:nvSpPr>
-          <p:cNvPr id="11" name="矩形: 圓角 7">
-            <a:extLst>
-              <a:ext uri="{FF2B5EF4-FFF2-40B4-BE49-F238E27FC236}">
-                <a16:creationId xmlns:a16="http://schemas.microsoft.com/office/drawing/2014/main" id="{835FBAC2-DBC4-6414-C068-85B2BE6A0C82}"/>
-              </a:ext>
-            </a:extLst>
-          </p:cNvPr>
-          <p:cNvSpPr/>
-          <p:nvPr/>
-        </p:nvSpPr>
-        <p:spPr>
-          <a:xfrm>
-            <a:off x="6096000" y="4102605"/>
-            <a:ext cx="1209600" cy="1045080"/>
-          </a:xfrm>
-          <a:prstGeom prst="roundRect">
-            <a:avLst>
-              <a:gd name="adj" fmla="val 16667"/>
-            </a:avLst>
-          </a:prstGeom>
-          <a:solidFill>
-            <a:schemeClr val="accent2">
-              <a:lumMod val="40000"/>
-              <a:lumOff val="60000"/>
-            </a:schemeClr>
-          </a:solidFill>
-          <a:ln>
-            <a:solidFill>
-              <a:srgbClr val="516263"/>
-            </a:solidFill>
-            <a:round/>
-          </a:ln>
-        </p:spPr>
-        <p:style>
-          <a:lnRef idx="2">
-            <a:schemeClr val="accent1">
-              <a:shade val="15000"/>
-            </a:schemeClr>
-          </a:lnRef>
-          <a:fillRef idx="1">
-            <a:schemeClr val="accent1"/>
-          </a:fillRef>
-          <a:effectRef idx="0">
-            <a:schemeClr val="accent1"/>
-          </a:effectRef>
-          <a:fontRef idx="minor"/>
-        </p:style>
-        <p:txBody>
-          <a:bodyPr lIns="90000" tIns="45000" rIns="90000" bIns="45000" anchor="ctr">
-            <a:noAutofit/>
-          </a:bodyPr>
-          <a:lstStyle/>
-          <a:p>
-            <a:pPr algn="ctr">
-              <a:lnSpc>
-                <a:spcPct val="100000"/>
-              </a:lnSpc>
-            </a:pPr>
-            <a:r>
-              <a:rPr lang="en-US" sz="1400" b="0" strike="noStrike" spc="-1" dirty="0">
-                <a:solidFill>
-                  <a:schemeClr val="dk1"/>
-                </a:solidFill>
-                <a:latin typeface="Arial"/>
-                <a:ea typeface="Arial"/>
-              </a:rPr>
-              <a:t>AXI </a:t>
-            </a:r>
-            <a:r>
-              <a:rPr lang="en-US" sz="1400" spc="-1" dirty="0">
-                <a:solidFill>
-                  <a:schemeClr val="dk1"/>
-                </a:solidFill>
-                <a:latin typeface="Arial"/>
-                <a:ea typeface="Arial"/>
-              </a:rPr>
-              <a:t>GPIO</a:t>
-            </a:r>
-            <a:r>
-              <a:rPr lang="en-US" sz="1400" b="0" strike="noStrike" spc="-1" dirty="0">
-                <a:solidFill>
-                  <a:schemeClr val="dk1"/>
-                </a:solidFill>
-                <a:latin typeface="Arial"/>
-                <a:ea typeface="Arial"/>
-              </a:rPr>
-              <a:t> </a:t>
-            </a:r>
-          </a:p>
-          <a:p>
-            <a:pPr algn="ctr">
-              <a:lnSpc>
-                <a:spcPct val="100000"/>
-              </a:lnSpc>
-            </a:pPr>
-            <a:r>
-              <a:rPr lang="en-US" sz="1400" spc="-1" dirty="0">
-                <a:solidFill>
-                  <a:schemeClr val="dk1"/>
-                </a:solidFill>
-                <a:latin typeface="Arial"/>
-              </a:rPr>
-              <a:t>w intr * 3</a:t>
-            </a:r>
-            <a:endParaRPr lang="en-US" sz="1400" b="0" strike="noStrike" spc="-1" dirty="0">
-              <a:solidFill>
-                <a:srgbClr val="000000"/>
-              </a:solidFill>
-              <a:latin typeface="Arial"/>
-            </a:endParaRPr>
-          </a:p>
-        </p:txBody>
-      </p:sp>
-      <p:sp>
-        <p:nvSpPr>
           <p:cNvPr id="13" name="箭號: 上-下雙向 12">
             <a:extLst>
               <a:ext uri="{FF2B5EF4-FFF2-40B4-BE49-F238E27FC236}">
-                <a16:creationId xmlns:a16="http://schemas.microsoft.com/office/drawing/2014/main" id="{891DF948-B01D-13DB-05BE-01081BCD4588}"/>
+                <a16:creationId xmlns:a16="http://schemas.microsoft.com/office/drawing/2014/main" id="{77DD55E6-10A3-A358-05C2-3FC6B5B1A026}"/>
               </a:ext>
             </a:extLst>
           </p:cNvPr>
@@ -17714,7 +22391,7 @@
         </p:nvSpPr>
         <p:spPr>
           <a:xfrm rot="16200000">
-            <a:off x="1252800" y="3123531"/>
+            <a:off x="904008" y="2025956"/>
             <a:ext cx="429062" cy="902821"/>
           </a:xfrm>
           <a:prstGeom prst="upDownArrow">
@@ -17754,7 +22431,7 @@
           <p:cNvPr id="14" name="箭號: 上-下雙向 13">
             <a:extLst>
               <a:ext uri="{FF2B5EF4-FFF2-40B4-BE49-F238E27FC236}">
-                <a16:creationId xmlns:a16="http://schemas.microsoft.com/office/drawing/2014/main" id="{F0671ADE-A805-4C9D-D176-0013C85F12C8}"/>
+                <a16:creationId xmlns:a16="http://schemas.microsoft.com/office/drawing/2014/main" id="{B05CC935-4A03-0667-8D15-3C9E5F8B1B3D}"/>
               </a:ext>
             </a:extLst>
           </p:cNvPr>
@@ -17763,7 +22440,7 @@
         </p:nvSpPr>
         <p:spPr>
           <a:xfrm rot="16200000">
-            <a:off x="1252801" y="4716659"/>
+            <a:off x="904009" y="3619084"/>
             <a:ext cx="429062" cy="902821"/>
           </a:xfrm>
           <a:prstGeom prst="upDownArrow">
@@ -17803,7 +22480,7 @@
           <p:cNvPr id="12" name="直線單箭頭接點 11">
             <a:extLst>
               <a:ext uri="{FF2B5EF4-FFF2-40B4-BE49-F238E27FC236}">
-                <a16:creationId xmlns:a16="http://schemas.microsoft.com/office/drawing/2014/main" id="{74A15068-2A97-DE1A-F162-6E3BF323A50C}"/>
+                <a16:creationId xmlns:a16="http://schemas.microsoft.com/office/drawing/2014/main" id="{C1102D1F-432D-B994-FDCB-8B826B4BB9F9}"/>
               </a:ext>
             </a:extLst>
           </p:cNvPr>
@@ -17816,8 +22493,8 @@
         </p:nvCxnSpPr>
         <p:spPr>
           <a:xfrm flipH="1">
-            <a:off x="5058945" y="2638823"/>
-            <a:ext cx="732255" cy="915734"/>
+            <a:off x="4710153" y="2451801"/>
+            <a:ext cx="732255" cy="5181"/>
           </a:xfrm>
           <a:prstGeom prst="straightConnector1">
             <a:avLst/>
@@ -17846,7 +22523,7 @@
           <p:cNvPr id="19" name="直線單箭頭接點 18">
             <a:extLst>
               <a:ext uri="{FF2B5EF4-FFF2-40B4-BE49-F238E27FC236}">
-                <a16:creationId xmlns:a16="http://schemas.microsoft.com/office/drawing/2014/main" id="{C92EC857-CB88-460D-40BD-26ACB03BA2F2}"/>
+                <a16:creationId xmlns:a16="http://schemas.microsoft.com/office/drawing/2014/main" id="{6D38501C-F889-F2C1-EA45-CFF6C0811FE2}"/>
               </a:ext>
             </a:extLst>
           </p:cNvPr>
@@ -17859,54 +22536,8 @@
         </p:nvCxnSpPr>
         <p:spPr>
           <a:xfrm flipH="1">
-            <a:off x="5058945" y="2638823"/>
-            <a:ext cx="732255" cy="915734"/>
-          </a:xfrm>
-          <a:prstGeom prst="straightConnector1">
-            <a:avLst/>
-          </a:prstGeom>
-          <a:ln w="38100">
-            <a:solidFill>
-              <a:schemeClr val="tx1"/>
-            </a:solidFill>
-            <a:tailEnd type="triangle"/>
-          </a:ln>
-        </p:spPr>
-        <p:style>
-          <a:lnRef idx="1">
-            <a:schemeClr val="accent1"/>
-          </a:lnRef>
-          <a:fillRef idx="0">
-            <a:schemeClr val="accent1"/>
-          </a:fillRef>
-          <a:effectRef idx="0">
-            <a:schemeClr val="accent1"/>
-          </a:effectRef>
-          <a:fontRef idx="minor">
-            <a:schemeClr val="tx1"/>
-          </a:fontRef>
-        </p:style>
-      </p:cxnSp>
-      <p:cxnSp>
-        <p:nvCxnSpPr>
-          <p:cNvPr id="22" name="直線單箭頭接點 21">
-            <a:extLst>
-              <a:ext uri="{FF2B5EF4-FFF2-40B4-BE49-F238E27FC236}">
-                <a16:creationId xmlns:a16="http://schemas.microsoft.com/office/drawing/2014/main" id="{3BE96FE8-B65D-C45F-B1F5-71AD93531204}"/>
-              </a:ext>
-            </a:extLst>
-          </p:cNvPr>
-          <p:cNvCxnSpPr>
-            <a:cxnSpLocks/>
-            <a:stCxn id="9" idx="1"/>
-            <a:endCxn id="5" idx="3"/>
-          </p:cNvCxnSpPr>
-          <p:nvPr/>
-        </p:nvCxnSpPr>
-        <p:spPr>
-          <a:xfrm flipH="1" flipV="1">
-            <a:off x="5058945" y="3554557"/>
-            <a:ext cx="732255" cy="765788"/>
+            <a:off x="4710153" y="2451801"/>
+            <a:ext cx="732255" cy="5181"/>
           </a:xfrm>
           <a:prstGeom prst="straightConnector1">
             <a:avLst/>
@@ -17938,7 +22569,7 @@
           <p:cNvPr id="25" name="直線單箭頭接點 24">
             <a:extLst>
               <a:ext uri="{FF2B5EF4-FFF2-40B4-BE49-F238E27FC236}">
-                <a16:creationId xmlns:a16="http://schemas.microsoft.com/office/drawing/2014/main" id="{14A89BC4-1087-0A04-93A2-7077533F69D2}"/>
+                <a16:creationId xmlns:a16="http://schemas.microsoft.com/office/drawing/2014/main" id="{57E6E759-D9AA-0BDF-5071-58008ADB249B}"/>
               </a:ext>
             </a:extLst>
           </p:cNvPr>
@@ -17951,7 +22582,7 @@
         </p:nvCxnSpPr>
         <p:spPr>
           <a:xfrm flipH="1">
-            <a:off x="3315930" y="3554557"/>
+            <a:off x="2967138" y="2456982"/>
             <a:ext cx="533415" cy="0"/>
           </a:xfrm>
           <a:prstGeom prst="straightConnector1">
@@ -17984,7 +22615,7 @@
           <p:cNvPr id="31" name="直線單箭頭接點 30">
             <a:extLst>
               <a:ext uri="{FF2B5EF4-FFF2-40B4-BE49-F238E27FC236}">
-                <a16:creationId xmlns:a16="http://schemas.microsoft.com/office/drawing/2014/main" id="{F4C9E6B9-BFD0-A0C5-8454-B72FF3EDAB90}"/>
+                <a16:creationId xmlns:a16="http://schemas.microsoft.com/office/drawing/2014/main" id="{3029B94A-DCBB-47AA-1C97-E6ED2DE725BD}"/>
               </a:ext>
             </a:extLst>
           </p:cNvPr>
@@ -17997,7 +22628,7 @@
         </p:nvCxnSpPr>
         <p:spPr>
           <a:xfrm>
-            <a:off x="2711130" y="4077097"/>
+            <a:off x="2362338" y="2979522"/>
             <a:ext cx="0" cy="568432"/>
           </a:xfrm>
           <a:prstGeom prst="straightConnector1">
@@ -18030,7 +22661,7 @@
           <p:cNvPr id="36" name="文字方塊 35">
             <a:extLst>
               <a:ext uri="{FF2B5EF4-FFF2-40B4-BE49-F238E27FC236}">
-                <a16:creationId xmlns:a16="http://schemas.microsoft.com/office/drawing/2014/main" id="{82C9269D-3EFB-5F6C-1BEA-AD339E589489}"/>
+                <a16:creationId xmlns:a16="http://schemas.microsoft.com/office/drawing/2014/main" id="{F51EE46B-7109-EFE7-A2DD-D5AC6789DB9A}"/>
               </a:ext>
             </a:extLst>
           </p:cNvPr>
@@ -18039,7 +22670,7 @@
         </p:nvSpPr>
         <p:spPr>
           <a:xfrm>
-            <a:off x="2772084" y="4176647"/>
+            <a:off x="2423292" y="3079072"/>
             <a:ext cx="441146" cy="369332"/>
           </a:xfrm>
           <a:prstGeom prst="rect">
@@ -18061,10 +22692,625 @@
           </a:p>
         </p:txBody>
       </p:sp>
+      <p:sp>
+        <p:nvSpPr>
+          <p:cNvPr id="8" name="矩形: 圓角 7">
+            <a:extLst>
+              <a:ext uri="{FF2B5EF4-FFF2-40B4-BE49-F238E27FC236}">
+                <a16:creationId xmlns:a16="http://schemas.microsoft.com/office/drawing/2014/main" id="{A5179A49-00D4-6B94-7FC9-59307E45CC03}"/>
+              </a:ext>
+            </a:extLst>
+          </p:cNvPr>
+          <p:cNvSpPr/>
+          <p:nvPr/>
+        </p:nvSpPr>
+        <p:spPr>
+          <a:xfrm>
+            <a:off x="1809299" y="5161466"/>
+            <a:ext cx="1209600" cy="1045080"/>
+          </a:xfrm>
+          <a:prstGeom prst="roundRect">
+            <a:avLst>
+              <a:gd name="adj" fmla="val 16667"/>
+            </a:avLst>
+          </a:prstGeom>
+          <a:solidFill>
+            <a:srgbClr val="BBE0E3"/>
+          </a:solidFill>
+          <a:ln>
+            <a:solidFill>
+              <a:srgbClr val="516263"/>
+            </a:solidFill>
+            <a:round/>
+          </a:ln>
+        </p:spPr>
+        <p:style>
+          <a:lnRef idx="2">
+            <a:schemeClr val="accent1">
+              <a:shade val="15000"/>
+            </a:schemeClr>
+          </a:lnRef>
+          <a:fillRef idx="1">
+            <a:schemeClr val="accent1"/>
+          </a:fillRef>
+          <a:effectRef idx="0">
+            <a:schemeClr val="accent1"/>
+          </a:effectRef>
+          <a:fontRef idx="minor"/>
+        </p:style>
+        <p:txBody>
+          <a:bodyPr lIns="90000" tIns="45000" rIns="90000" bIns="45000" anchor="ctr">
+            <a:noAutofit/>
+          </a:bodyPr>
+          <a:lstStyle/>
+          <a:p>
+            <a:pPr algn="ctr">
+              <a:lnSpc>
+                <a:spcPct val="100000"/>
+              </a:lnSpc>
+            </a:pPr>
+            <a:r>
+              <a:rPr lang="en-US" sz="1400" b="0" strike="noStrike" spc="-1" dirty="0">
+                <a:solidFill>
+                  <a:schemeClr val="dk1"/>
+                </a:solidFill>
+                <a:latin typeface="Arial"/>
+                <a:ea typeface="Arial"/>
+              </a:rPr>
+              <a:t>AXI Timer </a:t>
+            </a:r>
+          </a:p>
+          <a:p>
+            <a:pPr algn="ctr">
+              <a:lnSpc>
+                <a:spcPct val="100000"/>
+              </a:lnSpc>
+            </a:pPr>
+            <a:r>
+              <a:rPr lang="en-US" sz="1400" spc="-1" dirty="0">
+                <a:solidFill>
+                  <a:schemeClr val="dk1"/>
+                </a:solidFill>
+                <a:latin typeface="Arial"/>
+                <a:ea typeface="Arial"/>
+              </a:rPr>
+              <a:t>* 3</a:t>
+            </a:r>
+            <a:endParaRPr lang="en-US" sz="1400" b="0" strike="noStrike" spc="-1" dirty="0">
+              <a:solidFill>
+                <a:srgbClr val="000000"/>
+              </a:solidFill>
+              <a:latin typeface="Arial"/>
+            </a:endParaRPr>
+          </a:p>
+        </p:txBody>
+      </p:sp>
+      <p:sp>
+        <p:nvSpPr>
+          <p:cNvPr id="15" name="矩形: 圓角 7">
+            <a:extLst>
+              <a:ext uri="{FF2B5EF4-FFF2-40B4-BE49-F238E27FC236}">
+                <a16:creationId xmlns:a16="http://schemas.microsoft.com/office/drawing/2014/main" id="{1B7FC50E-6A1E-C59E-B57B-7BBF94ED4964}"/>
+              </a:ext>
+            </a:extLst>
+          </p:cNvPr>
+          <p:cNvSpPr/>
+          <p:nvPr/>
+        </p:nvSpPr>
+        <p:spPr>
+          <a:xfrm>
+            <a:off x="1961699" y="5313866"/>
+            <a:ext cx="1209600" cy="1045080"/>
+          </a:xfrm>
+          <a:prstGeom prst="roundRect">
+            <a:avLst>
+              <a:gd name="adj" fmla="val 16667"/>
+            </a:avLst>
+          </a:prstGeom>
+          <a:solidFill>
+            <a:srgbClr val="BBE0E3"/>
+          </a:solidFill>
+          <a:ln>
+            <a:solidFill>
+              <a:srgbClr val="516263"/>
+            </a:solidFill>
+            <a:round/>
+          </a:ln>
+        </p:spPr>
+        <p:style>
+          <a:lnRef idx="2">
+            <a:schemeClr val="accent1">
+              <a:shade val="15000"/>
+            </a:schemeClr>
+          </a:lnRef>
+          <a:fillRef idx="1">
+            <a:schemeClr val="accent1"/>
+          </a:fillRef>
+          <a:effectRef idx="0">
+            <a:schemeClr val="accent1"/>
+          </a:effectRef>
+          <a:fontRef idx="minor"/>
+        </p:style>
+        <p:txBody>
+          <a:bodyPr lIns="90000" tIns="45000" rIns="90000" bIns="45000" anchor="ctr">
+            <a:noAutofit/>
+          </a:bodyPr>
+          <a:lstStyle/>
+          <a:p>
+            <a:pPr algn="ctr">
+              <a:lnSpc>
+                <a:spcPct val="100000"/>
+              </a:lnSpc>
+            </a:pPr>
+            <a:r>
+              <a:rPr lang="en-US" sz="1400" b="0" strike="noStrike" spc="-1" dirty="0">
+                <a:solidFill>
+                  <a:schemeClr val="dk1"/>
+                </a:solidFill>
+                <a:latin typeface="Arial"/>
+                <a:ea typeface="Arial"/>
+              </a:rPr>
+              <a:t>AXI Timer </a:t>
+            </a:r>
+          </a:p>
+          <a:p>
+            <a:pPr algn="ctr">
+              <a:lnSpc>
+                <a:spcPct val="100000"/>
+              </a:lnSpc>
+            </a:pPr>
+            <a:r>
+              <a:rPr lang="en-US" sz="1400" spc="-1" dirty="0">
+                <a:solidFill>
+                  <a:schemeClr val="dk1"/>
+                </a:solidFill>
+                <a:latin typeface="Arial"/>
+                <a:ea typeface="Arial"/>
+              </a:rPr>
+              <a:t>* 3</a:t>
+            </a:r>
+            <a:endParaRPr lang="en-US" sz="1400" b="0" strike="noStrike" spc="-1" dirty="0">
+              <a:solidFill>
+                <a:srgbClr val="000000"/>
+              </a:solidFill>
+              <a:latin typeface="Arial"/>
+            </a:endParaRPr>
+          </a:p>
+        </p:txBody>
+      </p:sp>
+      <p:sp>
+        <p:nvSpPr>
+          <p:cNvPr id="16" name="矩形: 圓角 7">
+            <a:extLst>
+              <a:ext uri="{FF2B5EF4-FFF2-40B4-BE49-F238E27FC236}">
+                <a16:creationId xmlns:a16="http://schemas.microsoft.com/office/drawing/2014/main" id="{1F4D3DA4-A97A-76B2-E65C-342FE0B508E1}"/>
+              </a:ext>
+            </a:extLst>
+          </p:cNvPr>
+          <p:cNvSpPr/>
+          <p:nvPr/>
+        </p:nvSpPr>
+        <p:spPr>
+          <a:xfrm>
+            <a:off x="2114099" y="5466266"/>
+            <a:ext cx="1209600" cy="1045080"/>
+          </a:xfrm>
+          <a:prstGeom prst="roundRect">
+            <a:avLst>
+              <a:gd name="adj" fmla="val 16667"/>
+            </a:avLst>
+          </a:prstGeom>
+          <a:solidFill>
+            <a:srgbClr val="BBE0E3"/>
+          </a:solidFill>
+          <a:ln>
+            <a:solidFill>
+              <a:srgbClr val="516263"/>
+            </a:solidFill>
+            <a:round/>
+          </a:ln>
+        </p:spPr>
+        <p:style>
+          <a:lnRef idx="2">
+            <a:schemeClr val="accent1">
+              <a:shade val="15000"/>
+            </a:schemeClr>
+          </a:lnRef>
+          <a:fillRef idx="1">
+            <a:schemeClr val="accent1"/>
+          </a:fillRef>
+          <a:effectRef idx="0">
+            <a:schemeClr val="accent1"/>
+          </a:effectRef>
+          <a:fontRef idx="minor"/>
+        </p:style>
+        <p:txBody>
+          <a:bodyPr lIns="90000" tIns="45000" rIns="90000" bIns="45000" anchor="ctr">
+            <a:noAutofit/>
+          </a:bodyPr>
+          <a:lstStyle/>
+          <a:p>
+            <a:pPr algn="ctr">
+              <a:lnSpc>
+                <a:spcPct val="100000"/>
+              </a:lnSpc>
+            </a:pPr>
+            <a:r>
+              <a:rPr lang="en-US" sz="1400" b="0" strike="noStrike" spc="-1" dirty="0">
+                <a:solidFill>
+                  <a:schemeClr val="dk1"/>
+                </a:solidFill>
+                <a:latin typeface="Arial"/>
+                <a:ea typeface="Arial"/>
+              </a:rPr>
+              <a:t>AXI Timer </a:t>
+            </a:r>
+          </a:p>
+          <a:p>
+            <a:pPr algn="ctr">
+              <a:lnSpc>
+                <a:spcPct val="100000"/>
+              </a:lnSpc>
+            </a:pPr>
+            <a:r>
+              <a:rPr lang="en-US" sz="1400" spc="-1" dirty="0">
+                <a:solidFill>
+                  <a:schemeClr val="dk1"/>
+                </a:solidFill>
+                <a:latin typeface="Arial"/>
+                <a:ea typeface="Arial"/>
+              </a:rPr>
+              <a:t>* 3</a:t>
+            </a:r>
+            <a:endParaRPr lang="en-US" sz="1400" b="0" strike="noStrike" spc="-1" dirty="0">
+              <a:solidFill>
+                <a:srgbClr val="000000"/>
+              </a:solidFill>
+              <a:latin typeface="Arial"/>
+            </a:endParaRPr>
+          </a:p>
+        </p:txBody>
+      </p:sp>
+      <p:sp>
+        <p:nvSpPr>
+          <p:cNvPr id="20" name="箭號: 上-下雙向 19">
+            <a:extLst>
+              <a:ext uri="{FF2B5EF4-FFF2-40B4-BE49-F238E27FC236}">
+                <a16:creationId xmlns:a16="http://schemas.microsoft.com/office/drawing/2014/main" id="{F73E14FE-F9BF-6E27-C9E9-598DB87645B2}"/>
+              </a:ext>
+            </a:extLst>
+          </p:cNvPr>
+          <p:cNvSpPr/>
+          <p:nvPr/>
+        </p:nvSpPr>
+        <p:spPr>
+          <a:xfrm rot="16200000">
+            <a:off x="904009" y="5262924"/>
+            <a:ext cx="429062" cy="902821"/>
+          </a:xfrm>
+          <a:prstGeom prst="upDownArrow">
+            <a:avLst/>
+          </a:prstGeom>
+          <a:solidFill>
+            <a:schemeClr val="tx1"/>
+          </a:solidFill>
+        </p:spPr>
+        <p:style>
+          <a:lnRef idx="2">
+            <a:schemeClr val="accent1">
+              <a:shade val="15000"/>
+            </a:schemeClr>
+          </a:lnRef>
+          <a:fillRef idx="1">
+            <a:schemeClr val="accent1"/>
+          </a:fillRef>
+          <a:effectRef idx="0">
+            <a:schemeClr val="accent1"/>
+          </a:effectRef>
+          <a:fontRef idx="minor">
+            <a:schemeClr val="lt1"/>
+          </a:fontRef>
+        </p:style>
+        <p:txBody>
+          <a:bodyPr rtlCol="0" anchor="ctr"/>
+          <a:lstStyle/>
+          <a:p>
+            <a:pPr algn="ctr"/>
+            <a:endParaRPr lang="en-US"/>
+          </a:p>
+        </p:txBody>
+      </p:sp>
+      <p:cxnSp>
+        <p:nvCxnSpPr>
+          <p:cNvPr id="24" name="直線單箭頭接點 23">
+            <a:extLst>
+              <a:ext uri="{FF2B5EF4-FFF2-40B4-BE49-F238E27FC236}">
+                <a16:creationId xmlns:a16="http://schemas.microsoft.com/office/drawing/2014/main" id="{F6507610-05EC-AEC6-98B0-D850BD005037}"/>
+              </a:ext>
+            </a:extLst>
+          </p:cNvPr>
+          <p:cNvCxnSpPr>
+            <a:cxnSpLocks/>
+            <a:stCxn id="16" idx="3"/>
+            <a:endCxn id="29" idx="1"/>
+          </p:cNvCxnSpPr>
+          <p:nvPr/>
+        </p:nvCxnSpPr>
+        <p:spPr>
+          <a:xfrm>
+            <a:off x="3323699" y="5988806"/>
+            <a:ext cx="682931" cy="0"/>
+          </a:xfrm>
+          <a:prstGeom prst="straightConnector1">
+            <a:avLst/>
+          </a:prstGeom>
+          <a:ln w="38100">
+            <a:solidFill>
+              <a:schemeClr val="tx1"/>
+            </a:solidFill>
+            <a:tailEnd type="triangle"/>
+          </a:ln>
+        </p:spPr>
+        <p:style>
+          <a:lnRef idx="1">
+            <a:schemeClr val="accent1"/>
+          </a:lnRef>
+          <a:fillRef idx="0">
+            <a:schemeClr val="accent1"/>
+          </a:fillRef>
+          <a:effectRef idx="0">
+            <a:schemeClr val="accent1"/>
+          </a:effectRef>
+          <a:fontRef idx="minor">
+            <a:schemeClr val="tx1"/>
+          </a:fontRef>
+        </p:style>
+      </p:cxnSp>
+      <p:sp>
+        <p:nvSpPr>
+          <p:cNvPr id="29" name="文字方塊 28">
+            <a:extLst>
+              <a:ext uri="{FF2B5EF4-FFF2-40B4-BE49-F238E27FC236}">
+                <a16:creationId xmlns:a16="http://schemas.microsoft.com/office/drawing/2014/main" id="{538533E5-04CA-EEE2-4A75-CC7C198D07EE}"/>
+              </a:ext>
+            </a:extLst>
+          </p:cNvPr>
+          <p:cNvSpPr txBox="1"/>
+          <p:nvPr/>
+        </p:nvSpPr>
+        <p:spPr>
+          <a:xfrm>
+            <a:off x="4006630" y="5804140"/>
+            <a:ext cx="2148986" cy="369332"/>
+          </a:xfrm>
+          <a:prstGeom prst="rect">
+            <a:avLst/>
+          </a:prstGeom>
+          <a:noFill/>
+        </p:spPr>
+        <p:txBody>
+          <a:bodyPr wrap="none" rtlCol="0">
+            <a:spAutoFit/>
+          </a:bodyPr>
+          <a:lstStyle/>
+          <a:p>
+            <a:r>
+              <a:rPr lang="en-US" altLang="zh-TW" dirty="0"/>
+              <a:t>PWM_0 ~ PWM_2</a:t>
+            </a:r>
+            <a:endParaRPr lang="en-US" dirty="0"/>
+          </a:p>
+        </p:txBody>
+      </p:sp>
+      <p:sp>
+        <p:nvSpPr>
+          <p:cNvPr id="37" name="文字方塊 36">
+            <a:extLst>
+              <a:ext uri="{FF2B5EF4-FFF2-40B4-BE49-F238E27FC236}">
+                <a16:creationId xmlns:a16="http://schemas.microsoft.com/office/drawing/2014/main" id="{B33A72F3-4864-A537-B740-173E5F6AB983}"/>
+              </a:ext>
+            </a:extLst>
+          </p:cNvPr>
+          <p:cNvSpPr txBox="1"/>
+          <p:nvPr/>
+        </p:nvSpPr>
+        <p:spPr>
+          <a:xfrm>
+            <a:off x="7185423" y="1776647"/>
+            <a:ext cx="4878792" cy="4278094"/>
+          </a:xfrm>
+          <a:prstGeom prst="rect">
+            <a:avLst/>
+          </a:prstGeom>
+          <a:noFill/>
+        </p:spPr>
+        <p:txBody>
+          <a:bodyPr wrap="square">
+            <a:spAutoFit/>
+          </a:bodyPr>
+          <a:lstStyle/>
+          <a:p>
+            <a:pPr>
+              <a:buNone/>
+            </a:pPr>
+            <a:r>
+              <a:rPr lang="en-US" sz="1600" b="1" dirty="0">
+                <a:latin typeface="Times New Roman" panose="02020603050405020304" pitchFamily="18" charset="0"/>
+                <a:cs typeface="Times New Roman" panose="02020603050405020304" pitchFamily="18" charset="0"/>
+              </a:rPr>
+              <a:t>6 AXI Timer Instances — Two Roles:</a:t>
+            </a:r>
+            <a:endParaRPr lang="en-US" sz="1600" dirty="0">
+              <a:latin typeface="Times New Roman" panose="02020603050405020304" pitchFamily="18" charset="0"/>
+              <a:cs typeface="Times New Roman" panose="02020603050405020304" pitchFamily="18" charset="0"/>
+            </a:endParaRPr>
+          </a:p>
+          <a:p>
+            <a:pPr>
+              <a:buNone/>
+            </a:pPr>
+            <a:endParaRPr lang="en-US" sz="1600" b="1" dirty="0">
+              <a:latin typeface="Times New Roman" panose="02020603050405020304" pitchFamily="18" charset="0"/>
+              <a:cs typeface="Times New Roman" panose="02020603050405020304" pitchFamily="18" charset="0"/>
+            </a:endParaRPr>
+          </a:p>
+          <a:p>
+            <a:pPr>
+              <a:buNone/>
+            </a:pPr>
+            <a:r>
+              <a:rPr lang="en-US" sz="1600" b="1" dirty="0">
+                <a:latin typeface="Times New Roman" panose="02020603050405020304" pitchFamily="18" charset="0"/>
+                <a:cs typeface="Times New Roman" panose="02020603050405020304" pitchFamily="18" charset="0"/>
+              </a:rPr>
+              <a:t>3 × System Timers (timer_0 / timer_1 / timer_2)</a:t>
+            </a:r>
+            <a:endParaRPr lang="en-US" sz="1600" dirty="0">
+              <a:latin typeface="Times New Roman" panose="02020603050405020304" pitchFamily="18" charset="0"/>
+              <a:cs typeface="Times New Roman" panose="02020603050405020304" pitchFamily="18" charset="0"/>
+            </a:endParaRPr>
+          </a:p>
+          <a:p>
+            <a:pPr>
+              <a:buFont typeface="Arial" panose="020B0604020202020204" pitchFamily="34" charset="0"/>
+              <a:buChar char="•"/>
+            </a:pPr>
+            <a:endParaRPr lang="en-US" sz="1600" dirty="0">
+              <a:latin typeface="Times New Roman" panose="02020603050405020304" pitchFamily="18" charset="0"/>
+              <a:cs typeface="Times New Roman" panose="02020603050405020304" pitchFamily="18" charset="0"/>
+            </a:endParaRPr>
+          </a:p>
+          <a:p>
+            <a:pPr>
+              <a:buFont typeface="Arial" panose="020B0604020202020204" pitchFamily="34" charset="0"/>
+              <a:buChar char="•"/>
+            </a:pPr>
+            <a:r>
+              <a:rPr lang="en-US" sz="1600" dirty="0">
+                <a:latin typeface="Times New Roman" panose="02020603050405020304" pitchFamily="18" charset="0"/>
+                <a:cs typeface="Times New Roman" panose="02020603050405020304" pitchFamily="18" charset="0"/>
+              </a:rPr>
+              <a:t>Connected to AXI Interrupt Controller</a:t>
+            </a:r>
+          </a:p>
+          <a:p>
+            <a:pPr>
+              <a:buFont typeface="Arial" panose="020B0604020202020204" pitchFamily="34" charset="0"/>
+              <a:buChar char="•"/>
+            </a:pPr>
+            <a:endParaRPr lang="en-US" sz="1600" dirty="0">
+              <a:latin typeface="Times New Roman" panose="02020603050405020304" pitchFamily="18" charset="0"/>
+              <a:cs typeface="Times New Roman" panose="02020603050405020304" pitchFamily="18" charset="0"/>
+            </a:endParaRPr>
+          </a:p>
+          <a:p>
+            <a:pPr>
+              <a:buFont typeface="Arial" panose="020B0604020202020204" pitchFamily="34" charset="0"/>
+              <a:buChar char="•"/>
+            </a:pPr>
+            <a:r>
+              <a:rPr lang="en-US" sz="1600" dirty="0">
+                <a:latin typeface="Times New Roman" panose="02020603050405020304" pitchFamily="18" charset="0"/>
+                <a:cs typeface="Times New Roman" panose="02020603050405020304" pitchFamily="18" charset="0"/>
+              </a:rPr>
+              <a:t>Generate periodic interrupts for scheduling, timeout, or time measurement</a:t>
+            </a:r>
+          </a:p>
+          <a:p>
+            <a:endParaRPr lang="en-US" sz="1600" dirty="0">
+              <a:latin typeface="Times New Roman" panose="02020603050405020304" pitchFamily="18" charset="0"/>
+              <a:cs typeface="Times New Roman" panose="02020603050405020304" pitchFamily="18" charset="0"/>
+            </a:endParaRPr>
+          </a:p>
+          <a:p>
+            <a:pPr>
+              <a:buNone/>
+            </a:pPr>
+            <a:r>
+              <a:rPr lang="en-US" sz="1600" b="1" dirty="0">
+                <a:latin typeface="Times New Roman" panose="02020603050405020304" pitchFamily="18" charset="0"/>
+                <a:cs typeface="Times New Roman" panose="02020603050405020304" pitchFamily="18" charset="0"/>
+              </a:rPr>
+              <a:t>3 × PWM Timers (PWM_0 / PWM1 / PWM_2)</a:t>
+            </a:r>
+            <a:endParaRPr lang="en-US" sz="1600" dirty="0">
+              <a:latin typeface="Times New Roman" panose="02020603050405020304" pitchFamily="18" charset="0"/>
+              <a:cs typeface="Times New Roman" panose="02020603050405020304" pitchFamily="18" charset="0"/>
+            </a:endParaRPr>
+          </a:p>
+          <a:p>
+            <a:pPr>
+              <a:buFont typeface="Arial" panose="020B0604020202020204" pitchFamily="34" charset="0"/>
+              <a:buChar char="•"/>
+            </a:pPr>
+            <a:endParaRPr lang="en-US" sz="1600" dirty="0">
+              <a:latin typeface="Times New Roman" panose="02020603050405020304" pitchFamily="18" charset="0"/>
+              <a:cs typeface="Times New Roman" panose="02020603050405020304" pitchFamily="18" charset="0"/>
+            </a:endParaRPr>
+          </a:p>
+          <a:p>
+            <a:pPr>
+              <a:buFont typeface="Arial" panose="020B0604020202020204" pitchFamily="34" charset="0"/>
+              <a:buChar char="•"/>
+            </a:pPr>
+            <a:r>
+              <a:rPr lang="en-US" sz="1600" dirty="0">
+                <a:latin typeface="Times New Roman" panose="02020603050405020304" pitchFamily="18" charset="0"/>
+                <a:cs typeface="Times New Roman" panose="02020603050405020304" pitchFamily="18" charset="0"/>
+              </a:rPr>
+              <a:t>Configured in PWM mode</a:t>
+            </a:r>
+          </a:p>
+          <a:p>
+            <a:pPr>
+              <a:buFont typeface="Arial" panose="020B0604020202020204" pitchFamily="34" charset="0"/>
+              <a:buChar char="•"/>
+            </a:pPr>
+            <a:endParaRPr lang="en-US" sz="1600" dirty="0">
+              <a:latin typeface="Times New Roman" panose="02020603050405020304" pitchFamily="18" charset="0"/>
+              <a:cs typeface="Times New Roman" panose="02020603050405020304" pitchFamily="18" charset="0"/>
+            </a:endParaRPr>
+          </a:p>
+          <a:p>
+            <a:pPr>
+              <a:buFont typeface="Arial" panose="020B0604020202020204" pitchFamily="34" charset="0"/>
+              <a:buChar char="•"/>
+            </a:pPr>
+            <a:r>
+              <a:rPr lang="en-US" sz="1600" dirty="0">
+                <a:latin typeface="Times New Roman" panose="02020603050405020304" pitchFamily="18" charset="0"/>
+                <a:cs typeface="Times New Roman" panose="02020603050405020304" pitchFamily="18" charset="0"/>
+              </a:rPr>
+              <a:t>Used for servo control (SG90)</a:t>
+            </a:r>
+          </a:p>
+          <a:p>
+            <a:pPr>
+              <a:buNone/>
+            </a:pPr>
+            <a:endParaRPr lang="en-US" sz="1600" dirty="0">
+              <a:latin typeface="Times New Roman" panose="02020603050405020304" pitchFamily="18" charset="0"/>
+              <a:cs typeface="Times New Roman" panose="02020603050405020304" pitchFamily="18" charset="0"/>
+            </a:endParaRPr>
+          </a:p>
+          <a:p>
+            <a:pPr>
+              <a:buNone/>
+            </a:pPr>
+            <a:r>
+              <a:rPr lang="en-US" sz="1600" dirty="0">
+                <a:latin typeface="Times New Roman" panose="02020603050405020304" pitchFamily="18" charset="0"/>
+                <a:cs typeface="Times New Roman" panose="02020603050405020304" pitchFamily="18" charset="0"/>
+              </a:rPr>
+              <a:t>All 6 timers are the same IP, the difference is purely in how they are used — interrupt source vs. PWM output.</a:t>
+            </a:r>
+          </a:p>
+        </p:txBody>
+      </p:sp>
     </p:spTree>
     <p:extLst>
       <p:ext uri="{BB962C8B-B14F-4D97-AF65-F5344CB8AC3E}">
-        <p14:creationId xmlns:p14="http://schemas.microsoft.com/office/powerpoint/2010/main" val="1375800246"/>
+        <p14:creationId xmlns:p14="http://schemas.microsoft.com/office/powerpoint/2010/main" val="2895621163"/>
       </p:ext>
     </p:extLst>
   </p:cSld>
@@ -18082,7 +23328,7 @@
         <p:cNvPr id="1" name="">
           <a:extLst>
             <a:ext uri="{FF2B5EF4-FFF2-40B4-BE49-F238E27FC236}">
-              <a16:creationId xmlns:a16="http://schemas.microsoft.com/office/drawing/2014/main" id="{1ADECECB-41EC-6E98-3333-33569C1AD5DF}"/>
+              <a16:creationId xmlns:a16="http://schemas.microsoft.com/office/drawing/2014/main" id="{C0762B17-3240-7FB2-C35E-926018108864}"/>
             </a:ext>
           </a:extLst>
         </p:cNvPr>
@@ -18102,7 +23348,7 @@
           <p:cNvPr id="69" name="PlaceHolder 1">
             <a:extLst>
               <a:ext uri="{FF2B5EF4-FFF2-40B4-BE49-F238E27FC236}">
-                <a16:creationId xmlns:a16="http://schemas.microsoft.com/office/drawing/2014/main" id="{03AFB70B-EDCA-913A-326C-8E9129EB3887}"/>
+                <a16:creationId xmlns:a16="http://schemas.microsoft.com/office/drawing/2014/main" id="{BC096A63-E61A-582D-2DBB-D198F19AA728}"/>
               </a:ext>
             </a:extLst>
           </p:cNvPr>
@@ -18141,14 +23387,14 @@
               </a:tabLst>
             </a:pPr>
             <a:r>
-              <a:rPr lang="en-US" sz="4000" b="1" spc="-1" dirty="0">
+              <a:rPr lang="en-US" sz="4000" b="1" strike="noStrike" spc="-1" dirty="0">
                 <a:solidFill>
                   <a:srgbClr val="DDDDDD"/>
                 </a:solidFill>
                 <a:latin typeface="Calibri"/>
                 <a:ea typeface="Calibri"/>
               </a:rPr>
-              <a:t>Memory Hierarchy</a:t>
+              <a:t>Timer &amp; PWM</a:t>
             </a:r>
             <a:endParaRPr lang="en-US" sz="4000" b="0" strike="noStrike" spc="-1" dirty="0">
               <a:solidFill>
@@ -18159,10 +23405,40 @@
           </a:p>
         </p:txBody>
       </p:sp>
+      <p:pic>
+        <p:nvPicPr>
+          <p:cNvPr id="10" name="圖片 9">
+            <a:extLst>
+              <a:ext uri="{FF2B5EF4-FFF2-40B4-BE49-F238E27FC236}">
+                <a16:creationId xmlns:a16="http://schemas.microsoft.com/office/drawing/2014/main" id="{5C552DAF-0368-000D-40E0-457C7CE0CC47}"/>
+              </a:ext>
+            </a:extLst>
+          </p:cNvPr>
+          <p:cNvPicPr>
+            <a:picLocks noChangeAspect="1"/>
+          </p:cNvPicPr>
+          <p:nvPr/>
+        </p:nvPicPr>
+        <p:blipFill>
+          <a:blip r:embed="rId2"/>
+          <a:stretch>
+            <a:fillRect/>
+          </a:stretch>
+        </p:blipFill>
+        <p:spPr>
+          <a:xfrm>
+            <a:off x="2812003" y="1491049"/>
+            <a:ext cx="6567993" cy="5142565"/>
+          </a:xfrm>
+          <a:prstGeom prst="rect">
+            <a:avLst/>
+          </a:prstGeom>
+        </p:spPr>
+      </p:pic>
     </p:spTree>
     <p:extLst>
       <p:ext uri="{BB962C8B-B14F-4D97-AF65-F5344CB8AC3E}">
-        <p14:creationId xmlns:p14="http://schemas.microsoft.com/office/powerpoint/2010/main" val="440317662"/>
+        <p14:creationId xmlns:p14="http://schemas.microsoft.com/office/powerpoint/2010/main" val="307077018"/>
       </p:ext>
     </p:extLst>
   </p:cSld>
@@ -18177,7 +23453,13 @@
   <p:cSld>
     <p:spTree>
       <p:nvGrpSpPr>
-        <p:cNvPr id="1" name=""/>
+        <p:cNvPr id="1" name="">
+          <a:extLst>
+            <a:ext uri="{FF2B5EF4-FFF2-40B4-BE49-F238E27FC236}">
+              <a16:creationId xmlns:a16="http://schemas.microsoft.com/office/drawing/2014/main" id="{DC1012D1-F0FF-7EB7-E797-745506D78940}"/>
+            </a:ext>
+          </a:extLst>
+        </p:cNvPr>
         <p:cNvGrpSpPr/>
         <p:nvPr/>
       </p:nvGrpSpPr>
@@ -18191,7 +23473,13 @@
       </p:grpSpPr>
       <p:sp>
         <p:nvSpPr>
-          <p:cNvPr id="120" name="PlaceHolder 1"/>
+          <p:cNvPr id="69" name="PlaceHolder 1">
+            <a:extLst>
+              <a:ext uri="{FF2B5EF4-FFF2-40B4-BE49-F238E27FC236}">
+                <a16:creationId xmlns:a16="http://schemas.microsoft.com/office/drawing/2014/main" id="{C6B8070D-A6BE-BFD9-30C0-33B6542AFD2B}"/>
+              </a:ext>
+            </a:extLst>
+          </p:cNvPr>
           <p:cNvSpPr>
             <a:spLocks noGrp="1"/>
           </p:cNvSpPr>
@@ -18218,24 +23506,23 @@
           </a:bodyPr>
           <a:lstStyle/>
           <a:p>
-            <a:pPr indent="0">
+            <a:pPr>
               <a:lnSpc>
                 <a:spcPct val="100000"/>
               </a:lnSpc>
-              <a:buNone/>
               <a:tabLst>
                 <a:tab pos="0" algn="l"/>
               </a:tabLst>
             </a:pPr>
             <a:r>
-              <a:rPr lang="en-US" sz="4000" b="1" strike="noStrike" spc="-1" dirty="0">
+              <a:rPr lang="en-US" sz="4000" b="1" spc="-1" dirty="0">
                 <a:solidFill>
                   <a:srgbClr val="DDDDDD"/>
                 </a:solidFill>
                 <a:latin typeface="Calibri"/>
                 <a:ea typeface="Calibri"/>
               </a:rPr>
-              <a:t>Report</a:t>
+              <a:t>UART</a:t>
             </a:r>
             <a:endParaRPr lang="en-US" sz="4000" b="0" strike="noStrike" spc="-1" dirty="0">
               <a:solidFill>
@@ -18246,152 +23533,726 @@
           </a:p>
         </p:txBody>
       </p:sp>
-      <p:pic>
-        <p:nvPicPr>
-          <p:cNvPr id="6" name="圖片 5">
+      <p:sp>
+        <p:nvSpPr>
+          <p:cNvPr id="8" name="矩形 12">
             <a:extLst>
               <a:ext uri="{FF2B5EF4-FFF2-40B4-BE49-F238E27FC236}">
-                <a16:creationId xmlns:a16="http://schemas.microsoft.com/office/drawing/2014/main" id="{064D29A8-FD95-783A-AD15-F9C499BE20F3}"/>
+                <a16:creationId xmlns:a16="http://schemas.microsoft.com/office/drawing/2014/main" id="{9C7DCEBE-7CDA-83B2-3426-76BAAAE03F13}"/>
               </a:ext>
             </a:extLst>
           </p:cNvPr>
-          <p:cNvPicPr>
-            <a:picLocks noChangeAspect="1"/>
-          </p:cNvPicPr>
+          <p:cNvSpPr/>
           <p:nvPr/>
-        </p:nvPicPr>
-        <p:blipFill>
-          <a:blip r:embed="rId2">
-            <a:extLst>
-              <a:ext uri="{28A0092B-C50C-407E-A947-70E740481C1C}">
-                <a14:useLocalDpi xmlns:a14="http://schemas.microsoft.com/office/drawing/2010/main" val="0"/>
-              </a:ext>
-            </a:extLst>
-          </a:blip>
-          <a:srcRect l="437"/>
-          <a:stretch>
-            <a:fillRect/>
-          </a:stretch>
-        </p:blipFill>
+        </p:nvSpPr>
         <p:spPr>
-          <a:xfrm>
-            <a:off x="1171638" y="1466849"/>
-            <a:ext cx="4003618" cy="2683615"/>
+          <a:xfrm rot="16200000">
+            <a:off x="-1501832" y="3976268"/>
+            <a:ext cx="4367745" cy="254880"/>
           </a:xfrm>
           <a:prstGeom prst="rect">
             <a:avLst/>
           </a:prstGeom>
+          <a:solidFill>
+            <a:schemeClr val="tx1"/>
+          </a:solidFill>
+          <a:ln>
+            <a:solidFill>
+              <a:srgbClr val="516263"/>
+            </a:solidFill>
+            <a:round/>
+          </a:ln>
         </p:spPr>
-      </p:pic>
-      <p:pic>
-        <p:nvPicPr>
-          <p:cNvPr id="8" name="圖片 7">
+        <p:style>
+          <a:lnRef idx="2">
+            <a:schemeClr val="accent1">
+              <a:shade val="15000"/>
+            </a:schemeClr>
+          </a:lnRef>
+          <a:fillRef idx="1">
+            <a:schemeClr val="accent1"/>
+          </a:fillRef>
+          <a:effectRef idx="0">
+            <a:schemeClr val="accent1"/>
+          </a:effectRef>
+          <a:fontRef idx="minor"/>
+        </p:style>
+        <p:txBody>
+          <a:bodyPr lIns="90000" tIns="45000" rIns="90000" bIns="45000" anchor="ctr">
+            <a:noAutofit/>
+          </a:bodyPr>
+          <a:lstStyle/>
+          <a:p>
+            <a:pPr algn="ctr">
+              <a:lnSpc>
+                <a:spcPct val="100000"/>
+              </a:lnSpc>
+            </a:pPr>
+            <a:r>
+              <a:rPr lang="en-US" sz="2000" b="0" strike="noStrike" spc="-1">
+                <a:solidFill>
+                  <a:schemeClr val="lt1"/>
+                </a:solidFill>
+                <a:latin typeface="Arial"/>
+                <a:ea typeface="Arial"/>
+              </a:rPr>
+              <a:t>AXI Interconnect (BUS)</a:t>
+            </a:r>
+            <a:endParaRPr lang="en-US" sz="2000" b="0" strike="noStrike" spc="-1">
+              <a:solidFill>
+                <a:srgbClr val="FFFFFF"/>
+              </a:solidFill>
+              <a:latin typeface="Arial"/>
+            </a:endParaRPr>
+          </a:p>
+        </p:txBody>
+      </p:sp>
+      <p:sp>
+        <p:nvSpPr>
+          <p:cNvPr id="15" name="箭號: 上-下雙向 14">
             <a:extLst>
               <a:ext uri="{FF2B5EF4-FFF2-40B4-BE49-F238E27FC236}">
-                <a16:creationId xmlns:a16="http://schemas.microsoft.com/office/drawing/2014/main" id="{7E5BD6BE-DE73-149C-1877-D7A6E9C1DF36}"/>
+                <a16:creationId xmlns:a16="http://schemas.microsoft.com/office/drawing/2014/main" id="{03CC0EE7-32EF-09E8-560E-B31180B8CE08}"/>
               </a:ext>
             </a:extLst>
           </p:cNvPr>
-          <p:cNvPicPr>
-            <a:picLocks noChangeAspect="1"/>
-          </p:cNvPicPr>
+          <p:cNvSpPr/>
           <p:nvPr/>
-        </p:nvPicPr>
-        <p:blipFill>
-          <a:blip r:embed="rId3">
+        </p:nvSpPr>
+        <p:spPr>
+          <a:xfrm rot="16200000">
+            <a:off x="1233947" y="2016530"/>
+            <a:ext cx="429062" cy="902821"/>
+          </a:xfrm>
+          <a:prstGeom prst="upDownArrow">
+            <a:avLst/>
+          </a:prstGeom>
+          <a:solidFill>
+            <a:schemeClr val="tx1"/>
+          </a:solidFill>
+        </p:spPr>
+        <p:style>
+          <a:lnRef idx="2">
+            <a:schemeClr val="accent1">
+              <a:shade val="15000"/>
+            </a:schemeClr>
+          </a:lnRef>
+          <a:fillRef idx="1">
+            <a:schemeClr val="accent1"/>
+          </a:fillRef>
+          <a:effectRef idx="0">
+            <a:schemeClr val="accent1"/>
+          </a:effectRef>
+          <a:fontRef idx="minor">
+            <a:schemeClr val="lt1"/>
+          </a:fontRef>
+        </p:style>
+        <p:txBody>
+          <a:bodyPr rtlCol="0" anchor="ctr"/>
+          <a:lstStyle/>
+          <a:p>
+            <a:pPr algn="ctr"/>
+            <a:endParaRPr lang="en-US"/>
+          </a:p>
+        </p:txBody>
+      </p:sp>
+      <p:sp>
+        <p:nvSpPr>
+          <p:cNvPr id="16" name="箭號: 上-下雙向 15">
             <a:extLst>
-              <a:ext uri="{28A0092B-C50C-407E-A947-70E740481C1C}">
-                <a14:useLocalDpi xmlns:a14="http://schemas.microsoft.com/office/drawing/2010/main" val="0"/>
+              <a:ext uri="{FF2B5EF4-FFF2-40B4-BE49-F238E27FC236}">
+                <a16:creationId xmlns:a16="http://schemas.microsoft.com/office/drawing/2014/main" id="{095BAD7F-A724-D31B-0A50-76863E2DD21D}"/>
               </a:ext>
             </a:extLst>
-          </a:blip>
-          <a:stretch>
-            <a:fillRect/>
-          </a:stretch>
-        </p:blipFill>
+          </p:cNvPr>
+          <p:cNvSpPr/>
+          <p:nvPr/>
+        </p:nvSpPr>
+        <p:spPr>
+          <a:xfrm rot="16200000">
+            <a:off x="1233948" y="4995398"/>
+            <a:ext cx="429062" cy="902821"/>
+          </a:xfrm>
+          <a:prstGeom prst="upDownArrow">
+            <a:avLst/>
+          </a:prstGeom>
+          <a:solidFill>
+            <a:schemeClr val="tx1"/>
+          </a:solidFill>
+        </p:spPr>
+        <p:style>
+          <a:lnRef idx="2">
+            <a:schemeClr val="accent1">
+              <a:shade val="15000"/>
+            </a:schemeClr>
+          </a:lnRef>
+          <a:fillRef idx="1">
+            <a:schemeClr val="accent1"/>
+          </a:fillRef>
+          <a:effectRef idx="0">
+            <a:schemeClr val="accent1"/>
+          </a:effectRef>
+          <a:fontRef idx="minor">
+            <a:schemeClr val="lt1"/>
+          </a:fontRef>
+        </p:style>
+        <p:txBody>
+          <a:bodyPr rtlCol="0" anchor="ctr"/>
+          <a:lstStyle/>
+          <a:p>
+            <a:pPr algn="ctr"/>
+            <a:endParaRPr lang="en-US"/>
+          </a:p>
+        </p:txBody>
+      </p:sp>
+      <p:sp>
+        <p:nvSpPr>
+          <p:cNvPr id="18" name="矩形: 圓角 23">
+            <a:extLst>
+              <a:ext uri="{FF2B5EF4-FFF2-40B4-BE49-F238E27FC236}">
+                <a16:creationId xmlns:a16="http://schemas.microsoft.com/office/drawing/2014/main" id="{62093F4C-913F-6215-7CAB-2DDC0EB27C95}"/>
+              </a:ext>
+            </a:extLst>
+          </p:cNvPr>
+          <p:cNvSpPr/>
+          <p:nvPr/>
+        </p:nvSpPr>
         <p:spPr>
           <a:xfrm>
-            <a:off x="6226607" y="1466850"/>
-            <a:ext cx="5095875" cy="1676400"/>
+            <a:off x="1999995" y="1919835"/>
+            <a:ext cx="1209600" cy="1045080"/>
+          </a:xfrm>
+          <a:prstGeom prst="roundRect">
+            <a:avLst>
+              <a:gd name="adj" fmla="val 16667"/>
+            </a:avLst>
+          </a:prstGeom>
+          <a:solidFill>
+            <a:srgbClr val="92D050"/>
+          </a:solidFill>
+          <a:ln>
+            <a:solidFill>
+              <a:srgbClr val="516263"/>
+            </a:solidFill>
+            <a:round/>
+          </a:ln>
+        </p:spPr>
+        <p:style>
+          <a:lnRef idx="2">
+            <a:schemeClr val="accent1">
+              <a:shade val="15000"/>
+            </a:schemeClr>
+          </a:lnRef>
+          <a:fillRef idx="1">
+            <a:schemeClr val="accent1"/>
+          </a:fillRef>
+          <a:effectRef idx="0">
+            <a:schemeClr val="accent1"/>
+          </a:effectRef>
+          <a:fontRef idx="minor"/>
+        </p:style>
+        <p:txBody>
+          <a:bodyPr lIns="90000" tIns="45000" rIns="90000" bIns="45000" anchor="ctr">
+            <a:noAutofit/>
+          </a:bodyPr>
+          <a:lstStyle/>
+          <a:p>
+            <a:pPr algn="ctr">
+              <a:lnSpc>
+                <a:spcPct val="100000"/>
+              </a:lnSpc>
+            </a:pPr>
+            <a:r>
+              <a:rPr lang="en-US" sz="1400" b="0" strike="noStrike" spc="-1" dirty="0">
+                <a:solidFill>
+                  <a:schemeClr val="dk1"/>
+                </a:solidFill>
+                <a:latin typeface="Arial"/>
+                <a:ea typeface="Arial"/>
+              </a:rPr>
+              <a:t>AXI UART</a:t>
+            </a:r>
+          </a:p>
+          <a:p>
+            <a:pPr algn="ctr">
+              <a:lnSpc>
+                <a:spcPct val="100000"/>
+              </a:lnSpc>
+            </a:pPr>
+            <a:r>
+              <a:rPr lang="en-US" altLang="zh-TW" sz="1400" spc="-1" dirty="0">
+                <a:solidFill>
+                  <a:schemeClr val="dk1"/>
+                </a:solidFill>
+                <a:latin typeface="Arial"/>
+              </a:rPr>
+              <a:t>16550</a:t>
+            </a:r>
+            <a:endParaRPr lang="en-US" sz="1400" b="0" strike="noStrike" spc="-1" dirty="0">
+              <a:solidFill>
+                <a:srgbClr val="000000"/>
+              </a:solidFill>
+              <a:latin typeface="Arial"/>
+            </a:endParaRPr>
+          </a:p>
+        </p:txBody>
+      </p:sp>
+      <p:sp>
+        <p:nvSpPr>
+          <p:cNvPr id="20" name="矩形: 圓角 23">
+            <a:extLst>
+              <a:ext uri="{FF2B5EF4-FFF2-40B4-BE49-F238E27FC236}">
+                <a16:creationId xmlns:a16="http://schemas.microsoft.com/office/drawing/2014/main" id="{F69C6085-5589-54F3-377E-839D25086485}"/>
+              </a:ext>
+            </a:extLst>
+          </p:cNvPr>
+          <p:cNvSpPr/>
+          <p:nvPr/>
+        </p:nvSpPr>
+        <p:spPr>
+          <a:xfrm>
+            <a:off x="1999995" y="4924268"/>
+            <a:ext cx="1209600" cy="1045080"/>
+          </a:xfrm>
+          <a:prstGeom prst="roundRect">
+            <a:avLst>
+              <a:gd name="adj" fmla="val 16667"/>
+            </a:avLst>
+          </a:prstGeom>
+          <a:solidFill>
+            <a:srgbClr val="92D050"/>
+          </a:solidFill>
+          <a:ln>
+            <a:solidFill>
+              <a:srgbClr val="516263"/>
+            </a:solidFill>
+            <a:round/>
+          </a:ln>
+        </p:spPr>
+        <p:style>
+          <a:lnRef idx="2">
+            <a:schemeClr val="accent1">
+              <a:shade val="15000"/>
+            </a:schemeClr>
+          </a:lnRef>
+          <a:fillRef idx="1">
+            <a:schemeClr val="accent1"/>
+          </a:fillRef>
+          <a:effectRef idx="0">
+            <a:schemeClr val="accent1"/>
+          </a:effectRef>
+          <a:fontRef idx="minor"/>
+        </p:style>
+        <p:txBody>
+          <a:bodyPr lIns="90000" tIns="45000" rIns="90000" bIns="45000" anchor="ctr">
+            <a:noAutofit/>
+          </a:bodyPr>
+          <a:lstStyle/>
+          <a:p>
+            <a:pPr algn="ctr">
+              <a:lnSpc>
+                <a:spcPct val="100000"/>
+              </a:lnSpc>
+            </a:pPr>
+            <a:r>
+              <a:rPr lang="en-US" sz="1400" b="0" strike="noStrike" spc="-1" dirty="0">
+                <a:solidFill>
+                  <a:schemeClr val="dk1"/>
+                </a:solidFill>
+                <a:latin typeface="Arial"/>
+                <a:ea typeface="Arial"/>
+              </a:rPr>
+              <a:t>AXI UART</a:t>
+            </a:r>
+          </a:p>
+          <a:p>
+            <a:pPr algn="ctr">
+              <a:lnSpc>
+                <a:spcPct val="100000"/>
+              </a:lnSpc>
+            </a:pPr>
+            <a:r>
+              <a:rPr lang="en-US" altLang="zh-TW" sz="1400" spc="-1" dirty="0">
+                <a:solidFill>
+                  <a:schemeClr val="dk1"/>
+                </a:solidFill>
+                <a:latin typeface="Arial"/>
+              </a:rPr>
+              <a:t>16550 * 2</a:t>
+            </a:r>
+            <a:endParaRPr lang="en-US" sz="1400" b="0" strike="noStrike" spc="-1" dirty="0">
+              <a:solidFill>
+                <a:srgbClr val="000000"/>
+              </a:solidFill>
+              <a:latin typeface="Arial"/>
+            </a:endParaRPr>
+          </a:p>
+        </p:txBody>
+      </p:sp>
+      <p:sp>
+        <p:nvSpPr>
+          <p:cNvPr id="21" name="文字方塊 22">
+            <a:extLst>
+              <a:ext uri="{FF2B5EF4-FFF2-40B4-BE49-F238E27FC236}">
+                <a16:creationId xmlns:a16="http://schemas.microsoft.com/office/drawing/2014/main" id="{3BD316AC-9B5D-106F-D34F-74A87F33A669}"/>
+              </a:ext>
+            </a:extLst>
+          </p:cNvPr>
+          <p:cNvSpPr/>
+          <p:nvPr/>
+        </p:nvSpPr>
+        <p:spPr>
+          <a:xfrm>
+            <a:off x="3799002" y="2289213"/>
+            <a:ext cx="2064989" cy="306323"/>
           </a:xfrm>
           <a:prstGeom prst="rect">
             <a:avLst/>
           </a:prstGeom>
+          <a:noFill/>
+          <a:ln w="0">
+            <a:noFill/>
+          </a:ln>
         </p:spPr>
-      </p:pic>
-      <p:pic>
-        <p:nvPicPr>
-          <p:cNvPr id="10" name="圖片 9">
+        <p:style>
+          <a:lnRef idx="0">
+            <a:scrgbClr r="0" g="0" b="0"/>
+          </a:lnRef>
+          <a:fillRef idx="0">
+            <a:scrgbClr r="0" g="0" b="0"/>
+          </a:fillRef>
+          <a:effectRef idx="0">
+            <a:scrgbClr r="0" g="0" b="0"/>
+          </a:effectRef>
+          <a:fontRef idx="minor"/>
+        </p:style>
+        <p:txBody>
+          <a:bodyPr wrap="square" lIns="90000" tIns="45000" rIns="90000" bIns="45000" anchor="t">
+            <a:spAutoFit/>
+          </a:bodyPr>
+          <a:lstStyle/>
+          <a:p>
+            <a:pPr algn="ctr"/>
+            <a:r>
+              <a:rPr lang="en-US" sz="1400" b="0" strike="noStrike" spc="-1" dirty="0">
+                <a:solidFill>
+                  <a:srgbClr val="000000"/>
+                </a:solidFill>
+                <a:latin typeface="Arial"/>
+              </a:rPr>
+              <a:t>UART_R</a:t>
+            </a:r>
+            <a:r>
+              <a:rPr lang="en-US" sz="1400" spc="-1" dirty="0">
+                <a:solidFill>
+                  <a:srgbClr val="000000"/>
+                </a:solidFill>
+                <a:latin typeface="Arial"/>
+              </a:rPr>
+              <a:t>X / UART_TX</a:t>
+            </a:r>
+            <a:endParaRPr lang="en-US" sz="1400" b="0" strike="noStrike" spc="-1" dirty="0">
+              <a:solidFill>
+                <a:srgbClr val="000000"/>
+              </a:solidFill>
+              <a:latin typeface="Arial"/>
+            </a:endParaRPr>
+          </a:p>
+        </p:txBody>
+      </p:sp>
+      <p:cxnSp>
+        <p:nvCxnSpPr>
+          <p:cNvPr id="23" name="直線單箭頭接點 14">
             <a:extLst>
               <a:ext uri="{FF2B5EF4-FFF2-40B4-BE49-F238E27FC236}">
-                <a16:creationId xmlns:a16="http://schemas.microsoft.com/office/drawing/2014/main" id="{6604B8F8-797E-2C2F-ACA8-7C68F608AF60}"/>
+                <a16:creationId xmlns:a16="http://schemas.microsoft.com/office/drawing/2014/main" id="{53BD1B6E-8B14-61E5-B5D3-FA1BEEE1FC87}"/>
               </a:ext>
             </a:extLst>
           </p:cNvPr>
-          <p:cNvPicPr>
-            <a:picLocks noChangeAspect="1"/>
-          </p:cNvPicPr>
+          <p:cNvCxnSpPr>
+            <a:cxnSpLocks/>
+            <a:stCxn id="20" idx="3"/>
+            <a:endCxn id="35" idx="1"/>
+          </p:cNvCxnSpPr>
           <p:nvPr/>
-        </p:nvPicPr>
-        <p:blipFill>
-          <a:blip r:embed="rId4">
+        </p:nvCxnSpPr>
+        <p:spPr>
+          <a:xfrm>
+            <a:off x="3209595" y="5446808"/>
+            <a:ext cx="599508" cy="0"/>
+          </a:xfrm>
+          <a:prstGeom prst="straightConnector1">
+            <a:avLst/>
+          </a:prstGeom>
+          <a:ln w="0">
+            <a:solidFill>
+              <a:srgbClr val="000000"/>
+            </a:solidFill>
+            <a:tailEnd type="triangle" w="med" len="med"/>
+          </a:ln>
+        </p:spPr>
+      </p:cxnSp>
+      <p:cxnSp>
+        <p:nvCxnSpPr>
+          <p:cNvPr id="32" name="直線單箭頭接點 14">
             <a:extLst>
-              <a:ext uri="{28A0092B-C50C-407E-A947-70E740481C1C}">
-                <a14:useLocalDpi xmlns:a14="http://schemas.microsoft.com/office/drawing/2010/main" val="0"/>
+              <a:ext uri="{FF2B5EF4-FFF2-40B4-BE49-F238E27FC236}">
+                <a16:creationId xmlns:a16="http://schemas.microsoft.com/office/drawing/2014/main" id="{7D30910F-D8E7-2E59-AD42-746234317054}"/>
               </a:ext>
             </a:extLst>
-          </a:blip>
-          <a:stretch>
-            <a:fillRect/>
-          </a:stretch>
-        </p:blipFill>
+          </p:cNvPr>
+          <p:cNvCxnSpPr>
+            <a:cxnSpLocks/>
+            <a:stCxn id="18" idx="3"/>
+            <a:endCxn id="21" idx="1"/>
+          </p:cNvCxnSpPr>
+          <p:nvPr/>
+        </p:nvCxnSpPr>
         <p:spPr>
           <a:xfrm>
-            <a:off x="6226607" y="3143250"/>
-            <a:ext cx="5114925" cy="3714750"/>
+            <a:off x="3209595" y="2442375"/>
+            <a:ext cx="589407" cy="0"/>
+          </a:xfrm>
+          <a:prstGeom prst="straightConnector1">
+            <a:avLst/>
+          </a:prstGeom>
+          <a:ln w="0">
+            <a:solidFill>
+              <a:srgbClr val="000000"/>
+            </a:solidFill>
+            <a:tailEnd type="triangle" w="med" len="med"/>
+          </a:ln>
+        </p:spPr>
+      </p:cxnSp>
+      <p:sp>
+        <p:nvSpPr>
+          <p:cNvPr id="35" name="文字方塊 22">
+            <a:extLst>
+              <a:ext uri="{FF2B5EF4-FFF2-40B4-BE49-F238E27FC236}">
+                <a16:creationId xmlns:a16="http://schemas.microsoft.com/office/drawing/2014/main" id="{7CBA17DF-F2D8-945C-758E-C5116574D8E7}"/>
+              </a:ext>
+            </a:extLst>
+          </p:cNvPr>
+          <p:cNvSpPr/>
+          <p:nvPr/>
+        </p:nvSpPr>
+        <p:spPr>
+          <a:xfrm>
+            <a:off x="3809103" y="5293646"/>
+            <a:ext cx="1182012" cy="306323"/>
           </a:xfrm>
           <a:prstGeom prst="rect">
             <a:avLst/>
           </a:prstGeom>
+          <a:noFill/>
+          <a:ln w="0">
+            <a:noFill/>
+          </a:ln>
         </p:spPr>
-      </p:pic>
-      <p:pic>
-        <p:nvPicPr>
-          <p:cNvPr id="12" name="圖片 11">
+        <p:style>
+          <a:lnRef idx="0">
+            <a:scrgbClr r="0" g="0" b="0"/>
+          </a:lnRef>
+          <a:fillRef idx="0">
+            <a:scrgbClr r="0" g="0" b="0"/>
+          </a:fillRef>
+          <a:effectRef idx="0">
+            <a:scrgbClr r="0" g="0" b="0"/>
+          </a:effectRef>
+          <a:fontRef idx="minor"/>
+        </p:style>
+        <p:txBody>
+          <a:bodyPr wrap="square" lIns="90000" tIns="45000" rIns="90000" bIns="45000" anchor="t">
+            <a:spAutoFit/>
+          </a:bodyPr>
+          <a:lstStyle/>
+          <a:p>
+            <a:pPr algn="ctr"/>
+            <a:r>
+              <a:rPr lang="en-US" sz="1400" spc="-1" dirty="0">
+                <a:solidFill>
+                  <a:srgbClr val="000000"/>
+                </a:solidFill>
+              </a:rPr>
+              <a:t>USB-UART</a:t>
+            </a:r>
+            <a:endParaRPr lang="en-US" sz="1400" b="0" strike="noStrike" spc="-1" dirty="0">
+              <a:solidFill>
+                <a:srgbClr val="000000"/>
+              </a:solidFill>
+              <a:latin typeface="Arial"/>
+            </a:endParaRPr>
+          </a:p>
+        </p:txBody>
+      </p:sp>
+      <p:sp>
+        <p:nvSpPr>
+          <p:cNvPr id="41" name="文字方塊 40">
             <a:extLst>
               <a:ext uri="{FF2B5EF4-FFF2-40B4-BE49-F238E27FC236}">
-                <a16:creationId xmlns:a16="http://schemas.microsoft.com/office/drawing/2014/main" id="{9C0E433F-D3EC-6B12-9EAC-B42CBADB704D}"/>
+                <a16:creationId xmlns:a16="http://schemas.microsoft.com/office/drawing/2014/main" id="{10F817FE-BFD2-0EF6-3A08-B7A51E219AAA}"/>
               </a:ext>
             </a:extLst>
           </p:cNvPr>
-          <p:cNvPicPr>
-            <a:picLocks noChangeAspect="1"/>
-          </p:cNvPicPr>
+          <p:cNvSpPr txBox="1"/>
           <p:nvPr/>
-        </p:nvPicPr>
-        <p:blipFill>
-          <a:blip r:embed="rId5">
-            <a:extLst>
-              <a:ext uri="{28A0092B-C50C-407E-A947-70E740481C1C}">
-                <a14:useLocalDpi xmlns:a14="http://schemas.microsoft.com/office/drawing/2010/main" val="0"/>
-              </a:ext>
-            </a:extLst>
-          </a:blip>
-          <a:stretch>
-            <a:fillRect/>
-          </a:stretch>
-        </p:blipFill>
+        </p:nvSpPr>
         <p:spPr>
           <a:xfrm>
-            <a:off x="1171638" y="4197644"/>
-            <a:ext cx="4003617" cy="2660356"/>
+            <a:off x="5863991" y="2025573"/>
+            <a:ext cx="6094428" cy="2862322"/>
           </a:xfrm>
           <a:prstGeom prst="rect">
             <a:avLst/>
           </a:prstGeom>
+          <a:noFill/>
         </p:spPr>
-      </p:pic>
+        <p:txBody>
+          <a:bodyPr wrap="square">
+            <a:spAutoFit/>
+          </a:bodyPr>
+          <a:lstStyle/>
+          <a:p>
+            <a:pPr>
+              <a:buNone/>
+            </a:pPr>
+            <a:r>
+              <a:rPr lang="en-US" b="1" dirty="0">
+                <a:latin typeface="Times New Roman" panose="02020603050405020304" pitchFamily="18" charset="0"/>
+                <a:cs typeface="Times New Roman" panose="02020603050405020304" pitchFamily="18" charset="0"/>
+              </a:rPr>
+              <a:t>2 × AXI UART 16550 Instances:</a:t>
+            </a:r>
+            <a:endParaRPr lang="en-US" dirty="0">
+              <a:latin typeface="Times New Roman" panose="02020603050405020304" pitchFamily="18" charset="0"/>
+              <a:cs typeface="Times New Roman" panose="02020603050405020304" pitchFamily="18" charset="0"/>
+            </a:endParaRPr>
+          </a:p>
+          <a:p>
+            <a:pPr>
+              <a:buNone/>
+            </a:pPr>
+            <a:endParaRPr lang="en-US" b="1" dirty="0">
+              <a:latin typeface="Times New Roman" panose="02020603050405020304" pitchFamily="18" charset="0"/>
+              <a:cs typeface="Times New Roman" panose="02020603050405020304" pitchFamily="18" charset="0"/>
+            </a:endParaRPr>
+          </a:p>
+          <a:p>
+            <a:pPr>
+              <a:buNone/>
+            </a:pPr>
+            <a:r>
+              <a:rPr lang="en-US" b="1" dirty="0">
+                <a:latin typeface="Times New Roman" panose="02020603050405020304" pitchFamily="18" charset="0"/>
+                <a:cs typeface="Times New Roman" panose="02020603050405020304" pitchFamily="18" charset="0"/>
+              </a:rPr>
+              <a:t>uart_USB</a:t>
+            </a:r>
+            <a:r>
+              <a:rPr lang="zh-TW" altLang="en-US" b="1" dirty="0">
+                <a:latin typeface="Times New Roman" panose="02020603050405020304" pitchFamily="18" charset="0"/>
+                <a:cs typeface="Times New Roman" panose="02020603050405020304" pitchFamily="18" charset="0"/>
+              </a:rPr>
+              <a:t> </a:t>
+            </a:r>
+            <a:r>
+              <a:rPr lang="en-US" b="1" dirty="0">
+                <a:latin typeface="Times New Roman" panose="02020603050405020304" pitchFamily="18" charset="0"/>
+                <a:cs typeface="Times New Roman" panose="02020603050405020304" pitchFamily="18" charset="0"/>
+              </a:rPr>
+              <a:t>— Console / Debug</a:t>
+            </a:r>
+            <a:endParaRPr lang="en-US" dirty="0">
+              <a:latin typeface="Times New Roman" panose="02020603050405020304" pitchFamily="18" charset="0"/>
+              <a:cs typeface="Times New Roman" panose="02020603050405020304" pitchFamily="18" charset="0"/>
+            </a:endParaRPr>
+          </a:p>
+          <a:p>
+            <a:pPr lvl="1">
+              <a:buFont typeface="Arial" panose="020B0604020202020204" pitchFamily="34" charset="0"/>
+              <a:buChar char="•"/>
+            </a:pPr>
+            <a:r>
+              <a:rPr lang="en-US" dirty="0">
+                <a:latin typeface="Times New Roman" panose="02020603050405020304" pitchFamily="18" charset="0"/>
+                <a:cs typeface="Times New Roman" panose="02020603050405020304" pitchFamily="18" charset="0"/>
+              </a:rPr>
+              <a:t>Connected to on-board USB-UART via Micro-USB (J3)</a:t>
+            </a:r>
+          </a:p>
+          <a:p>
+            <a:pPr lvl="1">
+              <a:buFont typeface="Arial" panose="020B0604020202020204" pitchFamily="34" charset="0"/>
+              <a:buChar char="•"/>
+            </a:pPr>
+            <a:r>
+              <a:rPr lang="en-US" dirty="0">
+                <a:latin typeface="Times New Roman" panose="02020603050405020304" pitchFamily="18" charset="0"/>
+                <a:cs typeface="Times New Roman" panose="02020603050405020304" pitchFamily="18" charset="0"/>
+              </a:rPr>
+              <a:t>No DIP pin exposed — accessed through USB cable</a:t>
+            </a:r>
+          </a:p>
+          <a:p>
+            <a:pPr lvl="1">
+              <a:buFont typeface="Arial" panose="020B0604020202020204" pitchFamily="34" charset="0"/>
+              <a:buChar char="•"/>
+            </a:pPr>
+            <a:endParaRPr lang="en-US" dirty="0">
+              <a:latin typeface="Times New Roman" panose="02020603050405020304" pitchFamily="18" charset="0"/>
+              <a:cs typeface="Times New Roman" panose="02020603050405020304" pitchFamily="18" charset="0"/>
+            </a:endParaRPr>
+          </a:p>
+          <a:p>
+            <a:pPr>
+              <a:buNone/>
+            </a:pPr>
+            <a:r>
+              <a:rPr lang="en-US" b="1" dirty="0">
+                <a:latin typeface="Times New Roman" panose="02020603050405020304" pitchFamily="18" charset="0"/>
+                <a:cs typeface="Times New Roman" panose="02020603050405020304" pitchFamily="18" charset="0"/>
+              </a:rPr>
+              <a:t>uart_1 — External Communication</a:t>
+            </a:r>
+            <a:endParaRPr lang="en-US" dirty="0">
+              <a:latin typeface="Times New Roman" panose="02020603050405020304" pitchFamily="18" charset="0"/>
+              <a:cs typeface="Times New Roman" panose="02020603050405020304" pitchFamily="18" charset="0"/>
+            </a:endParaRPr>
+          </a:p>
+          <a:p>
+            <a:pPr lvl="1">
+              <a:buFont typeface="Arial" panose="020B0604020202020204" pitchFamily="34" charset="0"/>
+              <a:buChar char="•"/>
+            </a:pPr>
+            <a:r>
+              <a:rPr lang="en-US" dirty="0">
+                <a:latin typeface="Times New Roman" panose="02020603050405020304" pitchFamily="18" charset="0"/>
+                <a:cs typeface="Times New Roman" panose="02020603050405020304" pitchFamily="18" charset="0"/>
+              </a:rPr>
+              <a:t>TX/RX routed to DIP Pin 11 / Pin 12</a:t>
+            </a:r>
+          </a:p>
+          <a:p>
+            <a:pPr lvl="1">
+              <a:buFont typeface="Arial" panose="020B0604020202020204" pitchFamily="34" charset="0"/>
+              <a:buChar char="•"/>
+            </a:pPr>
+            <a:r>
+              <a:rPr lang="en-US" dirty="0">
+                <a:latin typeface="Times New Roman" panose="02020603050405020304" pitchFamily="18" charset="0"/>
+                <a:cs typeface="Times New Roman" panose="02020603050405020304" pitchFamily="18" charset="0"/>
+              </a:rPr>
+              <a:t>Available for connecting external devices (sensors, modules, another MCU)</a:t>
+            </a:r>
+          </a:p>
+        </p:txBody>
+      </p:sp>
     </p:spTree>
+    <p:extLst>
+      <p:ext uri="{BB962C8B-B14F-4D97-AF65-F5344CB8AC3E}">
+        <p14:creationId xmlns:p14="http://schemas.microsoft.com/office/powerpoint/2010/main" val="3879458922"/>
+      </p:ext>
+    </p:extLst>
   </p:cSld>
   <p:clrMapOvr>
     <a:masterClrMapping/>
